--- a/wm/Wealth_Manager_Foundational_Talktrack.pptx
+++ b/wm/Wealth_Manager_Foundational_Talktrack.pptx
@@ -142,14 +142,14 @@
   <p:extLst>
     <p:ext uri="{521415D9-36F7-43E2-AB2F-B90AF26B5E84}">
       <p14:sectionLst xmlns:p14="http://schemas.microsoft.com/office/powerpoint/2010/main">
-        <p14:section name="Opening" id="{5d0ac296-4fe3-4f1d-462b-209932ba39ad}">
+        <p14:section name="Opening" id="{0bcb2daa-6730-9870-de9e-3dbb417b052b}">
           <p14:sldIdLst>
             <p14:sldId id="256"/>
             <p14:sldId id="257"/>
             <p14:sldId id="258"/>
           </p14:sldIdLst>
         </p14:section>
-        <p14:section name="1 Data foundations" id="{9ce72528-ceb3-4c08-3e8c-68dee2f0d02f}">
+        <p14:section name="1 Data foundations" id="{018cf3d0-deb6-e432-b9f7-6c2540e9fe05}">
           <p14:sldIdLst>
             <p14:sldId id="259"/>
             <p14:sldId id="260"/>
@@ -158,7 +158,7 @@
             <p14:sldId id="263"/>
           </p14:sldIdLst>
         </p14:section>
-        <p14:section name="2 Management overview" id="{7648a458-7fbb-66f7-3706-8b8de6844696}">
+        <p14:section name="2 Management overview" id="{91ebbcf4-27d0-994f-b3bc-cecc183d3d7e}">
           <p14:sldIdLst>
             <p14:sldId id="264"/>
             <p14:sldId id="265"/>
@@ -170,7 +170,7 @@
             <p14:sldId id="271"/>
           </p14:sldIdLst>
         </p14:section>
-        <p14:section name="3 The wealth manager" id="{563b048c-4e9d-018c-67d1-a3dc1a669581}">
+        <p14:section name="3 The wealth manager" id="{7f1c33e5-d587-0750-b3f4-9207f525981d}">
           <p14:sldIdLst>
             <p14:sldId id="272"/>
             <p14:sldId id="273"/>
@@ -182,7 +182,7 @@
             <p14:sldId id="279"/>
           </p14:sldIdLst>
         </p14:section>
-        <p14:section name="4 One question, end to end" id="{eccdd685-a09b-820f-45b9-245ddebf2afc}">
+        <p14:section name="4 One question, end to end" id="{18faa738-a9c4-8e99-2065-753394db65c4}">
           <p14:sldIdLst>
             <p14:sldId id="280"/>
             <p14:sldId id="281"/>
@@ -194,7 +194,7 @@
             <p14:sldId id="287"/>
           </p14:sldIdLst>
         </p14:section>
-        <p14:section name="5 What this means for you" id="{86cd7d6b-cd45-54ff-2898-13fae26ba64e}">
+        <p14:section name="5 What this means for you" id="{ded446df-c700-3a4f-aaef-fe674093cdb4}">
           <p14:sldIdLst>
             <p14:sldId id="288"/>
             <p14:sldId id="289"/>
@@ -696,11 +696,10 @@
           <a:p>
             <a:r>
               <a:rPr lang="en-US" dirty="0"/>
-              <a:t>This is the picture I will come back to in the use case. Read it left to right.
-Source systems hold the data in whatever shape they were built. The taxonomy is the target every source is mapped to: one meaning per field, one master per concept, source identifiers kept for the trail.
-Foundational products clean up each core thing once. The party master, the account master, the brokerage book of record, the certified client-asset numbers. The taxonomy is their bill of materials: each lists the exact objects and attributes it uses, and the build fails if one does not exist.
-Consumer products are shaped around one team's decisions and built from the foundational ones. Household 360, the Reg BI evidence file, the advisor worklist. Here the taxonomy lets a product join across domains safely, because the keys and meanings already match.
-The semantic model publishes metrics once, with the filters that stop a number being added up wrongly, to dashboards, Excel and AI assistants. And the uses at the end are three: analytical, workflow and regulatory evidence. Every arrow points one way. Nothing on the right redefines what is on its left.</a:t>
+              <a:t>This is the operating model, drawn the same way it appears in the explorer's guide. Read it twice: data moves left to right, meaning moves top to bottom.
+The taxonomy is not the first step in a pipeline; it is the plane across the top that governs every layer. Follow the blue arrows down. Source systems are mapped to its attributes. Foundational products trace their lineage to its definitions, and when a product needs something the taxonomy lacks, the gap goes back up to the owning domain, which is the dashed arrow. The semantic layer takes its business names and metric definitions from it. And the business glossary shows it to the people consuming the numbers.
+Now left to right. Sources are ingested into data products, which have two tiers: foundational products conform a record or a number once, certify it and lock snapshots; consumer-aligned products build on them and are shaped for one function. From there, two paths. Products whose consumer is an analyst are published through the semantic layer, which exposes one governed set of certified metrics, conformed dimensions, hierarchies, synonyms and access rules to dashboards, Excel and AI assistants. Products whose consumer is a system or a process go straight into the workflow or the regulatory output: household and account data into the CRM and the advisor desktop, fee debits to the brokerage book of record, best-interest evidence to the compliance file.
+The point of the two paths is the last line of the caption: both take their numbers from the same certified products. The semantic layer exposes certified numbers; it never defines them.</a:t>
             </a:r>
             <a:endParaRPr lang="en-US" dirty="0"/>
           </a:p>
@@ -5270,7 +5269,7 @@
                   <a:schemeClr val="tx2"/>
                 </a:solidFill>
               </a:rPr>
-              <a:t>Five layers, and the taxonomy's one job in each</a:t>
+              <a:t>From taxonomy to consumption</a:t>
             </a:r>
             <a:endParaRPr lang="en-US" sz="2800" dirty="0"/>
           </a:p>
@@ -5278,24 +5277,26 @@
       </p:sp>
       <p:sp>
         <p:nvSpPr>
-          <p:cNvPr id="4" name="panel"/>
+          <p:cNvPr id="4" name="flow box"/>
           <p:cNvSpPr/>
           <p:nvPr/>
         </p:nvSpPr>
         <p:spPr>
           <a:xfrm>
-            <a:off x="548640" y="1417320"/>
-            <a:ext cx="2103120" cy="685800"/>
-          </a:xfrm>
-          <a:prstGeom prst="rect">
-            <a:avLst/>
+            <a:off x="716737" y="1551798"/>
+            <a:ext cx="10758221" cy="638769"/>
+          </a:xfrm>
+          <a:prstGeom prst="roundRect">
+            <a:avLst>
+              <a:gd name="adj" fmla="val 7158"/>
+            </a:avLst>
           </a:prstGeom>
           <a:solidFill>
-            <a:schemeClr val="accent6"/>
+            <a:srgbClr val="E3E9FC"/>
           </a:solidFill>
           <a:ln w="12700">
             <a:solidFill>
-              <a:schemeClr val="accent6"/>
+              <a:srgbClr val="1E49E2"/>
             </a:solidFill>
             <a:prstDash val="solid"/>
           </a:ln>
@@ -5309,31 +5310,31 @@
         </p:nvSpPr>
         <p:spPr>
           <a:xfrm>
-            <a:off x="685800" y="1508760"/>
-            <a:ext cx="457200" cy="502920"/>
-          </a:xfrm>
-          <a:prstGeom prst="rect">
-            <a:avLst/>
-          </a:prstGeom>
-          <a:noFill/>
-          <a:ln/>
-        </p:spPr>
-        <p:txBody>
-          <a:bodyPr wrap="square" lIns="0" tIns="0" rIns="0" bIns="0" rtlCol="0" anchor="ctr"/>
-          <a:lstStyle/>
-          <a:p>
-            <a:pPr indent="0" marL="0">
-              <a:buNone/>
-            </a:pPr>
-            <a:r>
-              <a:rPr lang="en-US" sz="2200" b="1" dirty="0">
-                <a:solidFill>
-                  <a:schemeClr val="bg1"/>
-                </a:solidFill>
-              </a:rPr>
-              <a:t>1</a:t>
-            </a:r>
-            <a:endParaRPr lang="en-US" sz="2200" dirty="0"/>
+            <a:off x="884834" y="1635846"/>
+            <a:ext cx="7564374" cy="201717"/>
+          </a:xfrm>
+          <a:prstGeom prst="rect">
+            <a:avLst/>
+          </a:prstGeom>
+          <a:noFill/>
+          <a:ln/>
+        </p:spPr>
+        <p:txBody>
+          <a:bodyPr wrap="square" lIns="0" tIns="0" rIns="0" bIns="0" rtlCol="0" anchor="t"/>
+          <a:lstStyle/>
+          <a:p>
+            <a:pPr indent="0" marL="0">
+              <a:buNone/>
+            </a:pPr>
+            <a:r>
+              <a:rPr lang="en-US" sz="1100" b="1" dirty="0">
+                <a:solidFill>
+                  <a:srgbClr val="1E49E2"/>
+                </a:solidFill>
+              </a:rPr>
+              <a:t>Enterprise Data Taxonomy: meaning and accountability</a:t>
+            </a:r>
+            <a:endParaRPr lang="en-US" sz="1100" dirty="0"/>
           </a:p>
         </p:txBody>
       </p:sp>
@@ -5345,56 +5346,54 @@
         </p:nvSpPr>
         <p:spPr>
           <a:xfrm>
-            <a:off x="1097280" y="1490472"/>
-            <a:ext cx="1463040" cy="548640"/>
-          </a:xfrm>
-          <a:prstGeom prst="rect">
-            <a:avLst/>
-          </a:prstGeom>
-          <a:noFill/>
-          <a:ln/>
-        </p:spPr>
-        <p:txBody>
-          <a:bodyPr wrap="square" lIns="0" tIns="0" rIns="0" bIns="0" rtlCol="0" anchor="ctr"/>
-          <a:lstStyle/>
-          <a:p>
-            <a:pPr indent="0" marL="0">
-              <a:buNone/>
-            </a:pPr>
-            <a:r>
-              <a:rPr lang="en-US" sz="1300" b="1" dirty="0">
-                <a:solidFill>
-                  <a:schemeClr val="bg1"/>
-                </a:solidFill>
-              </a:rPr>
-              <a:t>Source systems</a:t>
-            </a:r>
-            <a:endParaRPr lang="en-US" sz="1300" dirty="0"/>
-          </a:p>
-        </p:txBody>
-      </p:sp>
-      <p:sp>
-        <p:nvSpPr>
-          <p:cNvPr id="7" name="card"/>
+            <a:off x="884834" y="1871182"/>
+            <a:ext cx="8404860" cy="168097"/>
+          </a:xfrm>
+          <a:prstGeom prst="rect">
+            <a:avLst/>
+          </a:prstGeom>
+          <a:noFill/>
+          <a:ln/>
+        </p:spPr>
+        <p:txBody>
+          <a:bodyPr wrap="square" lIns="0" tIns="0" rIns="0" bIns="0" rtlCol="0" anchor="t"/>
+          <a:lstStyle/>
+          <a:p>
+            <a:pPr indent="0" marL="0">
+              <a:buNone/>
+            </a:pPr>
+            <a:r>
+              <a:rPr lang="en-US" sz="900" dirty="0">
+                <a:solidFill>
+                  <a:srgbClr val="1A2B3C"/>
+                </a:solidFill>
+              </a:rPr>
+              <a:t>Data Domains  &gt;  Family  &gt;  Object  &gt;  Attribute, each with an owner; CDEs; shared code lists; certified measure definitions</a:t>
+            </a:r>
+            <a:endParaRPr lang="en-US" sz="900" dirty="0"/>
+          </a:p>
+        </p:txBody>
+      </p:sp>
+      <p:sp>
+        <p:nvSpPr>
+          <p:cNvPr id="7" name="number"/>
           <p:cNvSpPr/>
           <p:nvPr/>
         </p:nvSpPr>
         <p:spPr>
           <a:xfrm>
-            <a:off x="548640" y="2103120"/>
-            <a:ext cx="2103120" cy="2148840"/>
-          </a:xfrm>
-          <a:prstGeom prst="roundRect">
-            <a:avLst>
-              <a:gd name="adj" fmla="val 3478"/>
-            </a:avLst>
+            <a:off x="11197598" y="1644251"/>
+            <a:ext cx="184907" cy="184907"/>
+          </a:xfrm>
+          <a:prstGeom prst="ellipse">
+            <a:avLst/>
           </a:prstGeom>
           <a:solidFill>
-            <a:schemeClr val="bg2"/>
+            <a:srgbClr val="1A2B3C"/>
           </a:solidFill>
           <a:ln w="12700">
             <a:solidFill>
-              <a:schemeClr val="bg2"/>
+              <a:srgbClr val="1A2B3C"/>
             </a:solidFill>
             <a:prstDash val="solid"/>
           </a:ln>
@@ -5408,8 +5407,68 @@
         </p:nvSpPr>
         <p:spPr>
           <a:xfrm>
-            <a:off x="685800" y="2240280"/>
-            <a:ext cx="1828800" cy="1920240"/>
+            <a:off x="11197598" y="1644251"/>
+            <a:ext cx="184907" cy="184907"/>
+          </a:xfrm>
+          <a:prstGeom prst="rect">
+            <a:avLst/>
+          </a:prstGeom>
+          <a:noFill/>
+          <a:ln/>
+        </p:spPr>
+        <p:txBody>
+          <a:bodyPr wrap="square" lIns="0" tIns="0" rIns="0" bIns="0" rtlCol="0" anchor="ctr"/>
+          <a:lstStyle/>
+          <a:p>
+            <a:pPr algn="ctr" indent="0" marL="0">
+              <a:buNone/>
+            </a:pPr>
+            <a:r>
+              <a:rPr lang="en-US" sz="800" b="1" dirty="0">
+                <a:solidFill>
+                  <a:srgbClr val="FFFFFF"/>
+                </a:solidFill>
+              </a:rPr>
+              <a:t>1</a:t>
+            </a:r>
+            <a:endParaRPr lang="en-US" sz="800" dirty="0"/>
+          </a:p>
+        </p:txBody>
+      </p:sp>
+      <p:sp>
+        <p:nvSpPr>
+          <p:cNvPr id="9" name="arrow"/>
+          <p:cNvSpPr/>
+          <p:nvPr/>
+        </p:nvSpPr>
+        <p:spPr>
+          <a:xfrm>
+            <a:off x="1641272" y="2190567"/>
+            <a:ext cx="0" cy="453862"/>
+          </a:xfrm>
+          <a:prstGeom prst="line">
+            <a:avLst/>
+          </a:prstGeom>
+          <a:noFill/>
+          <a:ln w="15875">
+            <a:solidFill>
+              <a:srgbClr val="1E49E2"/>
+            </a:solidFill>
+            <a:prstDash val="solid"/>
+            <a:tailEnd type="triangle"/>
+          </a:ln>
+        </p:spPr>
+      </p:sp>
+      <p:sp>
+        <p:nvSpPr>
+          <p:cNvPr id="10" name="text"/>
+          <p:cNvSpPr txBox="1"/>
+          <p:nvPr/>
+        </p:nvSpPr>
+        <p:spPr>
+          <a:xfrm>
+            <a:off x="1691701" y="2274616"/>
+            <a:ext cx="1260729" cy="336194"/>
           </a:xfrm>
           <a:prstGeom prst="rect">
             <a:avLst/>
@@ -5425,86 +5484,14 @@
               <a:buNone/>
             </a:pPr>
             <a:r>
-              <a:rPr lang="en-US" sz="1150" dirty="0">
-                <a:solidFill>
-                  <a:schemeClr val="tx1"/>
-                </a:solidFill>
-              </a:rPr>
-              <a:t>CRM, account opening, planning tool, recordkeeper, clearing and books, billing engine, surveillance</a:t>
-            </a:r>
-            <a:endParaRPr lang="en-US" sz="1150" dirty="0"/>
-          </a:p>
-        </p:txBody>
-      </p:sp>
-      <p:sp>
-        <p:nvSpPr>
-          <p:cNvPr id="9" name="text"/>
-          <p:cNvSpPr txBox="1"/>
-          <p:nvPr/>
-        </p:nvSpPr>
-        <p:spPr>
-          <a:xfrm>
-            <a:off x="548640" y="4434840"/>
-            <a:ext cx="2103120" cy="274320"/>
-          </a:xfrm>
-          <a:prstGeom prst="rect">
-            <a:avLst/>
-          </a:prstGeom>
-          <a:noFill/>
-          <a:ln/>
-        </p:spPr>
-        <p:txBody>
-          <a:bodyPr wrap="square" lIns="0" tIns="0" rIns="0" bIns="0" rtlCol="0" anchor="t"/>
-          <a:lstStyle/>
-          <a:p>
-            <a:pPr indent="0" marL="0">
-              <a:buNone/>
-            </a:pPr>
-            <a:r>
-              <a:rPr lang="en-US" sz="850" b="1" dirty="0">
-                <a:solidFill>
-                  <a:schemeClr val="accent6"/>
-                </a:solidFill>
-              </a:rPr>
-              <a:t>WHAT THE TAXONOMY DOES HERE</a:t>
-            </a:r>
-            <a:endParaRPr lang="en-US" sz="850" dirty="0"/>
-          </a:p>
-        </p:txBody>
-      </p:sp>
-      <p:sp>
-        <p:nvSpPr>
-          <p:cNvPr id="10" name="text"/>
-          <p:cNvSpPr txBox="1"/>
-          <p:nvPr/>
-        </p:nvSpPr>
-        <p:spPr>
-          <a:xfrm>
-            <a:off x="548640" y="4709160"/>
-            <a:ext cx="2103120" cy="914400"/>
-          </a:xfrm>
-          <a:prstGeom prst="rect">
-            <a:avLst/>
-          </a:prstGeom>
-          <a:noFill/>
-          <a:ln/>
-        </p:spPr>
-        <p:txBody>
-          <a:bodyPr wrap="square" lIns="0" tIns="0" rIns="0" bIns="0" rtlCol="0" anchor="t"/>
-          <a:lstStyle/>
-          <a:p>
-            <a:pPr indent="0" marL="0">
-              <a:buNone/>
-            </a:pPr>
-            <a:r>
-              <a:rPr lang="en-US" sz="1150" dirty="0">
-                <a:solidFill>
-                  <a:schemeClr val="tx2"/>
-                </a:solidFill>
-              </a:rPr>
-              <a:t>Mapping target: one meaning per field, one master per concept, source IDs kept</a:t>
-            </a:r>
-            <a:endParaRPr lang="en-US" sz="1150" dirty="0"/>
+              <a:rPr lang="en-US" sz="800" dirty="0">
+                <a:solidFill>
+                  <a:srgbClr val="1E49E2"/>
+                </a:solidFill>
+              </a:rPr>
+              <a:t>mapped to sources</a:t>
+            </a:r>
+            <a:endParaRPr lang="en-US" sz="800" dirty="0"/>
           </a:p>
         </p:txBody>
       </p:sp>
@@ -5516,18 +5503,260 @@
         </p:nvSpPr>
         <p:spPr>
           <a:xfrm>
-            <a:off x="2670048" y="1618488"/>
-            <a:ext cx="128016" cy="274320"/>
-          </a:xfrm>
-          <a:prstGeom prst="rightArrow">
-            <a:avLst/>
+            <a:off x="4078681" y="2190567"/>
+            <a:ext cx="0" cy="453862"/>
+          </a:xfrm>
+          <a:prstGeom prst="line">
+            <a:avLst/>
+          </a:prstGeom>
+          <a:noFill/>
+          <a:ln w="15875">
+            <a:solidFill>
+              <a:srgbClr val="1E49E2"/>
+            </a:solidFill>
+            <a:prstDash val="solid"/>
+            <a:tailEnd type="triangle"/>
+          </a:ln>
+        </p:spPr>
+      </p:sp>
+      <p:sp>
+        <p:nvSpPr>
+          <p:cNvPr id="12" name="text"/>
+          <p:cNvSpPr txBox="1"/>
+          <p:nvPr/>
+        </p:nvSpPr>
+        <p:spPr>
+          <a:xfrm>
+            <a:off x="4129110" y="2274616"/>
+            <a:ext cx="1260729" cy="336194"/>
+          </a:xfrm>
+          <a:prstGeom prst="rect">
+            <a:avLst/>
+          </a:prstGeom>
+          <a:noFill/>
+          <a:ln/>
+        </p:spPr>
+        <p:txBody>
+          <a:bodyPr wrap="square" lIns="0" tIns="0" rIns="0" bIns="0" rtlCol="0" anchor="t"/>
+          <a:lstStyle/>
+          <a:p>
+            <a:pPr indent="0" marL="0">
+              <a:buNone/>
+            </a:pPr>
+            <a:r>
+              <a:rPr lang="en-US" sz="800" dirty="0">
+                <a:solidFill>
+                  <a:srgbClr val="1E49E2"/>
+                </a:solidFill>
+              </a:rPr>
+              <a:t>traced to definitions</a:t>
+            </a:r>
+            <a:endParaRPr lang="en-US" sz="800" dirty="0"/>
+          </a:p>
+        </p:txBody>
+      </p:sp>
+      <p:sp>
+        <p:nvSpPr>
+          <p:cNvPr id="13" name="arrow"/>
+          <p:cNvSpPr/>
+          <p:nvPr/>
+        </p:nvSpPr>
+        <p:spPr>
+          <a:xfrm>
+            <a:off x="8146633" y="2190567"/>
+            <a:ext cx="0" cy="453862"/>
+          </a:xfrm>
+          <a:prstGeom prst="line">
+            <a:avLst/>
+          </a:prstGeom>
+          <a:noFill/>
+          <a:ln w="15875">
+            <a:solidFill>
+              <a:srgbClr val="1E49E2"/>
+            </a:solidFill>
+            <a:prstDash val="solid"/>
+            <a:tailEnd type="triangle"/>
+          </a:ln>
+        </p:spPr>
+      </p:sp>
+      <p:sp>
+        <p:nvSpPr>
+          <p:cNvPr id="14" name="text"/>
+          <p:cNvSpPr txBox="1"/>
+          <p:nvPr/>
+        </p:nvSpPr>
+        <p:spPr>
+          <a:xfrm>
+            <a:off x="8197063" y="2274616"/>
+            <a:ext cx="924535" cy="336194"/>
+          </a:xfrm>
+          <a:prstGeom prst="rect">
+            <a:avLst/>
+          </a:prstGeom>
+          <a:noFill/>
+          <a:ln/>
+        </p:spPr>
+        <p:txBody>
+          <a:bodyPr wrap="square" lIns="0" tIns="0" rIns="0" bIns="0" rtlCol="0" anchor="t"/>
+          <a:lstStyle/>
+          <a:p>
+            <a:pPr indent="0" marL="0">
+              <a:buNone/>
+            </a:pPr>
+            <a:r>
+              <a:rPr lang="en-US" sz="800" dirty="0">
+                <a:solidFill>
+                  <a:srgbClr val="1E49E2"/>
+                </a:solidFill>
+              </a:rPr>
+              <a:t>business names, metric definitions</a:t>
+            </a:r>
+            <a:endParaRPr lang="en-US" sz="800" dirty="0"/>
+          </a:p>
+        </p:txBody>
+      </p:sp>
+      <p:sp>
+        <p:nvSpPr>
+          <p:cNvPr id="15" name="arrow"/>
+          <p:cNvSpPr/>
+          <p:nvPr/>
+        </p:nvSpPr>
+        <p:spPr>
+          <a:xfrm>
+            <a:off x="10550423" y="2190567"/>
+            <a:ext cx="0" cy="453862"/>
+          </a:xfrm>
+          <a:prstGeom prst="line">
+            <a:avLst/>
+          </a:prstGeom>
+          <a:noFill/>
+          <a:ln w="15875">
+            <a:solidFill>
+              <a:srgbClr val="1E49E2"/>
+            </a:solidFill>
+            <a:prstDash val="solid"/>
+            <a:tailEnd type="triangle"/>
+          </a:ln>
+        </p:spPr>
+      </p:sp>
+      <p:sp>
+        <p:nvSpPr>
+          <p:cNvPr id="16" name="text"/>
+          <p:cNvSpPr txBox="1"/>
+          <p:nvPr/>
+        </p:nvSpPr>
+        <p:spPr>
+          <a:xfrm>
+            <a:off x="10600853" y="2274616"/>
+            <a:ext cx="1260729" cy="336194"/>
+          </a:xfrm>
+          <a:prstGeom prst="rect">
+            <a:avLst/>
+          </a:prstGeom>
+          <a:noFill/>
+          <a:ln/>
+        </p:spPr>
+        <p:txBody>
+          <a:bodyPr wrap="square" lIns="0" tIns="0" rIns="0" bIns="0" rtlCol="0" anchor="t"/>
+          <a:lstStyle/>
+          <a:p>
+            <a:pPr indent="0" marL="0">
+              <a:buNone/>
+            </a:pPr>
+            <a:r>
+              <a:rPr lang="en-US" sz="800" dirty="0">
+                <a:solidFill>
+                  <a:srgbClr val="1E49E2"/>
+                </a:solidFill>
+              </a:rPr>
+              <a:t>glossary</a:t>
+            </a:r>
+            <a:endParaRPr lang="en-US" sz="800" dirty="0"/>
+          </a:p>
+        </p:txBody>
+      </p:sp>
+      <p:sp>
+        <p:nvSpPr>
+          <p:cNvPr id="17" name="arrow"/>
+          <p:cNvSpPr/>
+          <p:nvPr/>
+        </p:nvSpPr>
+        <p:spPr>
+          <a:xfrm flipV="1">
+            <a:off x="5423459" y="2224187"/>
+            <a:ext cx="0" cy="420243"/>
+          </a:xfrm>
+          <a:prstGeom prst="line">
+            <a:avLst/>
+          </a:prstGeom>
+          <a:noFill/>
+          <a:ln w="15875">
+            <a:solidFill>
+              <a:srgbClr val="1E49E2"/>
+            </a:solidFill>
+            <a:prstDash val="dash"/>
+            <a:tailEnd type="triangle"/>
+          </a:ln>
+        </p:spPr>
+      </p:sp>
+      <p:sp>
+        <p:nvSpPr>
+          <p:cNvPr id="18" name="text"/>
+          <p:cNvSpPr txBox="1"/>
+          <p:nvPr/>
+        </p:nvSpPr>
+        <p:spPr>
+          <a:xfrm>
+            <a:off x="5473888" y="2274616"/>
+            <a:ext cx="1008583" cy="168097"/>
+          </a:xfrm>
+          <a:prstGeom prst="rect">
+            <a:avLst/>
+          </a:prstGeom>
+          <a:noFill/>
+          <a:ln/>
+        </p:spPr>
+        <p:txBody>
+          <a:bodyPr wrap="square" lIns="0" tIns="0" rIns="0" bIns="0" rtlCol="0" anchor="t"/>
+          <a:lstStyle/>
+          <a:p>
+            <a:pPr indent="0" marL="0">
+              <a:buNone/>
+            </a:pPr>
+            <a:r>
+              <a:rPr lang="en-US" sz="800" dirty="0">
+                <a:solidFill>
+                  <a:srgbClr val="1E49E2"/>
+                </a:solidFill>
+              </a:rPr>
+              <a:t>gaps sent back</a:t>
+            </a:r>
+            <a:endParaRPr lang="en-US" sz="800" dirty="0"/>
+          </a:p>
+        </p:txBody>
+      </p:sp>
+      <p:sp>
+        <p:nvSpPr>
+          <p:cNvPr id="19" name="flow box"/>
+          <p:cNvSpPr/>
+          <p:nvPr/>
+        </p:nvSpPr>
+        <p:spPr>
+          <a:xfrm>
+            <a:off x="716737" y="2678049"/>
+            <a:ext cx="1849069" cy="2101215"/>
+          </a:xfrm>
+          <a:prstGeom prst="roundRect">
+            <a:avLst>
+              <a:gd name="adj" fmla="val 2473"/>
+            </a:avLst>
           </a:prstGeom>
           <a:solidFill>
-            <a:schemeClr val="accent6"/>
+            <a:srgbClr val="EEF1F8"/>
           </a:solidFill>
           <a:ln w="12700">
             <a:solidFill>
-              <a:schemeClr val="accent6"/>
+              <a:srgbClr val="D5DBE7"/>
             </a:solidFill>
             <a:prstDash val="solid"/>
           </a:ln>
@@ -5535,24 +5764,352 @@
       </p:sp>
       <p:sp>
         <p:nvSpPr>
-          <p:cNvPr id="12" name="panel"/>
+          <p:cNvPr id="20" name="text"/>
+          <p:cNvSpPr txBox="1"/>
+          <p:nvPr/>
+        </p:nvSpPr>
+        <p:spPr>
+          <a:xfrm>
+            <a:off x="851215" y="2778907"/>
+            <a:ext cx="1680972" cy="168097"/>
+          </a:xfrm>
+          <a:prstGeom prst="rect">
+            <a:avLst/>
+          </a:prstGeom>
+          <a:noFill/>
+          <a:ln/>
+        </p:spPr>
+        <p:txBody>
+          <a:bodyPr wrap="square" lIns="0" tIns="0" rIns="0" bIns="0" rtlCol="0" anchor="t"/>
+          <a:lstStyle/>
+          <a:p>
+            <a:pPr indent="0" marL="0">
+              <a:buNone/>
+            </a:pPr>
+            <a:r>
+              <a:rPr lang="en-US" sz="1100" b="1" dirty="0">
+                <a:solidFill>
+                  <a:srgbClr val="1A2B3C"/>
+                </a:solidFill>
+              </a:rPr>
+              <a:t>Source systems</a:t>
+            </a:r>
+            <a:endParaRPr lang="en-US" sz="1100" dirty="0"/>
+          </a:p>
+        </p:txBody>
+      </p:sp>
+      <p:sp>
+        <p:nvSpPr>
+          <p:cNvPr id="21" name="text"/>
+          <p:cNvSpPr txBox="1"/>
+          <p:nvPr/>
+        </p:nvSpPr>
+        <p:spPr>
+          <a:xfrm>
+            <a:off x="851215" y="3031053"/>
+            <a:ext cx="1680972" cy="168097"/>
+          </a:xfrm>
+          <a:prstGeom prst="rect">
+            <a:avLst/>
+          </a:prstGeom>
+          <a:noFill/>
+          <a:ln/>
+        </p:spPr>
+        <p:txBody>
+          <a:bodyPr wrap="square" lIns="0" tIns="0" rIns="0" bIns="0" rtlCol="0" anchor="t"/>
+          <a:lstStyle/>
+          <a:p>
+            <a:pPr indent="0" marL="0">
+              <a:buNone/>
+            </a:pPr>
+            <a:r>
+              <a:rPr lang="en-US" sz="900" dirty="0">
+                <a:solidFill>
+                  <a:srgbClr val="535E6C"/>
+                </a:solidFill>
+              </a:rPr>
+              <a:t>CRM and onboarding</a:t>
+            </a:r>
+            <a:endParaRPr lang="en-US" sz="900" dirty="0"/>
+          </a:p>
+        </p:txBody>
+      </p:sp>
+      <p:sp>
+        <p:nvSpPr>
+          <p:cNvPr id="22" name="text"/>
+          <p:cNvSpPr txBox="1"/>
+          <p:nvPr/>
+        </p:nvSpPr>
+        <p:spPr>
+          <a:xfrm>
+            <a:off x="851215" y="3207555"/>
+            <a:ext cx="1680972" cy="168097"/>
+          </a:xfrm>
+          <a:prstGeom prst="rect">
+            <a:avLst/>
+          </a:prstGeom>
+          <a:noFill/>
+          <a:ln/>
+        </p:spPr>
+        <p:txBody>
+          <a:bodyPr wrap="square" lIns="0" tIns="0" rIns="0" bIns="0" rtlCol="0" anchor="t"/>
+          <a:lstStyle/>
+          <a:p>
+            <a:pPr indent="0" marL="0">
+              <a:buNone/>
+            </a:pPr>
+            <a:r>
+              <a:rPr lang="en-US" sz="900" dirty="0">
+                <a:solidFill>
+                  <a:srgbClr val="535E6C"/>
+                </a:solidFill>
+              </a:rPr>
+              <a:t>Brokerage books and records</a:t>
+            </a:r>
+            <a:endParaRPr lang="en-US" sz="900" dirty="0"/>
+          </a:p>
+        </p:txBody>
+      </p:sp>
+      <p:sp>
+        <p:nvSpPr>
+          <p:cNvPr id="23" name="text"/>
+          <p:cNvSpPr txBox="1"/>
+          <p:nvPr/>
+        </p:nvSpPr>
+        <p:spPr>
+          <a:xfrm>
+            <a:off x="851215" y="3384057"/>
+            <a:ext cx="1680972" cy="168097"/>
+          </a:xfrm>
+          <a:prstGeom prst="rect">
+            <a:avLst/>
+          </a:prstGeom>
+          <a:noFill/>
+          <a:ln/>
+        </p:spPr>
+        <p:txBody>
+          <a:bodyPr wrap="square" lIns="0" tIns="0" rIns="0" bIns="0" rtlCol="0" anchor="t"/>
+          <a:lstStyle/>
+          <a:p>
+            <a:pPr indent="0" marL="0">
+              <a:buNone/>
+            </a:pPr>
+            <a:r>
+              <a:rPr lang="en-US" sz="900" dirty="0">
+                <a:solidFill>
+                  <a:srgbClr val="535E6C"/>
+                </a:solidFill>
+              </a:rPr>
+              <a:t>Order management</a:t>
+            </a:r>
+            <a:endParaRPr lang="en-US" sz="900" dirty="0"/>
+          </a:p>
+        </p:txBody>
+      </p:sp>
+      <p:sp>
+        <p:nvSpPr>
+          <p:cNvPr id="24" name="text"/>
+          <p:cNvSpPr txBox="1"/>
+          <p:nvPr/>
+        </p:nvSpPr>
+        <p:spPr>
+          <a:xfrm>
+            <a:off x="851215" y="3560559"/>
+            <a:ext cx="1680972" cy="168097"/>
+          </a:xfrm>
+          <a:prstGeom prst="rect">
+            <a:avLst/>
+          </a:prstGeom>
+          <a:noFill/>
+          <a:ln/>
+        </p:spPr>
+        <p:txBody>
+          <a:bodyPr wrap="square" lIns="0" tIns="0" rIns="0" bIns="0" rtlCol="0" anchor="t"/>
+          <a:lstStyle/>
+          <a:p>
+            <a:pPr indent="0" marL="0">
+              <a:buNone/>
+            </a:pPr>
+            <a:r>
+              <a:rPr lang="en-US" sz="900" dirty="0">
+                <a:solidFill>
+                  <a:srgbClr val="535E6C"/>
+                </a:solidFill>
+              </a:rPr>
+              <a:t>Money movement hub</a:t>
+            </a:r>
+            <a:endParaRPr lang="en-US" sz="900" dirty="0"/>
+          </a:p>
+        </p:txBody>
+      </p:sp>
+      <p:sp>
+        <p:nvSpPr>
+          <p:cNvPr id="25" name="text"/>
+          <p:cNvSpPr txBox="1"/>
+          <p:nvPr/>
+        </p:nvSpPr>
+        <p:spPr>
+          <a:xfrm>
+            <a:off x="851215" y="3737061"/>
+            <a:ext cx="1680972" cy="168097"/>
+          </a:xfrm>
+          <a:prstGeom prst="rect">
+            <a:avLst/>
+          </a:prstGeom>
+          <a:noFill/>
+          <a:ln/>
+        </p:spPr>
+        <p:txBody>
+          <a:bodyPr wrap="square" lIns="0" tIns="0" rIns="0" bIns="0" rtlCol="0" anchor="t"/>
+          <a:lstStyle/>
+          <a:p>
+            <a:pPr indent="0" marL="0">
+              <a:buNone/>
+            </a:pPr>
+            <a:r>
+              <a:rPr lang="en-US" sz="900" dirty="0">
+                <a:solidFill>
+                  <a:srgbClr val="535E6C"/>
+                </a:solidFill>
+              </a:rPr>
+              <a:t>Transfer agent</a:t>
+            </a:r>
+            <a:endParaRPr lang="en-US" sz="900" dirty="0"/>
+          </a:p>
+        </p:txBody>
+      </p:sp>
+      <p:sp>
+        <p:nvSpPr>
+          <p:cNvPr id="26" name="text"/>
+          <p:cNvSpPr txBox="1"/>
+          <p:nvPr/>
+        </p:nvSpPr>
+        <p:spPr>
+          <a:xfrm>
+            <a:off x="851215" y="3913563"/>
+            <a:ext cx="1680972" cy="168097"/>
+          </a:xfrm>
+          <a:prstGeom prst="rect">
+            <a:avLst/>
+          </a:prstGeom>
+          <a:noFill/>
+          <a:ln/>
+        </p:spPr>
+        <p:txBody>
+          <a:bodyPr wrap="square" lIns="0" tIns="0" rIns="0" bIns="0" rtlCol="0" anchor="t"/>
+          <a:lstStyle/>
+          <a:p>
+            <a:pPr indent="0" marL="0">
+              <a:buNone/>
+            </a:pPr>
+            <a:r>
+              <a:rPr lang="en-US" sz="900" dirty="0">
+                <a:solidFill>
+                  <a:srgbClr val="535E6C"/>
+                </a:solidFill>
+              </a:rPr>
+              <a:t>Plan recordkeeping</a:t>
+            </a:r>
+            <a:endParaRPr lang="en-US" sz="900" dirty="0"/>
+          </a:p>
+        </p:txBody>
+      </p:sp>
+      <p:sp>
+        <p:nvSpPr>
+          <p:cNvPr id="27" name="text"/>
+          <p:cNvSpPr txBox="1"/>
+          <p:nvPr/>
+        </p:nvSpPr>
+        <p:spPr>
+          <a:xfrm>
+            <a:off x="851215" y="4090065"/>
+            <a:ext cx="1680972" cy="168097"/>
+          </a:xfrm>
+          <a:prstGeom prst="rect">
+            <a:avLst/>
+          </a:prstGeom>
+          <a:noFill/>
+          <a:ln/>
+        </p:spPr>
+        <p:txBody>
+          <a:bodyPr wrap="square" lIns="0" tIns="0" rIns="0" bIns="0" rtlCol="0" anchor="t"/>
+          <a:lstStyle/>
+          <a:p>
+            <a:pPr indent="0" marL="0">
+              <a:buNone/>
+            </a:pPr>
+            <a:r>
+              <a:rPr lang="en-US" sz="900" dirty="0">
+                <a:solidFill>
+                  <a:srgbClr val="535E6C"/>
+                </a:solidFill>
+              </a:rPr>
+              <a:t>Planning and billing engines</a:t>
+            </a:r>
+            <a:endParaRPr lang="en-US" sz="900" dirty="0"/>
+          </a:p>
+        </p:txBody>
+      </p:sp>
+      <p:sp>
+        <p:nvSpPr>
+          <p:cNvPr id="28" name="text"/>
+          <p:cNvSpPr txBox="1"/>
+          <p:nvPr/>
+        </p:nvSpPr>
+        <p:spPr>
+          <a:xfrm>
+            <a:off x="851215" y="4266568"/>
+            <a:ext cx="1680972" cy="168097"/>
+          </a:xfrm>
+          <a:prstGeom prst="rect">
+            <a:avLst/>
+          </a:prstGeom>
+          <a:noFill/>
+          <a:ln/>
+        </p:spPr>
+        <p:txBody>
+          <a:bodyPr wrap="square" lIns="0" tIns="0" rIns="0" bIns="0" rtlCol="0" anchor="t"/>
+          <a:lstStyle/>
+          <a:p>
+            <a:pPr indent="0" marL="0">
+              <a:buNone/>
+            </a:pPr>
+            <a:r>
+              <a:rPr lang="en-US" sz="900" dirty="0">
+                <a:solidFill>
+                  <a:srgbClr val="535E6C"/>
+                </a:solidFill>
+              </a:rPr>
+              <a:t>Contracts, compliance</a:t>
+            </a:r>
+            <a:endParaRPr lang="en-US" sz="900" dirty="0"/>
+          </a:p>
+        </p:txBody>
+      </p:sp>
+      <p:sp>
+        <p:nvSpPr>
+          <p:cNvPr id="29" name="flow box"/>
           <p:cNvSpPr/>
           <p:nvPr/>
         </p:nvSpPr>
         <p:spPr>
           <a:xfrm>
-            <a:off x="2807208" y="1417320"/>
-            <a:ext cx="2103120" cy="685800"/>
-          </a:xfrm>
-          <a:prstGeom prst="rect">
-            <a:avLst/>
+            <a:off x="3103717" y="2678049"/>
+            <a:ext cx="3530041" cy="2101215"/>
+          </a:xfrm>
+          <a:prstGeom prst="roundRect">
+            <a:avLst>
+              <a:gd name="adj" fmla="val 2176"/>
+            </a:avLst>
           </a:prstGeom>
           <a:solidFill>
-            <a:schemeClr val="accent1"/>
+            <a:srgbClr val="FFFFFF">
+              <a:alpha val="0"/>
+            </a:srgbClr>
           </a:solidFill>
           <a:ln w="12700">
             <a:solidFill>
-              <a:schemeClr val="accent1"/>
+              <a:srgbClr val="535E6C"/>
             </a:solidFill>
             <a:prstDash val="solid"/>
           </a:ln>
@@ -5560,98 +6117,60 @@
       </p:sp>
       <p:sp>
         <p:nvSpPr>
-          <p:cNvPr id="13" name="text"/>
-          <p:cNvSpPr txBox="1"/>
-          <p:nvPr/>
-        </p:nvSpPr>
-        <p:spPr>
-          <a:xfrm>
-            <a:off x="2944368" y="1508760"/>
-            <a:ext cx="457200" cy="502920"/>
-          </a:xfrm>
-          <a:prstGeom prst="rect">
-            <a:avLst/>
-          </a:prstGeom>
-          <a:noFill/>
-          <a:ln/>
-        </p:spPr>
-        <p:txBody>
-          <a:bodyPr wrap="square" lIns="0" tIns="0" rIns="0" bIns="0" rtlCol="0" anchor="ctr"/>
-          <a:lstStyle/>
-          <a:p>
-            <a:pPr indent="0" marL="0">
-              <a:buNone/>
-            </a:pPr>
-            <a:r>
-              <a:rPr lang="en-US" sz="2200" b="1" dirty="0">
-                <a:solidFill>
-                  <a:schemeClr val="bg1"/>
-                </a:solidFill>
-              </a:rPr>
-              <a:t>2</a:t>
-            </a:r>
-            <a:endParaRPr lang="en-US" sz="2200" dirty="0"/>
-          </a:p>
-        </p:txBody>
-      </p:sp>
-      <p:sp>
-        <p:nvSpPr>
-          <p:cNvPr id="14" name="text"/>
-          <p:cNvSpPr txBox="1"/>
-          <p:nvPr/>
-        </p:nvSpPr>
-        <p:spPr>
-          <a:xfrm>
-            <a:off x="3355848" y="1490472"/>
-            <a:ext cx="1463040" cy="548640"/>
-          </a:xfrm>
-          <a:prstGeom prst="rect">
-            <a:avLst/>
-          </a:prstGeom>
-          <a:noFill/>
-          <a:ln/>
-        </p:spPr>
-        <p:txBody>
-          <a:bodyPr wrap="square" lIns="0" tIns="0" rIns="0" bIns="0" rtlCol="0" anchor="ctr"/>
-          <a:lstStyle/>
-          <a:p>
-            <a:pPr indent="0" marL="0">
-              <a:buNone/>
-            </a:pPr>
-            <a:r>
-              <a:rPr lang="en-US" sz="1300" b="1" dirty="0">
-                <a:solidFill>
-                  <a:schemeClr val="bg1"/>
-                </a:solidFill>
-              </a:rPr>
-              <a:t>Taxonomy</a:t>
-            </a:r>
-            <a:endParaRPr lang="en-US" sz="1300" dirty="0"/>
-          </a:p>
-        </p:txBody>
-      </p:sp>
-      <p:sp>
-        <p:nvSpPr>
-          <p:cNvPr id="15" name="card"/>
+          <p:cNvPr id="30" name="text"/>
+          <p:cNvSpPr txBox="1"/>
+          <p:nvPr/>
+        </p:nvSpPr>
+        <p:spPr>
+          <a:xfrm>
+            <a:off x="3238195" y="2778907"/>
+            <a:ext cx="1680972" cy="168097"/>
+          </a:xfrm>
+          <a:prstGeom prst="rect">
+            <a:avLst/>
+          </a:prstGeom>
+          <a:noFill/>
+          <a:ln/>
+        </p:spPr>
+        <p:txBody>
+          <a:bodyPr wrap="square" lIns="0" tIns="0" rIns="0" bIns="0" rtlCol="0" anchor="t"/>
+          <a:lstStyle/>
+          <a:p>
+            <a:pPr indent="0" marL="0">
+              <a:buNone/>
+            </a:pPr>
+            <a:r>
+              <a:rPr lang="en-US" sz="1100" b="1" dirty="0">
+                <a:solidFill>
+                  <a:srgbClr val="1A2B3C"/>
+                </a:solidFill>
+              </a:rPr>
+              <a:t>Data products</a:t>
+            </a:r>
+            <a:endParaRPr lang="en-US" sz="1100" dirty="0"/>
+          </a:p>
+        </p:txBody>
+      </p:sp>
+      <p:sp>
+        <p:nvSpPr>
+          <p:cNvPr id="31" name="number"/>
           <p:cNvSpPr/>
           <p:nvPr/>
         </p:nvSpPr>
         <p:spPr>
           <a:xfrm>
-            <a:off x="2807208" y="2103120"/>
-            <a:ext cx="2103120" cy="2148840"/>
-          </a:xfrm>
-          <a:prstGeom prst="roundRect">
-            <a:avLst>
-              <a:gd name="adj" fmla="val 3478"/>
-            </a:avLst>
+            <a:off x="6356398" y="2762098"/>
+            <a:ext cx="184907" cy="184907"/>
+          </a:xfrm>
+          <a:prstGeom prst="ellipse">
+            <a:avLst/>
           </a:prstGeom>
           <a:solidFill>
-            <a:schemeClr val="bg2"/>
+            <a:srgbClr val="1A2B3C"/>
           </a:solidFill>
           <a:ln w="12700">
             <a:solidFill>
-              <a:schemeClr val="bg2"/>
+              <a:srgbClr val="1A2B3C"/>
             </a:solidFill>
             <a:prstDash val="solid"/>
           </a:ln>
@@ -5659,132 +6178,62 @@
       </p:sp>
       <p:sp>
         <p:nvSpPr>
-          <p:cNvPr id="16" name="text"/>
-          <p:cNvSpPr txBox="1"/>
-          <p:nvPr/>
-        </p:nvSpPr>
-        <p:spPr>
-          <a:xfrm>
-            <a:off x="2944368" y="2240280"/>
-            <a:ext cx="1828800" cy="1920240"/>
-          </a:xfrm>
-          <a:prstGeom prst="rect">
-            <a:avLst/>
-          </a:prstGeom>
-          <a:noFill/>
-          <a:ln/>
-        </p:spPr>
-        <p:txBody>
-          <a:bodyPr wrap="square" lIns="0" tIns="0" rIns="0" bIns="0" rtlCol="0" anchor="t"/>
-          <a:lstStyle/>
-          <a:p>
-            <a:pPr indent="0" marL="0">
-              <a:buNone/>
-            </a:pPr>
-            <a:r>
-              <a:rPr lang="en-US" sz="1150" dirty="0">
-                <a:solidFill>
-                  <a:schemeClr val="tx1"/>
-                </a:solidFill>
-              </a:rPr>
-              <a:t>50 Data Domains, 13,009 attributes, one owner each; shared code lists; decision log</a:t>
-            </a:r>
-            <a:endParaRPr lang="en-US" sz="1150" dirty="0"/>
-          </a:p>
-        </p:txBody>
-      </p:sp>
-      <p:sp>
-        <p:nvSpPr>
-          <p:cNvPr id="17" name="text"/>
-          <p:cNvSpPr txBox="1"/>
-          <p:nvPr/>
-        </p:nvSpPr>
-        <p:spPr>
-          <a:xfrm>
-            <a:off x="2807208" y="4434840"/>
-            <a:ext cx="2103120" cy="274320"/>
-          </a:xfrm>
-          <a:prstGeom prst="rect">
-            <a:avLst/>
-          </a:prstGeom>
-          <a:noFill/>
-          <a:ln/>
-        </p:spPr>
-        <p:txBody>
-          <a:bodyPr wrap="square" lIns="0" tIns="0" rIns="0" bIns="0" rtlCol="0" anchor="t"/>
-          <a:lstStyle/>
-          <a:p>
-            <a:pPr indent="0" marL="0">
-              <a:buNone/>
-            </a:pPr>
-            <a:r>
-              <a:rPr lang="en-US" sz="850" b="1" dirty="0">
-                <a:solidFill>
-                  <a:schemeClr val="accent6"/>
-                </a:solidFill>
-              </a:rPr>
-              <a:t>WHAT THE TAXONOMY DOES HERE</a:t>
-            </a:r>
-            <a:endParaRPr lang="en-US" sz="850" dirty="0"/>
-          </a:p>
-        </p:txBody>
-      </p:sp>
-      <p:sp>
-        <p:nvSpPr>
-          <p:cNvPr id="18" name="text"/>
-          <p:cNvSpPr txBox="1"/>
-          <p:nvPr/>
-        </p:nvSpPr>
-        <p:spPr>
-          <a:xfrm>
-            <a:off x="2807208" y="4709160"/>
-            <a:ext cx="2103120" cy="914400"/>
-          </a:xfrm>
-          <a:prstGeom prst="rect">
-            <a:avLst/>
-          </a:prstGeom>
-          <a:noFill/>
-          <a:ln/>
-        </p:spPr>
-        <p:txBody>
-          <a:bodyPr wrap="square" lIns="0" tIns="0" rIns="0" bIns="0" rtlCol="0" anchor="t"/>
-          <a:lstStyle/>
-          <a:p>
-            <a:pPr indent="0" marL="0">
-              <a:buNone/>
-            </a:pPr>
-            <a:r>
-              <a:rPr lang="en-US" sz="1150" dirty="0">
-                <a:solidFill>
-                  <a:schemeClr val="tx2"/>
-                </a:solidFill>
-              </a:rPr>
-              <a:t>The definitions and the owners everything else carries through</a:t>
-            </a:r>
-            <a:endParaRPr lang="en-US" sz="1150" dirty="0"/>
-          </a:p>
-        </p:txBody>
-      </p:sp>
-      <p:sp>
-        <p:nvSpPr>
-          <p:cNvPr id="19" name="arrow"/>
+          <p:cNvPr id="32" name="text"/>
+          <p:cNvSpPr txBox="1"/>
+          <p:nvPr/>
+        </p:nvSpPr>
+        <p:spPr>
+          <a:xfrm>
+            <a:off x="6356398" y="2762098"/>
+            <a:ext cx="184907" cy="184907"/>
+          </a:xfrm>
+          <a:prstGeom prst="rect">
+            <a:avLst/>
+          </a:prstGeom>
+          <a:noFill/>
+          <a:ln/>
+        </p:spPr>
+        <p:txBody>
+          <a:bodyPr wrap="square" lIns="0" tIns="0" rIns="0" bIns="0" rtlCol="0" anchor="ctr"/>
+          <a:lstStyle/>
+          <a:p>
+            <a:pPr algn="ctr" indent="0" marL="0">
+              <a:buNone/>
+            </a:pPr>
+            <a:r>
+              <a:rPr lang="en-US" sz="800" b="1" dirty="0">
+                <a:solidFill>
+                  <a:srgbClr val="FFFFFF"/>
+                </a:solidFill>
+              </a:rPr>
+              <a:t>2</a:t>
+            </a:r>
+            <a:endParaRPr lang="en-US" sz="800" dirty="0"/>
+          </a:p>
+        </p:txBody>
+      </p:sp>
+      <p:sp>
+        <p:nvSpPr>
+          <p:cNvPr id="33" name="flow box"/>
           <p:cNvSpPr/>
           <p:nvPr/>
         </p:nvSpPr>
         <p:spPr>
           <a:xfrm>
-            <a:off x="4928616" y="1618488"/>
-            <a:ext cx="128016" cy="274320"/>
-          </a:xfrm>
-          <a:prstGeom prst="rightArrow">
-            <a:avLst/>
+            <a:off x="3238195" y="3031053"/>
+            <a:ext cx="1428826" cy="1630543"/>
+          </a:xfrm>
+          <a:prstGeom prst="roundRect">
+            <a:avLst>
+              <a:gd name="adj" fmla="val 3200"/>
+            </a:avLst>
           </a:prstGeom>
           <a:solidFill>
-            <a:schemeClr val="accent6"/>
+            <a:srgbClr val="FFFFFF"/>
           </a:solidFill>
           <a:ln w="12700">
             <a:solidFill>
-              <a:schemeClr val="accent6"/>
+              <a:srgbClr val="D5DBE7"/>
             </a:solidFill>
             <a:prstDash val="solid"/>
           </a:ln>
@@ -5792,24 +6241,314 @@
       </p:sp>
       <p:sp>
         <p:nvSpPr>
-          <p:cNvPr id="20" name="panel"/>
+          <p:cNvPr id="34" name="text"/>
+          <p:cNvSpPr txBox="1"/>
+          <p:nvPr/>
+        </p:nvSpPr>
+        <p:spPr>
+          <a:xfrm>
+            <a:off x="3355863" y="3098292"/>
+            <a:ext cx="1680972" cy="168097"/>
+          </a:xfrm>
+          <a:prstGeom prst="rect">
+            <a:avLst/>
+          </a:prstGeom>
+          <a:noFill/>
+          <a:ln/>
+        </p:spPr>
+        <p:txBody>
+          <a:bodyPr wrap="square" lIns="0" tIns="0" rIns="0" bIns="0" rtlCol="0" anchor="t"/>
+          <a:lstStyle/>
+          <a:p>
+            <a:pPr indent="0" marL="0">
+              <a:buNone/>
+            </a:pPr>
+            <a:r>
+              <a:rPr lang="en-US" sz="900" b="1" dirty="0">
+                <a:solidFill>
+                  <a:srgbClr val="1A2B3C"/>
+                </a:solidFill>
+              </a:rPr>
+              <a:t>Foundational</a:t>
+            </a:r>
+            <a:endParaRPr lang="en-US" sz="900" dirty="0"/>
+          </a:p>
+        </p:txBody>
+      </p:sp>
+      <p:sp>
+        <p:nvSpPr>
+          <p:cNvPr id="35" name="text"/>
+          <p:cNvSpPr txBox="1"/>
+          <p:nvPr/>
+        </p:nvSpPr>
+        <p:spPr>
+          <a:xfrm>
+            <a:off x="3355863" y="3257984"/>
+            <a:ext cx="1680972" cy="168097"/>
+          </a:xfrm>
+          <a:prstGeom prst="rect">
+            <a:avLst/>
+          </a:prstGeom>
+          <a:noFill/>
+          <a:ln/>
+        </p:spPr>
+        <p:txBody>
+          <a:bodyPr wrap="square" lIns="0" tIns="0" rIns="0" bIns="0" rtlCol="0" anchor="t"/>
+          <a:lstStyle/>
+          <a:p>
+            <a:pPr indent="0" marL="0">
+              <a:buNone/>
+            </a:pPr>
+            <a:r>
+              <a:rPr lang="en-US" sz="800" dirty="0">
+                <a:solidFill>
+                  <a:srgbClr val="535E6C"/>
+                </a:solidFill>
+              </a:rPr>
+              <a:t>Conform once, certify, lock</a:t>
+            </a:r>
+            <a:endParaRPr lang="en-US" sz="800" dirty="0"/>
+          </a:p>
+        </p:txBody>
+      </p:sp>
+      <p:sp>
+        <p:nvSpPr>
+          <p:cNvPr id="36" name="text"/>
+          <p:cNvSpPr txBox="1"/>
+          <p:nvPr/>
+        </p:nvSpPr>
+        <p:spPr>
+          <a:xfrm>
+            <a:off x="3355863" y="3518535"/>
+            <a:ext cx="1260729" cy="134478"/>
+          </a:xfrm>
+          <a:prstGeom prst="rect">
+            <a:avLst/>
+          </a:prstGeom>
+          <a:noFill/>
+          <a:ln/>
+        </p:spPr>
+        <p:txBody>
+          <a:bodyPr wrap="square" lIns="0" tIns="0" rIns="0" bIns="0" rtlCol="0" anchor="t"/>
+          <a:lstStyle/>
+          <a:p>
+            <a:pPr indent="0" marL="0">
+              <a:buNone/>
+            </a:pPr>
+            <a:r>
+              <a:rPr lang="en-US" sz="800" b="1" dirty="0">
+                <a:solidFill>
+                  <a:srgbClr val="1A2B3C"/>
+                </a:solidFill>
+              </a:rPr>
+              <a:t>DP-240</a:t>
+            </a:r>
+            <a:endParaRPr lang="en-US" sz="800" dirty="0"/>
+          </a:p>
+        </p:txBody>
+      </p:sp>
+      <p:sp>
+        <p:nvSpPr>
+          <p:cNvPr id="37" name="text"/>
+          <p:cNvSpPr txBox="1"/>
+          <p:nvPr/>
+        </p:nvSpPr>
+        <p:spPr>
+          <a:xfrm>
+            <a:off x="3355863" y="3636203"/>
+            <a:ext cx="1302753" cy="134478"/>
+          </a:xfrm>
+          <a:prstGeom prst="rect">
+            <a:avLst/>
+          </a:prstGeom>
+          <a:noFill/>
+          <a:ln/>
+        </p:spPr>
+        <p:txBody>
+          <a:bodyPr wrap="square" lIns="0" tIns="0" rIns="0" bIns="0" rtlCol="0" anchor="t"/>
+          <a:lstStyle/>
+          <a:p>
+            <a:pPr indent="0" marL="0">
+              <a:buNone/>
+            </a:pPr>
+            <a:r>
+              <a:rPr lang="en-US" sz="800" dirty="0">
+                <a:solidFill>
+                  <a:srgbClr val="535E6C"/>
+                </a:solidFill>
+              </a:rPr>
+              <a:t>Party &amp; Role Master</a:t>
+            </a:r>
+            <a:endParaRPr lang="en-US" sz="800" dirty="0"/>
+          </a:p>
+        </p:txBody>
+      </p:sp>
+      <p:sp>
+        <p:nvSpPr>
+          <p:cNvPr id="38" name="text"/>
+          <p:cNvSpPr txBox="1"/>
+          <p:nvPr/>
+        </p:nvSpPr>
+        <p:spPr>
+          <a:xfrm>
+            <a:off x="3355863" y="3854729"/>
+            <a:ext cx="1260729" cy="134478"/>
+          </a:xfrm>
+          <a:prstGeom prst="rect">
+            <a:avLst/>
+          </a:prstGeom>
+          <a:noFill/>
+          <a:ln/>
+        </p:spPr>
+        <p:txBody>
+          <a:bodyPr wrap="square" lIns="0" tIns="0" rIns="0" bIns="0" rtlCol="0" anchor="t"/>
+          <a:lstStyle/>
+          <a:p>
+            <a:pPr indent="0" marL="0">
+              <a:buNone/>
+            </a:pPr>
+            <a:r>
+              <a:rPr lang="en-US" sz="800" b="1" dirty="0">
+                <a:solidFill>
+                  <a:srgbClr val="1A2B3C"/>
+                </a:solidFill>
+              </a:rPr>
+              <a:t>DP-093</a:t>
+            </a:r>
+            <a:endParaRPr lang="en-US" sz="800" dirty="0"/>
+          </a:p>
+        </p:txBody>
+      </p:sp>
+      <p:sp>
+        <p:nvSpPr>
+          <p:cNvPr id="39" name="text"/>
+          <p:cNvSpPr txBox="1"/>
+          <p:nvPr/>
+        </p:nvSpPr>
+        <p:spPr>
+          <a:xfrm>
+            <a:off x="3355863" y="3972397"/>
+            <a:ext cx="1302753" cy="134478"/>
+          </a:xfrm>
+          <a:prstGeom prst="rect">
+            <a:avLst/>
+          </a:prstGeom>
+          <a:noFill/>
+          <a:ln/>
+        </p:spPr>
+        <p:txBody>
+          <a:bodyPr wrap="square" lIns="0" tIns="0" rIns="0" bIns="0" rtlCol="0" anchor="t"/>
+          <a:lstStyle/>
+          <a:p>
+            <a:pPr indent="0" marL="0">
+              <a:buNone/>
+            </a:pPr>
+            <a:r>
+              <a:rPr lang="en-US" sz="800" dirty="0">
+                <a:solidFill>
+                  <a:srgbClr val="535E6C"/>
+                </a:solidFill>
+              </a:rPr>
+              <a:t>Account Master</a:t>
+            </a:r>
+            <a:endParaRPr lang="en-US" sz="800" dirty="0"/>
+          </a:p>
+        </p:txBody>
+      </p:sp>
+      <p:sp>
+        <p:nvSpPr>
+          <p:cNvPr id="40" name="text"/>
+          <p:cNvSpPr txBox="1"/>
+          <p:nvPr/>
+        </p:nvSpPr>
+        <p:spPr>
+          <a:xfrm>
+            <a:off x="3355863" y="4190924"/>
+            <a:ext cx="1260729" cy="134478"/>
+          </a:xfrm>
+          <a:prstGeom prst="rect">
+            <a:avLst/>
+          </a:prstGeom>
+          <a:noFill/>
+          <a:ln/>
+        </p:spPr>
+        <p:txBody>
+          <a:bodyPr wrap="square" lIns="0" tIns="0" rIns="0" bIns="0" rtlCol="0" anchor="t"/>
+          <a:lstStyle/>
+          <a:p>
+            <a:pPr indent="0" marL="0">
+              <a:buNone/>
+            </a:pPr>
+            <a:r>
+              <a:rPr lang="en-US" sz="800" b="1" dirty="0">
+                <a:solidFill>
+                  <a:srgbClr val="1A2B3C"/>
+                </a:solidFill>
+              </a:rPr>
+              <a:t>DP-008</a:t>
+            </a:r>
+            <a:endParaRPr lang="en-US" sz="800" dirty="0"/>
+          </a:p>
+        </p:txBody>
+      </p:sp>
+      <p:sp>
+        <p:nvSpPr>
+          <p:cNvPr id="41" name="text"/>
+          <p:cNvSpPr txBox="1"/>
+          <p:nvPr/>
+        </p:nvSpPr>
+        <p:spPr>
+          <a:xfrm>
+            <a:off x="3355863" y="4308592"/>
+            <a:ext cx="1302753" cy="134478"/>
+          </a:xfrm>
+          <a:prstGeom prst="rect">
+            <a:avLst/>
+          </a:prstGeom>
+          <a:noFill/>
+          <a:ln/>
+        </p:spPr>
+        <p:txBody>
+          <a:bodyPr wrap="square" lIns="0" tIns="0" rIns="0" bIns="0" rtlCol="0" anchor="t"/>
+          <a:lstStyle/>
+          <a:p>
+            <a:pPr indent="0" marL="0">
+              <a:buNone/>
+            </a:pPr>
+            <a:r>
+              <a:rPr lang="en-US" sz="800" dirty="0">
+                <a:solidFill>
+                  <a:srgbClr val="535E6C"/>
+                </a:solidFill>
+              </a:rPr>
+              <a:t>Client Assets &amp; NNA</a:t>
+            </a:r>
+            <a:endParaRPr lang="en-US" sz="800" dirty="0"/>
+          </a:p>
+        </p:txBody>
+      </p:sp>
+      <p:sp>
+        <p:nvSpPr>
+          <p:cNvPr id="42" name="flow box"/>
           <p:cNvSpPr/>
           <p:nvPr/>
         </p:nvSpPr>
         <p:spPr>
           <a:xfrm>
-            <a:off x="5065776" y="1417320"/>
-            <a:ext cx="2103120" cy="685800"/>
-          </a:xfrm>
-          <a:prstGeom prst="rect">
-            <a:avLst/>
+            <a:off x="5070455" y="3031053"/>
+            <a:ext cx="1428826" cy="1630543"/>
+          </a:xfrm>
+          <a:prstGeom prst="roundRect">
+            <a:avLst>
+              <a:gd name="adj" fmla="val 3200"/>
+            </a:avLst>
           </a:prstGeom>
           <a:solidFill>
-            <a:schemeClr val="accent2"/>
+            <a:srgbClr val="FFFFFF"/>
           </a:solidFill>
           <a:ln w="12700">
             <a:solidFill>
-              <a:schemeClr val="accent2"/>
+              <a:srgbClr val="D5DBE7"/>
             </a:solidFill>
             <a:prstDash val="solid"/>
           </a:ln>
@@ -5817,98 +6556,471 @@
       </p:sp>
       <p:sp>
         <p:nvSpPr>
-          <p:cNvPr id="21" name="text"/>
-          <p:cNvSpPr txBox="1"/>
-          <p:nvPr/>
-        </p:nvSpPr>
-        <p:spPr>
-          <a:xfrm>
-            <a:off x="5202936" y="1508760"/>
-            <a:ext cx="457200" cy="502920"/>
-          </a:xfrm>
-          <a:prstGeom prst="rect">
-            <a:avLst/>
-          </a:prstGeom>
-          <a:noFill/>
-          <a:ln/>
-        </p:spPr>
-        <p:txBody>
-          <a:bodyPr wrap="square" lIns="0" tIns="0" rIns="0" bIns="0" rtlCol="0" anchor="ctr"/>
-          <a:lstStyle/>
-          <a:p>
-            <a:pPr indent="0" marL="0">
-              <a:buNone/>
-            </a:pPr>
-            <a:r>
-              <a:rPr lang="en-US" sz="2200" b="1" dirty="0">
-                <a:solidFill>
-                  <a:schemeClr val="bg1"/>
-                </a:solidFill>
-              </a:rPr>
-              <a:t>3</a:t>
-            </a:r>
-            <a:endParaRPr lang="en-US" sz="2200" dirty="0"/>
-          </a:p>
-        </p:txBody>
-      </p:sp>
-      <p:sp>
-        <p:nvSpPr>
-          <p:cNvPr id="22" name="text"/>
-          <p:cNvSpPr txBox="1"/>
-          <p:nvPr/>
-        </p:nvSpPr>
-        <p:spPr>
-          <a:xfrm>
-            <a:off x="5614416" y="1490472"/>
-            <a:ext cx="1463040" cy="548640"/>
-          </a:xfrm>
-          <a:prstGeom prst="rect">
-            <a:avLst/>
-          </a:prstGeom>
-          <a:noFill/>
-          <a:ln/>
-        </p:spPr>
-        <p:txBody>
-          <a:bodyPr wrap="square" lIns="0" tIns="0" rIns="0" bIns="0" rtlCol="0" anchor="ctr"/>
-          <a:lstStyle/>
-          <a:p>
-            <a:pPr indent="0" marL="0">
-              <a:buNone/>
-            </a:pPr>
-            <a:r>
-              <a:rPr lang="en-US" sz="1300" b="1" dirty="0">
-                <a:solidFill>
-                  <a:schemeClr val="bg1"/>
-                </a:solidFill>
-              </a:rPr>
-              <a:t>Foundational products</a:t>
-            </a:r>
-            <a:endParaRPr lang="en-US" sz="1300" dirty="0"/>
-          </a:p>
-        </p:txBody>
-      </p:sp>
-      <p:sp>
-        <p:nvSpPr>
-          <p:cNvPr id="23" name="card"/>
+          <p:cNvPr id="43" name="text"/>
+          <p:cNvSpPr txBox="1"/>
+          <p:nvPr/>
+        </p:nvSpPr>
+        <p:spPr>
+          <a:xfrm>
+            <a:off x="5188123" y="3098292"/>
+            <a:ext cx="1680972" cy="168097"/>
+          </a:xfrm>
+          <a:prstGeom prst="rect">
+            <a:avLst/>
+          </a:prstGeom>
+          <a:noFill/>
+          <a:ln/>
+        </p:spPr>
+        <p:txBody>
+          <a:bodyPr wrap="square" lIns="0" tIns="0" rIns="0" bIns="0" rtlCol="0" anchor="t"/>
+          <a:lstStyle/>
+          <a:p>
+            <a:pPr indent="0" marL="0">
+              <a:buNone/>
+            </a:pPr>
+            <a:r>
+              <a:rPr lang="en-US" sz="900" b="1" dirty="0">
+                <a:solidFill>
+                  <a:srgbClr val="1A2B3C"/>
+                </a:solidFill>
+              </a:rPr>
+              <a:t>Consumer-aligned</a:t>
+            </a:r>
+            <a:endParaRPr lang="en-US" sz="900" dirty="0"/>
+          </a:p>
+        </p:txBody>
+      </p:sp>
+      <p:sp>
+        <p:nvSpPr>
+          <p:cNvPr id="44" name="text"/>
+          <p:cNvSpPr txBox="1"/>
+          <p:nvPr/>
+        </p:nvSpPr>
+        <p:spPr>
+          <a:xfrm>
+            <a:off x="5188123" y="3257984"/>
+            <a:ext cx="1680972" cy="168097"/>
+          </a:xfrm>
+          <a:prstGeom prst="rect">
+            <a:avLst/>
+          </a:prstGeom>
+          <a:noFill/>
+          <a:ln/>
+        </p:spPr>
+        <p:txBody>
+          <a:bodyPr wrap="square" lIns="0" tIns="0" rIns="0" bIns="0" rtlCol="0" anchor="t"/>
+          <a:lstStyle/>
+          <a:p>
+            <a:pPr indent="0" marL="0">
+              <a:buNone/>
+            </a:pPr>
+            <a:r>
+              <a:rPr lang="en-US" sz="800" dirty="0">
+                <a:solidFill>
+                  <a:srgbClr val="535E6C"/>
+                </a:solidFill>
+              </a:rPr>
+              <a:t>Shaped for one function</a:t>
+            </a:r>
+            <a:endParaRPr lang="en-US" sz="800" dirty="0"/>
+          </a:p>
+        </p:txBody>
+      </p:sp>
+      <p:sp>
+        <p:nvSpPr>
+          <p:cNvPr id="45" name="text"/>
+          <p:cNvSpPr txBox="1"/>
+          <p:nvPr/>
+        </p:nvSpPr>
+        <p:spPr>
+          <a:xfrm>
+            <a:off x="5188123" y="3518535"/>
+            <a:ext cx="1260729" cy="134478"/>
+          </a:xfrm>
+          <a:prstGeom prst="rect">
+            <a:avLst/>
+          </a:prstGeom>
+          <a:noFill/>
+          <a:ln/>
+        </p:spPr>
+        <p:txBody>
+          <a:bodyPr wrap="square" lIns="0" tIns="0" rIns="0" bIns="0" rtlCol="0" anchor="t"/>
+          <a:lstStyle/>
+          <a:p>
+            <a:pPr indent="0" marL="0">
+              <a:buNone/>
+            </a:pPr>
+            <a:r>
+              <a:rPr lang="en-US" sz="800" b="1" dirty="0">
+                <a:solidFill>
+                  <a:srgbClr val="1A2B3C"/>
+                </a:solidFill>
+              </a:rPr>
+              <a:t>DP-320</a:t>
+            </a:r>
+            <a:endParaRPr lang="en-US" sz="800" dirty="0"/>
+          </a:p>
+        </p:txBody>
+      </p:sp>
+      <p:sp>
+        <p:nvSpPr>
+          <p:cNvPr id="46" name="text"/>
+          <p:cNvSpPr txBox="1"/>
+          <p:nvPr/>
+        </p:nvSpPr>
+        <p:spPr>
+          <a:xfrm>
+            <a:off x="5188123" y="3636203"/>
+            <a:ext cx="1302753" cy="134478"/>
+          </a:xfrm>
+          <a:prstGeom prst="rect">
+            <a:avLst/>
+          </a:prstGeom>
+          <a:noFill/>
+          <a:ln/>
+        </p:spPr>
+        <p:txBody>
+          <a:bodyPr wrap="square" lIns="0" tIns="0" rIns="0" bIns="0" rtlCol="0" anchor="t"/>
+          <a:lstStyle/>
+          <a:p>
+            <a:pPr indent="0" marL="0">
+              <a:buNone/>
+            </a:pPr>
+            <a:r>
+              <a:rPr lang="en-US" sz="800" dirty="0">
+                <a:solidFill>
+                  <a:srgbClr val="535E6C"/>
+                </a:solidFill>
+              </a:rPr>
+              <a:t>Household 360</a:t>
+            </a:r>
+            <a:endParaRPr lang="en-US" sz="800" dirty="0"/>
+          </a:p>
+        </p:txBody>
+      </p:sp>
+      <p:sp>
+        <p:nvSpPr>
+          <p:cNvPr id="47" name="text"/>
+          <p:cNvSpPr txBox="1"/>
+          <p:nvPr/>
+        </p:nvSpPr>
+        <p:spPr>
+          <a:xfrm>
+            <a:off x="5188123" y="3854729"/>
+            <a:ext cx="1260729" cy="134478"/>
+          </a:xfrm>
+          <a:prstGeom prst="rect">
+            <a:avLst/>
+          </a:prstGeom>
+          <a:noFill/>
+          <a:ln/>
+        </p:spPr>
+        <p:txBody>
+          <a:bodyPr wrap="square" lIns="0" tIns="0" rIns="0" bIns="0" rtlCol="0" anchor="t"/>
+          <a:lstStyle/>
+          <a:p>
+            <a:pPr indent="0" marL="0">
+              <a:buNone/>
+            </a:pPr>
+            <a:r>
+              <a:rPr lang="en-US" sz="800" b="1" dirty="0">
+                <a:solidFill>
+                  <a:srgbClr val="1A2B3C"/>
+                </a:solidFill>
+              </a:rPr>
+              <a:t>DP-335</a:t>
+            </a:r>
+            <a:endParaRPr lang="en-US" sz="800" dirty="0"/>
+          </a:p>
+        </p:txBody>
+      </p:sp>
+      <p:sp>
+        <p:nvSpPr>
+          <p:cNvPr id="48" name="text"/>
+          <p:cNvSpPr txBox="1"/>
+          <p:nvPr/>
+        </p:nvSpPr>
+        <p:spPr>
+          <a:xfrm>
+            <a:off x="5188123" y="3972397"/>
+            <a:ext cx="1302753" cy="134478"/>
+          </a:xfrm>
+          <a:prstGeom prst="rect">
+            <a:avLst/>
+          </a:prstGeom>
+          <a:noFill/>
+          <a:ln/>
+        </p:spPr>
+        <p:txBody>
+          <a:bodyPr wrap="square" lIns="0" tIns="0" rIns="0" bIns="0" rtlCol="0" anchor="t"/>
+          <a:lstStyle/>
+          <a:p>
+            <a:pPr indent="0" marL="0">
+              <a:buNone/>
+            </a:pPr>
+            <a:r>
+              <a:rPr lang="en-US" sz="800" dirty="0">
+                <a:solidFill>
+                  <a:srgbClr val="535E6C"/>
+                </a:solidFill>
+              </a:rPr>
+              <a:t>Rollover &amp; PTE Evidence</a:t>
+            </a:r>
+            <a:endParaRPr lang="en-US" sz="800" dirty="0"/>
+          </a:p>
+        </p:txBody>
+      </p:sp>
+      <p:sp>
+        <p:nvSpPr>
+          <p:cNvPr id="49" name="text"/>
+          <p:cNvSpPr txBox="1"/>
+          <p:nvPr/>
+        </p:nvSpPr>
+        <p:spPr>
+          <a:xfrm>
+            <a:off x="5188123" y="4190924"/>
+            <a:ext cx="1260729" cy="134478"/>
+          </a:xfrm>
+          <a:prstGeom prst="rect">
+            <a:avLst/>
+          </a:prstGeom>
+          <a:noFill/>
+          <a:ln/>
+        </p:spPr>
+        <p:txBody>
+          <a:bodyPr wrap="square" lIns="0" tIns="0" rIns="0" bIns="0" rtlCol="0" anchor="t"/>
+          <a:lstStyle/>
+          <a:p>
+            <a:pPr indent="0" marL="0">
+              <a:buNone/>
+            </a:pPr>
+            <a:r>
+              <a:rPr lang="en-US" sz="800" b="1" dirty="0">
+                <a:solidFill>
+                  <a:srgbClr val="1A2B3C"/>
+                </a:solidFill>
+              </a:rPr>
+              <a:t>DP-241</a:t>
+            </a:r>
+            <a:endParaRPr lang="en-US" sz="800" dirty="0"/>
+          </a:p>
+        </p:txBody>
+      </p:sp>
+      <p:sp>
+        <p:nvSpPr>
+          <p:cNvPr id="50" name="text"/>
+          <p:cNvSpPr txBox="1"/>
+          <p:nvPr/>
+        </p:nvSpPr>
+        <p:spPr>
+          <a:xfrm>
+            <a:off x="5188123" y="4308592"/>
+            <a:ext cx="1302753" cy="134478"/>
+          </a:xfrm>
+          <a:prstGeom prst="rect">
+            <a:avLst/>
+          </a:prstGeom>
+          <a:noFill/>
+          <a:ln/>
+        </p:spPr>
+        <p:txBody>
+          <a:bodyPr wrap="square" lIns="0" tIns="0" rIns="0" bIns="0" rtlCol="0" anchor="t"/>
+          <a:lstStyle/>
+          <a:p>
+            <a:pPr indent="0" marL="0">
+              <a:buNone/>
+            </a:pPr>
+            <a:r>
+              <a:rPr lang="en-US" sz="800" dirty="0">
+                <a:solidFill>
+                  <a:srgbClr val="535E6C"/>
+                </a:solidFill>
+              </a:rPr>
+              <a:t>Firm AUM Reconciliation</a:t>
+            </a:r>
+            <a:endParaRPr lang="en-US" sz="800" dirty="0"/>
+          </a:p>
+        </p:txBody>
+      </p:sp>
+      <p:sp>
+        <p:nvSpPr>
+          <p:cNvPr id="51" name="arrow"/>
           <p:cNvSpPr/>
           <p:nvPr/>
         </p:nvSpPr>
         <p:spPr>
           <a:xfrm>
-            <a:off x="5065776" y="2103120"/>
-            <a:ext cx="2103120" cy="2148840"/>
+            <a:off x="4667021" y="3846325"/>
+            <a:ext cx="386624" cy="0"/>
+          </a:xfrm>
+          <a:prstGeom prst="line">
+            <a:avLst/>
+          </a:prstGeom>
+          <a:noFill/>
+          <a:ln w="15875">
+            <a:solidFill>
+              <a:srgbClr val="1A2B3C"/>
+            </a:solidFill>
+            <a:prstDash val="solid"/>
+            <a:tailEnd type="triangle"/>
+          </a:ln>
+        </p:spPr>
+      </p:sp>
+      <p:sp>
+        <p:nvSpPr>
+          <p:cNvPr id="52" name="text"/>
+          <p:cNvSpPr txBox="1"/>
+          <p:nvPr/>
+        </p:nvSpPr>
+        <p:spPr>
+          <a:xfrm>
+            <a:off x="4667021" y="3669822"/>
+            <a:ext cx="386624" cy="168097"/>
+          </a:xfrm>
+          <a:prstGeom prst="rect">
+            <a:avLst/>
+          </a:prstGeom>
+          <a:noFill/>
+          <a:ln/>
+        </p:spPr>
+        <p:txBody>
+          <a:bodyPr wrap="square" lIns="0" tIns="0" rIns="0" bIns="0" rtlCol="0" anchor="t"/>
+          <a:lstStyle/>
+          <a:p>
+            <a:pPr algn="ctr" indent="0" marL="0">
+              <a:buNone/>
+            </a:pPr>
+            <a:r>
+              <a:rPr lang="en-US" sz="800" dirty="0">
+                <a:solidFill>
+                  <a:srgbClr val="535E6C"/>
+                </a:solidFill>
+              </a:rPr>
+              <a:t>builds</a:t>
+            </a:r>
+            <a:endParaRPr lang="en-US" sz="800" dirty="0"/>
+          </a:p>
+        </p:txBody>
+      </p:sp>
+      <p:sp>
+        <p:nvSpPr>
+          <p:cNvPr id="53" name="text"/>
+          <p:cNvSpPr txBox="1"/>
+          <p:nvPr/>
+        </p:nvSpPr>
+        <p:spPr>
+          <a:xfrm>
+            <a:off x="4667021" y="3879944"/>
+            <a:ext cx="386624" cy="168097"/>
+          </a:xfrm>
+          <a:prstGeom prst="rect">
+            <a:avLst/>
+          </a:prstGeom>
+          <a:noFill/>
+          <a:ln/>
+        </p:spPr>
+        <p:txBody>
+          <a:bodyPr wrap="square" lIns="0" tIns="0" rIns="0" bIns="0" rtlCol="0" anchor="t"/>
+          <a:lstStyle/>
+          <a:p>
+            <a:pPr algn="ctr" indent="0" marL="0">
+              <a:buNone/>
+            </a:pPr>
+            <a:r>
+              <a:rPr lang="en-US" sz="800" dirty="0">
+                <a:solidFill>
+                  <a:srgbClr val="535E6C"/>
+                </a:solidFill>
+              </a:rPr>
+              <a:t>on</a:t>
+            </a:r>
+            <a:endParaRPr lang="en-US" sz="800" dirty="0"/>
+          </a:p>
+        </p:txBody>
+      </p:sp>
+      <p:sp>
+        <p:nvSpPr>
+          <p:cNvPr id="54" name="flow box"/>
+          <p:cNvSpPr/>
+          <p:nvPr/>
+        </p:nvSpPr>
+        <p:spPr>
+          <a:xfrm>
+            <a:off x="7222099" y="2678049"/>
+            <a:ext cx="1849069" cy="1344778"/>
           </a:xfrm>
           <a:prstGeom prst="roundRect">
             <a:avLst>
-              <a:gd name="adj" fmla="val 3478"/>
+              <a:gd name="adj" fmla="val 3400"/>
             </a:avLst>
           </a:prstGeom>
           <a:solidFill>
-            <a:schemeClr val="bg2"/>
+            <a:srgbClr val="FFFFFF"/>
+          </a:solidFill>
+          <a:ln w="19050">
+            <a:solidFill>
+              <a:srgbClr val="1A2B3C"/>
+            </a:solidFill>
+            <a:prstDash val="solid"/>
+          </a:ln>
+        </p:spPr>
+      </p:sp>
+      <p:sp>
+        <p:nvSpPr>
+          <p:cNvPr id="55" name="text"/>
+          <p:cNvSpPr txBox="1"/>
+          <p:nvPr/>
+        </p:nvSpPr>
+        <p:spPr>
+          <a:xfrm>
+            <a:off x="7356577" y="2778907"/>
+            <a:ext cx="1680972" cy="168097"/>
+          </a:xfrm>
+          <a:prstGeom prst="rect">
+            <a:avLst/>
+          </a:prstGeom>
+          <a:noFill/>
+          <a:ln/>
+        </p:spPr>
+        <p:txBody>
+          <a:bodyPr wrap="square" lIns="0" tIns="0" rIns="0" bIns="0" rtlCol="0" anchor="t"/>
+          <a:lstStyle/>
+          <a:p>
+            <a:pPr indent="0" marL="0">
+              <a:buNone/>
+            </a:pPr>
+            <a:r>
+              <a:rPr lang="en-US" sz="1100" b="1" dirty="0">
+                <a:solidFill>
+                  <a:srgbClr val="1A2B3C"/>
+                </a:solidFill>
+              </a:rPr>
+              <a:t>Semantic layer</a:t>
+            </a:r>
+            <a:endParaRPr lang="en-US" sz="1100" dirty="0"/>
+          </a:p>
+        </p:txBody>
+      </p:sp>
+      <p:sp>
+        <p:nvSpPr>
+          <p:cNvPr id="56" name="number"/>
+          <p:cNvSpPr/>
+          <p:nvPr/>
+        </p:nvSpPr>
+        <p:spPr>
+          <a:xfrm>
+            <a:off x="8793808" y="2762098"/>
+            <a:ext cx="184907" cy="184907"/>
+          </a:xfrm>
+          <a:prstGeom prst="ellipse">
+            <a:avLst/>
+          </a:prstGeom>
+          <a:solidFill>
+            <a:srgbClr val="1A2B3C"/>
           </a:solidFill>
           <a:ln w="12700">
             <a:solidFill>
-              <a:schemeClr val="bg2"/>
+              <a:srgbClr val="1A2B3C"/>
             </a:solidFill>
             <a:prstDash val="solid"/>
           </a:ln>
@@ -5916,14 +7028,50 @@
       </p:sp>
       <p:sp>
         <p:nvSpPr>
-          <p:cNvPr id="24" name="text"/>
-          <p:cNvSpPr txBox="1"/>
-          <p:nvPr/>
-        </p:nvSpPr>
-        <p:spPr>
-          <a:xfrm>
-            <a:off x="5202936" y="2240280"/>
-            <a:ext cx="1828800" cy="1920240"/>
+          <p:cNvPr id="57" name="text"/>
+          <p:cNvSpPr txBox="1"/>
+          <p:nvPr/>
+        </p:nvSpPr>
+        <p:spPr>
+          <a:xfrm>
+            <a:off x="8793808" y="2762098"/>
+            <a:ext cx="184907" cy="184907"/>
+          </a:xfrm>
+          <a:prstGeom prst="rect">
+            <a:avLst/>
+          </a:prstGeom>
+          <a:noFill/>
+          <a:ln/>
+        </p:spPr>
+        <p:txBody>
+          <a:bodyPr wrap="square" lIns="0" tIns="0" rIns="0" bIns="0" rtlCol="0" anchor="ctr"/>
+          <a:lstStyle/>
+          <a:p>
+            <a:pPr algn="ctr" indent="0" marL="0">
+              <a:buNone/>
+            </a:pPr>
+            <a:r>
+              <a:rPr lang="en-US" sz="800" b="1" dirty="0">
+                <a:solidFill>
+                  <a:srgbClr val="FFFFFF"/>
+                </a:solidFill>
+              </a:rPr>
+              <a:t>4</a:t>
+            </a:r>
+            <a:endParaRPr lang="en-US" sz="800" dirty="0"/>
+          </a:p>
+        </p:txBody>
+      </p:sp>
+      <p:sp>
+        <p:nvSpPr>
+          <p:cNvPr id="58" name="text"/>
+          <p:cNvSpPr txBox="1"/>
+          <p:nvPr/>
+        </p:nvSpPr>
+        <p:spPr>
+          <a:xfrm>
+            <a:off x="7356577" y="3031053"/>
+            <a:ext cx="1680972" cy="168097"/>
           </a:xfrm>
           <a:prstGeom prst="rect">
             <a:avLst/>
@@ -5939,27 +7087,27 @@
               <a:buNone/>
             </a:pPr>
             <a:r>
-              <a:rPr lang="en-US" sz="1150" dirty="0">
-                <a:solidFill>
-                  <a:schemeClr val="tx1"/>
-                </a:solidFill>
-              </a:rPr>
-              <a:t>Masters, books of record and certified numbers: party, account, holdings, advice record, Client Assets</a:t>
-            </a:r>
-            <a:endParaRPr lang="en-US" sz="1150" dirty="0"/>
-          </a:p>
-        </p:txBody>
-      </p:sp>
-      <p:sp>
-        <p:nvSpPr>
-          <p:cNvPr id="25" name="text"/>
-          <p:cNvSpPr txBox="1"/>
-          <p:nvPr/>
-        </p:nvSpPr>
-        <p:spPr>
-          <a:xfrm>
-            <a:off x="5065776" y="4434840"/>
-            <a:ext cx="2103120" cy="274320"/>
+              <a:rPr lang="en-US" sz="900" dirty="0">
+                <a:solidFill>
+                  <a:srgbClr val="535E6C"/>
+                </a:solidFill>
+              </a:rPr>
+              <a:t>Certified metrics</a:t>
+            </a:r>
+            <a:endParaRPr lang="en-US" sz="900" dirty="0"/>
+          </a:p>
+        </p:txBody>
+      </p:sp>
+      <p:sp>
+        <p:nvSpPr>
+          <p:cNvPr id="59" name="text"/>
+          <p:cNvSpPr txBox="1"/>
+          <p:nvPr/>
+        </p:nvSpPr>
+        <p:spPr>
+          <a:xfrm>
+            <a:off x="7356577" y="3207555"/>
+            <a:ext cx="1680972" cy="168097"/>
           </a:xfrm>
           <a:prstGeom prst="rect">
             <a:avLst/>
@@ -5975,27 +7123,27 @@
               <a:buNone/>
             </a:pPr>
             <a:r>
-              <a:rPr lang="en-US" sz="850" b="1" dirty="0">
-                <a:solidFill>
-                  <a:schemeClr val="accent6"/>
-                </a:solidFill>
-              </a:rPr>
-              <a:t>WHAT THE TAXONOMY DOES HERE</a:t>
-            </a:r>
-            <a:endParaRPr lang="en-US" sz="850" dirty="0"/>
-          </a:p>
-        </p:txBody>
-      </p:sp>
-      <p:sp>
-        <p:nvSpPr>
-          <p:cNvPr id="26" name="text"/>
-          <p:cNvSpPr txBox="1"/>
-          <p:nvPr/>
-        </p:nvSpPr>
-        <p:spPr>
-          <a:xfrm>
-            <a:off x="5065776" y="4709160"/>
-            <a:ext cx="2103120" cy="914400"/>
+              <a:rPr lang="en-US" sz="900" dirty="0">
+                <a:solidFill>
+                  <a:srgbClr val="535E6C"/>
+                </a:solidFill>
+              </a:rPr>
+              <a:t>Conformed dimensions</a:t>
+            </a:r>
+            <a:endParaRPr lang="en-US" sz="900" dirty="0"/>
+          </a:p>
+        </p:txBody>
+      </p:sp>
+      <p:sp>
+        <p:nvSpPr>
+          <p:cNvPr id="60" name="text"/>
+          <p:cNvSpPr txBox="1"/>
+          <p:nvPr/>
+        </p:nvSpPr>
+        <p:spPr>
+          <a:xfrm>
+            <a:off x="7356577" y="3384057"/>
+            <a:ext cx="1680972" cy="168097"/>
           </a:xfrm>
           <a:prstGeom prst="rect">
             <a:avLst/>
@@ -6011,37 +7159,111 @@
               <a:buNone/>
             </a:pPr>
             <a:r>
-              <a:rPr lang="en-US" sz="1150" dirty="0">
-                <a:solidFill>
-                  <a:schemeClr val="tx2"/>
-                </a:solidFill>
-              </a:rPr>
-              <a:t>Bill of materials: exact objects and attributes used, validated at build</a:t>
-            </a:r>
-            <a:endParaRPr lang="en-US" sz="1150" dirty="0"/>
-          </a:p>
-        </p:txBody>
-      </p:sp>
-      <p:sp>
-        <p:nvSpPr>
-          <p:cNvPr id="27" name="arrow"/>
+              <a:rPr lang="en-US" sz="900" dirty="0">
+                <a:solidFill>
+                  <a:srgbClr val="535E6C"/>
+                </a:solidFill>
+              </a:rPr>
+              <a:t>Hierarchies</a:t>
+            </a:r>
+            <a:endParaRPr lang="en-US" sz="900" dirty="0"/>
+          </a:p>
+        </p:txBody>
+      </p:sp>
+      <p:sp>
+        <p:nvSpPr>
+          <p:cNvPr id="61" name="text"/>
+          <p:cNvSpPr txBox="1"/>
+          <p:nvPr/>
+        </p:nvSpPr>
+        <p:spPr>
+          <a:xfrm>
+            <a:off x="7356577" y="3560559"/>
+            <a:ext cx="1680972" cy="168097"/>
+          </a:xfrm>
+          <a:prstGeom prst="rect">
+            <a:avLst/>
+          </a:prstGeom>
+          <a:noFill/>
+          <a:ln/>
+        </p:spPr>
+        <p:txBody>
+          <a:bodyPr wrap="square" lIns="0" tIns="0" rIns="0" bIns="0" rtlCol="0" anchor="t"/>
+          <a:lstStyle/>
+          <a:p>
+            <a:pPr indent="0" marL="0">
+              <a:buNone/>
+            </a:pPr>
+            <a:r>
+              <a:rPr lang="en-US" sz="900" dirty="0">
+                <a:solidFill>
+                  <a:srgbClr val="535E6C"/>
+                </a:solidFill>
+              </a:rPr>
+              <a:t>Synonyms</a:t>
+            </a:r>
+            <a:endParaRPr lang="en-US" sz="900" dirty="0"/>
+          </a:p>
+        </p:txBody>
+      </p:sp>
+      <p:sp>
+        <p:nvSpPr>
+          <p:cNvPr id="62" name="text"/>
+          <p:cNvSpPr txBox="1"/>
+          <p:nvPr/>
+        </p:nvSpPr>
+        <p:spPr>
+          <a:xfrm>
+            <a:off x="7356577" y="3737061"/>
+            <a:ext cx="1680972" cy="168097"/>
+          </a:xfrm>
+          <a:prstGeom prst="rect">
+            <a:avLst/>
+          </a:prstGeom>
+          <a:noFill/>
+          <a:ln/>
+        </p:spPr>
+        <p:txBody>
+          <a:bodyPr wrap="square" lIns="0" tIns="0" rIns="0" bIns="0" rtlCol="0" anchor="t"/>
+          <a:lstStyle/>
+          <a:p>
+            <a:pPr indent="0" marL="0">
+              <a:buNone/>
+            </a:pPr>
+            <a:r>
+              <a:rPr lang="en-US" sz="900" dirty="0">
+                <a:solidFill>
+                  <a:srgbClr val="535E6C"/>
+                </a:solidFill>
+              </a:rPr>
+              <a:t>Row and column access</a:t>
+            </a:r>
+            <a:endParaRPr lang="en-US" sz="900" dirty="0"/>
+          </a:p>
+        </p:txBody>
+      </p:sp>
+      <p:sp>
+        <p:nvSpPr>
+          <p:cNvPr id="63" name="flow box"/>
           <p:cNvSpPr/>
           <p:nvPr/>
         </p:nvSpPr>
         <p:spPr>
           <a:xfrm>
-            <a:off x="7187184" y="1618488"/>
-            <a:ext cx="128016" cy="274320"/>
-          </a:xfrm>
-          <a:prstGeom prst="rightArrow">
-            <a:avLst/>
+            <a:off x="9625889" y="2678049"/>
+            <a:ext cx="1849069" cy="1344778"/>
+          </a:xfrm>
+          <a:prstGeom prst="roundRect">
+            <a:avLst>
+              <a:gd name="adj" fmla="val 3400"/>
+            </a:avLst>
           </a:prstGeom>
           <a:solidFill>
-            <a:schemeClr val="accent6"/>
+            <a:srgbClr val="EEF1F8"/>
           </a:solidFill>
           <a:ln w="12700">
             <a:solidFill>
-              <a:schemeClr val="accent6"/>
+              <a:srgbClr val="D5DBE7"/>
             </a:solidFill>
             <a:prstDash val="solid"/>
           </a:ln>
@@ -6049,24 +7271,206 @@
       </p:sp>
       <p:sp>
         <p:nvSpPr>
-          <p:cNvPr id="28" name="panel"/>
+          <p:cNvPr id="64" name="text"/>
+          <p:cNvSpPr txBox="1"/>
+          <p:nvPr/>
+        </p:nvSpPr>
+        <p:spPr>
+          <a:xfrm>
+            <a:off x="9760367" y="2778907"/>
+            <a:ext cx="1680972" cy="168097"/>
+          </a:xfrm>
+          <a:prstGeom prst="rect">
+            <a:avLst/>
+          </a:prstGeom>
+          <a:noFill/>
+          <a:ln/>
+        </p:spPr>
+        <p:txBody>
+          <a:bodyPr wrap="square" lIns="0" tIns="0" rIns="0" bIns="0" rtlCol="0" anchor="t"/>
+          <a:lstStyle/>
+          <a:p>
+            <a:pPr indent="0" marL="0">
+              <a:buNone/>
+            </a:pPr>
+            <a:r>
+              <a:rPr lang="en-US" sz="1100" b="1" dirty="0">
+                <a:solidFill>
+                  <a:srgbClr val="1A2B3C"/>
+                </a:solidFill>
+              </a:rPr>
+              <a:t>Analytical use</a:t>
+            </a:r>
+            <a:endParaRPr lang="en-US" sz="1100" dirty="0"/>
+          </a:p>
+        </p:txBody>
+      </p:sp>
+      <p:sp>
+        <p:nvSpPr>
+          <p:cNvPr id="65" name="text"/>
+          <p:cNvSpPr txBox="1"/>
+          <p:nvPr/>
+        </p:nvSpPr>
+        <p:spPr>
+          <a:xfrm>
+            <a:off x="9760367" y="3031053"/>
+            <a:ext cx="1680972" cy="168097"/>
+          </a:xfrm>
+          <a:prstGeom prst="rect">
+            <a:avLst/>
+          </a:prstGeom>
+          <a:noFill/>
+          <a:ln/>
+        </p:spPr>
+        <p:txBody>
+          <a:bodyPr wrap="square" lIns="0" tIns="0" rIns="0" bIns="0" rtlCol="0" anchor="t"/>
+          <a:lstStyle/>
+          <a:p>
+            <a:pPr indent="0" marL="0">
+              <a:buNone/>
+            </a:pPr>
+            <a:r>
+              <a:rPr lang="en-US" sz="900" dirty="0">
+                <a:solidFill>
+                  <a:srgbClr val="535E6C"/>
+                </a:solidFill>
+              </a:rPr>
+              <a:t>BI dashboards</a:t>
+            </a:r>
+            <a:endParaRPr lang="en-US" sz="900" dirty="0"/>
+          </a:p>
+        </p:txBody>
+      </p:sp>
+      <p:sp>
+        <p:nvSpPr>
+          <p:cNvPr id="66" name="text"/>
+          <p:cNvSpPr txBox="1"/>
+          <p:nvPr/>
+        </p:nvSpPr>
+        <p:spPr>
+          <a:xfrm>
+            <a:off x="9760367" y="3207555"/>
+            <a:ext cx="1680972" cy="168097"/>
+          </a:xfrm>
+          <a:prstGeom prst="rect">
+            <a:avLst/>
+          </a:prstGeom>
+          <a:noFill/>
+          <a:ln/>
+        </p:spPr>
+        <p:txBody>
+          <a:bodyPr wrap="square" lIns="0" tIns="0" rIns="0" bIns="0" rtlCol="0" anchor="t"/>
+          <a:lstStyle/>
+          <a:p>
+            <a:pPr indent="0" marL="0">
+              <a:buNone/>
+            </a:pPr>
+            <a:r>
+              <a:rPr lang="en-US" sz="900" dirty="0">
+                <a:solidFill>
+                  <a:srgbClr val="535E6C"/>
+                </a:solidFill>
+              </a:rPr>
+              <a:t>Self-service and Excel</a:t>
+            </a:r>
+            <a:endParaRPr lang="en-US" sz="900" dirty="0"/>
+          </a:p>
+        </p:txBody>
+      </p:sp>
+      <p:sp>
+        <p:nvSpPr>
+          <p:cNvPr id="67" name="text"/>
+          <p:cNvSpPr txBox="1"/>
+          <p:nvPr/>
+        </p:nvSpPr>
+        <p:spPr>
+          <a:xfrm>
+            <a:off x="9760367" y="3384057"/>
+            <a:ext cx="1680972" cy="168097"/>
+          </a:xfrm>
+          <a:prstGeom prst="rect">
+            <a:avLst/>
+          </a:prstGeom>
+          <a:noFill/>
+          <a:ln/>
+        </p:spPr>
+        <p:txBody>
+          <a:bodyPr wrap="square" lIns="0" tIns="0" rIns="0" bIns="0" rtlCol="0" anchor="t"/>
+          <a:lstStyle/>
+          <a:p>
+            <a:pPr indent="0" marL="0">
+              <a:buNone/>
+            </a:pPr>
+            <a:r>
+              <a:rPr lang="en-US" sz="900" dirty="0">
+                <a:solidFill>
+                  <a:srgbClr val="535E6C"/>
+                </a:solidFill>
+              </a:rPr>
+              <a:t>AI assistants and</a:t>
+            </a:r>
+            <a:endParaRPr lang="en-US" sz="900" dirty="0"/>
+          </a:p>
+        </p:txBody>
+      </p:sp>
+      <p:sp>
+        <p:nvSpPr>
+          <p:cNvPr id="68" name="text"/>
+          <p:cNvSpPr txBox="1"/>
+          <p:nvPr/>
+        </p:nvSpPr>
+        <p:spPr>
+          <a:xfrm>
+            <a:off x="9760367" y="3560559"/>
+            <a:ext cx="1680972" cy="168097"/>
+          </a:xfrm>
+          <a:prstGeom prst="rect">
+            <a:avLst/>
+          </a:prstGeom>
+          <a:noFill/>
+          <a:ln/>
+        </p:spPr>
+        <p:txBody>
+          <a:bodyPr wrap="square" lIns="0" tIns="0" rIns="0" bIns="0" rtlCol="0" anchor="t"/>
+          <a:lstStyle/>
+          <a:p>
+            <a:pPr indent="0" marL="0">
+              <a:buNone/>
+            </a:pPr>
+            <a:r>
+              <a:rPr lang="en-US" sz="900" dirty="0">
+                <a:solidFill>
+                  <a:srgbClr val="535E6C"/>
+                </a:solidFill>
+              </a:rPr>
+              <a:t>natural-language query</a:t>
+            </a:r>
+            <a:endParaRPr lang="en-US" sz="900" dirty="0"/>
+          </a:p>
+        </p:txBody>
+      </p:sp>
+      <p:sp>
+        <p:nvSpPr>
+          <p:cNvPr id="69" name="flow box"/>
           <p:cNvSpPr/>
           <p:nvPr/>
         </p:nvSpPr>
         <p:spPr>
           <a:xfrm>
-            <a:off x="7324344" y="1417320"/>
-            <a:ext cx="2103120" cy="685800"/>
-          </a:xfrm>
-          <a:prstGeom prst="rect">
-            <a:avLst/>
+            <a:off x="9625889" y="4190924"/>
+            <a:ext cx="1849069" cy="1025393"/>
+          </a:xfrm>
+          <a:prstGeom prst="roundRect">
+            <a:avLst>
+              <a:gd name="adj" fmla="val 4459"/>
+            </a:avLst>
           </a:prstGeom>
           <a:solidFill>
-            <a:schemeClr val="accent3"/>
+            <a:srgbClr val="F9E3EE"/>
           </a:solidFill>
           <a:ln w="12700">
             <a:solidFill>
-              <a:schemeClr val="accent3"/>
+              <a:srgbClr val="C8166F"/>
             </a:solidFill>
             <a:prstDash val="solid"/>
           </a:ln>
@@ -6074,98 +7478,418 @@
       </p:sp>
       <p:sp>
         <p:nvSpPr>
-          <p:cNvPr id="29" name="text"/>
-          <p:cNvSpPr txBox="1"/>
-          <p:nvPr/>
-        </p:nvSpPr>
-        <p:spPr>
-          <a:xfrm>
-            <a:off x="7461504" y="1508760"/>
-            <a:ext cx="457200" cy="502920"/>
-          </a:xfrm>
-          <a:prstGeom prst="rect">
-            <a:avLst/>
-          </a:prstGeom>
-          <a:noFill/>
-          <a:ln/>
-        </p:spPr>
-        <p:txBody>
-          <a:bodyPr wrap="square" lIns="0" tIns="0" rIns="0" bIns="0" rtlCol="0" anchor="ctr"/>
-          <a:lstStyle/>
-          <a:p>
-            <a:pPr indent="0" marL="0">
-              <a:buNone/>
-            </a:pPr>
-            <a:r>
-              <a:rPr lang="en-US" sz="2200" b="1" dirty="0">
-                <a:solidFill>
-                  <a:schemeClr val="bg1"/>
-                </a:solidFill>
-              </a:rPr>
-              <a:t>4</a:t>
-            </a:r>
-            <a:endParaRPr lang="en-US" sz="2200" dirty="0"/>
-          </a:p>
-        </p:txBody>
-      </p:sp>
-      <p:sp>
-        <p:nvSpPr>
-          <p:cNvPr id="30" name="text"/>
-          <p:cNvSpPr txBox="1"/>
-          <p:nvPr/>
-        </p:nvSpPr>
-        <p:spPr>
-          <a:xfrm>
-            <a:off x="7872984" y="1490472"/>
-            <a:ext cx="1463040" cy="548640"/>
-          </a:xfrm>
-          <a:prstGeom prst="rect">
-            <a:avLst/>
-          </a:prstGeom>
-          <a:noFill/>
-          <a:ln/>
-        </p:spPr>
-        <p:txBody>
-          <a:bodyPr wrap="square" lIns="0" tIns="0" rIns="0" bIns="0" rtlCol="0" anchor="ctr"/>
-          <a:lstStyle/>
-          <a:p>
-            <a:pPr indent="0" marL="0">
-              <a:buNone/>
-            </a:pPr>
-            <a:r>
-              <a:rPr lang="en-US" sz="1300" b="1" dirty="0">
-                <a:solidFill>
-                  <a:schemeClr val="bg1"/>
-                </a:solidFill>
-              </a:rPr>
-              <a:t>Consumer products</a:t>
-            </a:r>
-            <a:endParaRPr lang="en-US" sz="1300" dirty="0"/>
-          </a:p>
-        </p:txBody>
-      </p:sp>
-      <p:sp>
-        <p:nvSpPr>
-          <p:cNvPr id="31" name="card"/>
+          <p:cNvPr id="70" name="text"/>
+          <p:cNvSpPr txBox="1"/>
+          <p:nvPr/>
+        </p:nvSpPr>
+        <p:spPr>
+          <a:xfrm>
+            <a:off x="9760367" y="4258163"/>
+            <a:ext cx="1680972" cy="336194"/>
+          </a:xfrm>
+          <a:prstGeom prst="rect">
+            <a:avLst/>
+          </a:prstGeom>
+          <a:noFill/>
+          <a:ln/>
+        </p:spPr>
+        <p:txBody>
+          <a:bodyPr wrap="square" lIns="0" tIns="0" rIns="0" bIns="0" rtlCol="0" anchor="t"/>
+          <a:lstStyle/>
+          <a:p>
+            <a:pPr indent="0" marL="0">
+              <a:buNone/>
+            </a:pPr>
+            <a:r>
+              <a:rPr lang="en-US" sz="1100" b="1" dirty="0">
+                <a:solidFill>
+                  <a:srgbClr val="C8166F"/>
+                </a:solidFill>
+              </a:rPr>
+              <a:t>Workflow and regulatory use</a:t>
+            </a:r>
+            <a:endParaRPr lang="en-US" sz="1100" dirty="0"/>
+          </a:p>
+        </p:txBody>
+      </p:sp>
+      <p:sp>
+        <p:nvSpPr>
+          <p:cNvPr id="71" name="text"/>
+          <p:cNvSpPr txBox="1"/>
+          <p:nvPr/>
+        </p:nvSpPr>
+        <p:spPr>
+          <a:xfrm>
+            <a:off x="9760367" y="4611167"/>
+            <a:ext cx="1638948" cy="336194"/>
+          </a:xfrm>
+          <a:prstGeom prst="rect">
+            <a:avLst/>
+          </a:prstGeom>
+          <a:noFill/>
+          <a:ln/>
+        </p:spPr>
+        <p:txBody>
+          <a:bodyPr wrap="square" lIns="0" tIns="0" rIns="0" bIns="0" rtlCol="0" anchor="t"/>
+          <a:lstStyle/>
+          <a:p>
+            <a:pPr indent="0" marL="0">
+              <a:buNone/>
+            </a:pPr>
+            <a:r>
+              <a:rPr lang="en-US" sz="900" dirty="0">
+                <a:solidFill>
+                  <a:srgbClr val="1A2B3C"/>
+                </a:solidFill>
+              </a:rPr>
+              <a:t>CRM, advisor desktop, client statements, billing, regulators</a:t>
+            </a:r>
+            <a:endParaRPr lang="en-US" sz="900" dirty="0"/>
+          </a:p>
+        </p:txBody>
+      </p:sp>
+      <p:sp>
+        <p:nvSpPr>
+          <p:cNvPr id="72" name="text"/>
+          <p:cNvSpPr txBox="1"/>
+          <p:nvPr/>
+        </p:nvSpPr>
+        <p:spPr>
+          <a:xfrm>
+            <a:off x="9760367" y="4980981"/>
+            <a:ext cx="1680972" cy="168097"/>
+          </a:xfrm>
+          <a:prstGeom prst="rect">
+            <a:avLst/>
+          </a:prstGeom>
+          <a:noFill/>
+          <a:ln/>
+        </p:spPr>
+        <p:txBody>
+          <a:bodyPr wrap="square" lIns="0" tIns="0" rIns="0" bIns="0" rtlCol="0" anchor="t"/>
+          <a:lstStyle/>
+          <a:p>
+            <a:pPr indent="0" marL="0">
+              <a:buNone/>
+            </a:pPr>
+            <a:r>
+              <a:rPr lang="en-US" sz="900" dirty="0">
+                <a:solidFill>
+                  <a:srgbClr val="535E6C"/>
+                </a:solidFill>
+              </a:rPr>
+              <a:t>via API, file, event</a:t>
+            </a:r>
+            <a:endParaRPr lang="en-US" sz="900" dirty="0"/>
+          </a:p>
+        </p:txBody>
+      </p:sp>
+      <p:sp>
+        <p:nvSpPr>
+          <p:cNvPr id="73" name="arrow"/>
           <p:cNvSpPr/>
           <p:nvPr/>
         </p:nvSpPr>
         <p:spPr>
           <a:xfrm>
-            <a:off x="7324344" y="2103120"/>
-            <a:ext cx="2103120" cy="2148840"/>
-          </a:xfrm>
-          <a:prstGeom prst="roundRect">
-            <a:avLst>
-              <a:gd name="adj" fmla="val 3478"/>
-            </a:avLst>
+            <a:off x="2565806" y="3728657"/>
+            <a:ext cx="521101" cy="0"/>
+          </a:xfrm>
+          <a:prstGeom prst="line">
+            <a:avLst/>
+          </a:prstGeom>
+          <a:noFill/>
+          <a:ln w="15875">
+            <a:solidFill>
+              <a:srgbClr val="1A2B3C"/>
+            </a:solidFill>
+            <a:prstDash val="solid"/>
+            <a:tailEnd type="triangle"/>
+          </a:ln>
+        </p:spPr>
+      </p:sp>
+      <p:sp>
+        <p:nvSpPr>
+          <p:cNvPr id="74" name="text"/>
+          <p:cNvSpPr txBox="1"/>
+          <p:nvPr/>
+        </p:nvSpPr>
+        <p:spPr>
+          <a:xfrm>
+            <a:off x="2565806" y="3560559"/>
+            <a:ext cx="521101" cy="168097"/>
+          </a:xfrm>
+          <a:prstGeom prst="rect">
+            <a:avLst/>
+          </a:prstGeom>
+          <a:noFill/>
+          <a:ln/>
+        </p:spPr>
+        <p:txBody>
+          <a:bodyPr wrap="square" lIns="0" tIns="0" rIns="0" bIns="0" rtlCol="0" anchor="t"/>
+          <a:lstStyle/>
+          <a:p>
+            <a:pPr algn="ctr" indent="0" marL="0">
+              <a:buNone/>
+            </a:pPr>
+            <a:r>
+              <a:rPr lang="en-US" sz="800" dirty="0">
+                <a:solidFill>
+                  <a:srgbClr val="535E6C"/>
+                </a:solidFill>
+              </a:rPr>
+              <a:t>ingest</a:t>
+            </a:r>
+            <a:endParaRPr lang="en-US" sz="800" dirty="0"/>
+          </a:p>
+        </p:txBody>
+      </p:sp>
+      <p:sp>
+        <p:nvSpPr>
+          <p:cNvPr id="75" name="arrow"/>
+          <p:cNvSpPr/>
+          <p:nvPr/>
+        </p:nvSpPr>
+        <p:spPr>
+          <a:xfrm>
+            <a:off x="6633759" y="3350438"/>
+            <a:ext cx="571530" cy="0"/>
+          </a:xfrm>
+          <a:prstGeom prst="line">
+            <a:avLst/>
+          </a:prstGeom>
+          <a:noFill/>
+          <a:ln w="15875">
+            <a:solidFill>
+              <a:srgbClr val="1A2B3C"/>
+            </a:solidFill>
+            <a:prstDash val="solid"/>
+            <a:tailEnd type="triangle"/>
+          </a:ln>
+        </p:spPr>
+      </p:sp>
+      <p:sp>
+        <p:nvSpPr>
+          <p:cNvPr id="76" name="text"/>
+          <p:cNvSpPr txBox="1"/>
+          <p:nvPr/>
+        </p:nvSpPr>
+        <p:spPr>
+          <a:xfrm>
+            <a:off x="6633759" y="3182341"/>
+            <a:ext cx="571530" cy="168097"/>
+          </a:xfrm>
+          <a:prstGeom prst="rect">
+            <a:avLst/>
+          </a:prstGeom>
+          <a:noFill/>
+          <a:ln/>
+        </p:spPr>
+        <p:txBody>
+          <a:bodyPr wrap="square" lIns="0" tIns="0" rIns="0" bIns="0" rtlCol="0" anchor="t"/>
+          <a:lstStyle/>
+          <a:p>
+            <a:pPr algn="ctr" indent="0" marL="0">
+              <a:buNone/>
+            </a:pPr>
+            <a:r>
+              <a:rPr lang="en-US" sz="800" dirty="0">
+                <a:solidFill>
+                  <a:srgbClr val="535E6C"/>
+                </a:solidFill>
+              </a:rPr>
+              <a:t>publish</a:t>
+            </a:r>
+            <a:endParaRPr lang="en-US" sz="800" dirty="0"/>
+          </a:p>
+        </p:txBody>
+      </p:sp>
+      <p:sp>
+        <p:nvSpPr>
+          <p:cNvPr id="77" name="arrow"/>
+          <p:cNvSpPr/>
+          <p:nvPr/>
+        </p:nvSpPr>
+        <p:spPr>
+          <a:xfrm>
+            <a:off x="9071168" y="3350438"/>
+            <a:ext cx="537911" cy="0"/>
+          </a:xfrm>
+          <a:prstGeom prst="line">
+            <a:avLst/>
+          </a:prstGeom>
+          <a:noFill/>
+          <a:ln w="15875">
+            <a:solidFill>
+              <a:srgbClr val="1A2B3C"/>
+            </a:solidFill>
+            <a:prstDash val="solid"/>
+            <a:tailEnd type="triangle"/>
+          </a:ln>
+        </p:spPr>
+      </p:sp>
+      <p:sp>
+        <p:nvSpPr>
+          <p:cNvPr id="78" name="text"/>
+          <p:cNvSpPr txBox="1"/>
+          <p:nvPr/>
+        </p:nvSpPr>
+        <p:spPr>
+          <a:xfrm>
+            <a:off x="9071168" y="3182341"/>
+            <a:ext cx="537911" cy="168097"/>
+          </a:xfrm>
+          <a:prstGeom prst="rect">
+            <a:avLst/>
+          </a:prstGeom>
+          <a:noFill/>
+          <a:ln/>
+        </p:spPr>
+        <p:txBody>
+          <a:bodyPr wrap="square" lIns="0" tIns="0" rIns="0" bIns="0" rtlCol="0" anchor="t"/>
+          <a:lstStyle/>
+          <a:p>
+            <a:pPr algn="ctr" indent="0" marL="0">
+              <a:buNone/>
+            </a:pPr>
+            <a:r>
+              <a:rPr lang="en-US" sz="800" dirty="0">
+                <a:solidFill>
+                  <a:srgbClr val="535E6C"/>
+                </a:solidFill>
+              </a:rPr>
+              <a:t>query</a:t>
+            </a:r>
+            <a:endParaRPr lang="en-US" sz="800" dirty="0"/>
+          </a:p>
+        </p:txBody>
+      </p:sp>
+      <p:sp>
+        <p:nvSpPr>
+          <p:cNvPr id="79" name="direct delivery"/>
+          <p:cNvSpPr/>
+          <p:nvPr/>
+        </p:nvSpPr>
+        <p:spPr>
+          <a:xfrm>
+            <a:off x="6633759" y="4527118"/>
+            <a:ext cx="1899498" cy="0"/>
+          </a:xfrm>
+          <a:prstGeom prst="line">
+            <a:avLst/>
+          </a:prstGeom>
+          <a:noFill/>
+          <a:ln w="19050">
+            <a:solidFill>
+              <a:srgbClr val="C8166F"/>
+            </a:solidFill>
+            <a:prstDash val="solid"/>
+          </a:ln>
+        </p:spPr>
+      </p:sp>
+      <p:sp>
+        <p:nvSpPr>
+          <p:cNvPr id="80" name="direct delivery"/>
+          <p:cNvSpPr/>
+          <p:nvPr/>
+        </p:nvSpPr>
+        <p:spPr>
+          <a:xfrm>
+            <a:off x="8533257" y="4527118"/>
+            <a:ext cx="0" cy="126073"/>
+          </a:xfrm>
+          <a:prstGeom prst="line">
+            <a:avLst/>
+          </a:prstGeom>
+          <a:noFill/>
+          <a:ln w="19050">
+            <a:solidFill>
+              <a:srgbClr val="C8166F"/>
+            </a:solidFill>
+            <a:prstDash val="solid"/>
+          </a:ln>
+        </p:spPr>
+      </p:sp>
+      <p:sp>
+        <p:nvSpPr>
+          <p:cNvPr id="81" name="arrow"/>
+          <p:cNvSpPr/>
+          <p:nvPr/>
+        </p:nvSpPr>
+        <p:spPr>
+          <a:xfrm>
+            <a:off x="8533257" y="4653191"/>
+            <a:ext cx="1075822" cy="0"/>
+          </a:xfrm>
+          <a:prstGeom prst="line">
+            <a:avLst/>
+          </a:prstGeom>
+          <a:noFill/>
+          <a:ln w="19050">
+            <a:solidFill>
+              <a:srgbClr val="C8166F"/>
+            </a:solidFill>
+            <a:prstDash val="solid"/>
+            <a:tailEnd type="triangle"/>
+          </a:ln>
+        </p:spPr>
+      </p:sp>
+      <p:sp>
+        <p:nvSpPr>
+          <p:cNvPr id="82" name="text"/>
+          <p:cNvSpPr txBox="1"/>
+          <p:nvPr/>
+        </p:nvSpPr>
+        <p:spPr>
+          <a:xfrm>
+            <a:off x="6768236" y="4359021"/>
+            <a:ext cx="1008583" cy="168097"/>
+          </a:xfrm>
+          <a:prstGeom prst="rect">
+            <a:avLst/>
+          </a:prstGeom>
+          <a:noFill/>
+          <a:ln/>
+        </p:spPr>
+        <p:txBody>
+          <a:bodyPr wrap="square" lIns="0" tIns="0" rIns="0" bIns="0" rtlCol="0" anchor="t"/>
+          <a:lstStyle/>
+          <a:p>
+            <a:pPr indent="0" marL="0">
+              <a:buNone/>
+            </a:pPr>
+            <a:r>
+              <a:rPr lang="en-US" sz="800" dirty="0">
+                <a:solidFill>
+                  <a:srgbClr val="C8166F"/>
+                </a:solidFill>
+              </a:rPr>
+              <a:t>direct delivery</a:t>
+            </a:r>
+            <a:endParaRPr lang="en-US" sz="800" dirty="0"/>
+          </a:p>
+        </p:txBody>
+      </p:sp>
+      <p:sp>
+        <p:nvSpPr>
+          <p:cNvPr id="83" name="number"/>
+          <p:cNvSpPr/>
+          <p:nvPr/>
+        </p:nvSpPr>
+        <p:spPr>
+          <a:xfrm>
+            <a:off x="8440804" y="4224543"/>
+            <a:ext cx="184907" cy="184907"/>
+          </a:xfrm>
+          <a:prstGeom prst="ellipse">
+            <a:avLst/>
           </a:prstGeom>
           <a:solidFill>
-            <a:schemeClr val="bg2"/>
+            <a:srgbClr val="1A2B3C"/>
           </a:solidFill>
           <a:ln w="12700">
             <a:solidFill>
-              <a:schemeClr val="bg2"/>
+              <a:srgbClr val="1A2B3C"/>
             </a:solidFill>
             <a:prstDash val="solid"/>
           </a:ln>
@@ -6173,14 +7897,50 @@
       </p:sp>
       <p:sp>
         <p:nvSpPr>
-          <p:cNvPr id="32" name="text"/>
-          <p:cNvSpPr txBox="1"/>
-          <p:nvPr/>
-        </p:nvSpPr>
-        <p:spPr>
-          <a:xfrm>
-            <a:off x="7461504" y="2240280"/>
-            <a:ext cx="1828800" cy="1920240"/>
+          <p:cNvPr id="84" name="text"/>
+          <p:cNvSpPr txBox="1"/>
+          <p:nvPr/>
+        </p:nvSpPr>
+        <p:spPr>
+          <a:xfrm>
+            <a:off x="8440804" y="4224543"/>
+            <a:ext cx="184907" cy="184907"/>
+          </a:xfrm>
+          <a:prstGeom prst="rect">
+            <a:avLst/>
+          </a:prstGeom>
+          <a:noFill/>
+          <a:ln/>
+        </p:spPr>
+        <p:txBody>
+          <a:bodyPr wrap="square" lIns="0" tIns="0" rIns="0" bIns="0" rtlCol="0" anchor="ctr"/>
+          <a:lstStyle/>
+          <a:p>
+            <a:pPr algn="ctr" indent="0" marL="0">
+              <a:buNone/>
+            </a:pPr>
+            <a:r>
+              <a:rPr lang="en-US" sz="800" b="1" dirty="0">
+                <a:solidFill>
+                  <a:srgbClr val="FFFFFF"/>
+                </a:solidFill>
+              </a:rPr>
+              <a:t>3</a:t>
+            </a:r>
+            <a:endParaRPr lang="en-US" sz="800" dirty="0"/>
+          </a:p>
+        </p:txBody>
+      </p:sp>
+      <p:sp>
+        <p:nvSpPr>
+          <p:cNvPr id="85" name="text"/>
+          <p:cNvSpPr txBox="1"/>
+          <p:nvPr/>
+        </p:nvSpPr>
+        <p:spPr>
+          <a:xfrm>
+            <a:off x="548640" y="5459044"/>
+            <a:ext cx="11094415" cy="685800"/>
           </a:xfrm>
           <a:prstGeom prst="rect">
             <a:avLst/>
@@ -6196,406 +7956,14 @@
               <a:buNone/>
             </a:pPr>
             <a:r>
-              <a:rPr lang="en-US" sz="1150" dirty="0">
-                <a:solidFill>
-                  <a:schemeClr val="tx1"/>
-                </a:solidFill>
-              </a:rPr>
-              <a:t>Shaped around one function's decisions: Household 360, Reg BI file, advisor worklist, fee billing accuracy</a:t>
-            </a:r>
-            <a:endParaRPr lang="en-US" sz="1150" dirty="0"/>
-          </a:p>
-        </p:txBody>
-      </p:sp>
-      <p:sp>
-        <p:nvSpPr>
-          <p:cNvPr id="33" name="text"/>
-          <p:cNvSpPr txBox="1"/>
-          <p:nvPr/>
-        </p:nvSpPr>
-        <p:spPr>
-          <a:xfrm>
-            <a:off x="7324344" y="4434840"/>
-            <a:ext cx="2103120" cy="274320"/>
-          </a:xfrm>
-          <a:prstGeom prst="rect">
-            <a:avLst/>
-          </a:prstGeom>
-          <a:noFill/>
-          <a:ln/>
-        </p:spPr>
-        <p:txBody>
-          <a:bodyPr wrap="square" lIns="0" tIns="0" rIns="0" bIns="0" rtlCol="0" anchor="t"/>
-          <a:lstStyle/>
-          <a:p>
-            <a:pPr indent="0" marL="0">
-              <a:buNone/>
-            </a:pPr>
-            <a:r>
-              <a:rPr lang="en-US" sz="850" b="1" dirty="0">
+              <a:rPr lang="en-US" sz="1050" i="1" dirty="0">
                 <a:solidFill>
                   <a:schemeClr val="accent6"/>
                 </a:solidFill>
               </a:rPr>
-              <a:t>WHAT THE TAXONOMY DOES HERE</a:t>
-            </a:r>
-            <a:endParaRPr lang="en-US" sz="850" dirty="0"/>
-          </a:p>
-        </p:txBody>
-      </p:sp>
-      <p:sp>
-        <p:nvSpPr>
-          <p:cNvPr id="34" name="text"/>
-          <p:cNvSpPr txBox="1"/>
-          <p:nvPr/>
-        </p:nvSpPr>
-        <p:spPr>
-          <a:xfrm>
-            <a:off x="7324344" y="4709160"/>
-            <a:ext cx="2103120" cy="914400"/>
-          </a:xfrm>
-          <a:prstGeom prst="rect">
-            <a:avLst/>
-          </a:prstGeom>
-          <a:noFill/>
-          <a:ln/>
-        </p:spPr>
-        <p:txBody>
-          <a:bodyPr wrap="square" lIns="0" tIns="0" rIns="0" bIns="0" rtlCol="0" anchor="t"/>
-          <a:lstStyle/>
-          <a:p>
-            <a:pPr indent="0" marL="0">
-              <a:buNone/>
-            </a:pPr>
-            <a:r>
-              <a:rPr lang="en-US" sz="1150" dirty="0">
-                <a:solidFill>
-                  <a:schemeClr val="tx2"/>
-                </a:solidFill>
-              </a:rPr>
-              <a:t>Safe joins across domains; assemble, never redefine</a:t>
-            </a:r>
-            <a:endParaRPr lang="en-US" sz="1150" dirty="0"/>
-          </a:p>
-        </p:txBody>
-      </p:sp>
-      <p:sp>
-        <p:nvSpPr>
-          <p:cNvPr id="35" name="arrow"/>
-          <p:cNvSpPr/>
-          <p:nvPr/>
-        </p:nvSpPr>
-        <p:spPr>
-          <a:xfrm>
-            <a:off x="9445752" y="1618488"/>
-            <a:ext cx="128016" cy="274320"/>
-          </a:xfrm>
-          <a:prstGeom prst="rightArrow">
-            <a:avLst/>
-          </a:prstGeom>
-          <a:solidFill>
-            <a:schemeClr val="accent6"/>
-          </a:solidFill>
-          <a:ln w="12700">
-            <a:solidFill>
-              <a:schemeClr val="accent6"/>
-            </a:solidFill>
-            <a:prstDash val="solid"/>
-          </a:ln>
-        </p:spPr>
-      </p:sp>
-      <p:sp>
-        <p:nvSpPr>
-          <p:cNvPr id="36" name="panel"/>
-          <p:cNvSpPr/>
-          <p:nvPr/>
-        </p:nvSpPr>
-        <p:spPr>
-          <a:xfrm>
-            <a:off x="9582912" y="1417320"/>
-            <a:ext cx="2103120" cy="685800"/>
-          </a:xfrm>
-          <a:prstGeom prst="rect">
-            <a:avLst/>
-          </a:prstGeom>
-          <a:solidFill>
-            <a:schemeClr val="accent4"/>
-          </a:solidFill>
-          <a:ln w="12700">
-            <a:solidFill>
-              <a:schemeClr val="accent4"/>
-            </a:solidFill>
-            <a:prstDash val="solid"/>
-          </a:ln>
-        </p:spPr>
-      </p:sp>
-      <p:sp>
-        <p:nvSpPr>
-          <p:cNvPr id="37" name="text"/>
-          <p:cNvSpPr txBox="1"/>
-          <p:nvPr/>
-        </p:nvSpPr>
-        <p:spPr>
-          <a:xfrm>
-            <a:off x="9720072" y="1508760"/>
-            <a:ext cx="457200" cy="502920"/>
-          </a:xfrm>
-          <a:prstGeom prst="rect">
-            <a:avLst/>
-          </a:prstGeom>
-          <a:noFill/>
-          <a:ln/>
-        </p:spPr>
-        <p:txBody>
-          <a:bodyPr wrap="square" lIns="0" tIns="0" rIns="0" bIns="0" rtlCol="0" anchor="ctr"/>
-          <a:lstStyle/>
-          <a:p>
-            <a:pPr indent="0" marL="0">
-              <a:buNone/>
-            </a:pPr>
-            <a:r>
-              <a:rPr lang="en-US" sz="2200" b="1" dirty="0">
-                <a:solidFill>
-                  <a:schemeClr val="bg1"/>
-                </a:solidFill>
-              </a:rPr>
-              <a:t>5</a:t>
-            </a:r>
-            <a:endParaRPr lang="en-US" sz="2200" dirty="0"/>
-          </a:p>
-        </p:txBody>
-      </p:sp>
-      <p:sp>
-        <p:nvSpPr>
-          <p:cNvPr id="38" name="text"/>
-          <p:cNvSpPr txBox="1"/>
-          <p:nvPr/>
-        </p:nvSpPr>
-        <p:spPr>
-          <a:xfrm>
-            <a:off x="10131552" y="1490472"/>
-            <a:ext cx="1463040" cy="548640"/>
-          </a:xfrm>
-          <a:prstGeom prst="rect">
-            <a:avLst/>
-          </a:prstGeom>
-          <a:noFill/>
-          <a:ln/>
-        </p:spPr>
-        <p:txBody>
-          <a:bodyPr wrap="square" lIns="0" tIns="0" rIns="0" bIns="0" rtlCol="0" anchor="ctr"/>
-          <a:lstStyle/>
-          <a:p>
-            <a:pPr indent="0" marL="0">
-              <a:buNone/>
-            </a:pPr>
-            <a:r>
-              <a:rPr lang="en-US" sz="1300" b="1" dirty="0">
-                <a:solidFill>
-                  <a:schemeClr val="bg1"/>
-                </a:solidFill>
-              </a:rPr>
-              <a:t>Semantic model and uses</a:t>
-            </a:r>
-            <a:endParaRPr lang="en-US" sz="1300" dirty="0"/>
-          </a:p>
-        </p:txBody>
-      </p:sp>
-      <p:sp>
-        <p:nvSpPr>
-          <p:cNvPr id="39" name="card"/>
-          <p:cNvSpPr/>
-          <p:nvPr/>
-        </p:nvSpPr>
-        <p:spPr>
-          <a:xfrm>
-            <a:off x="9582912" y="2103120"/>
-            <a:ext cx="2103120" cy="2148840"/>
-          </a:xfrm>
-          <a:prstGeom prst="roundRect">
-            <a:avLst>
-              <a:gd name="adj" fmla="val 3478"/>
-            </a:avLst>
-          </a:prstGeom>
-          <a:solidFill>
-            <a:schemeClr val="bg2"/>
-          </a:solidFill>
-          <a:ln w="12700">
-            <a:solidFill>
-              <a:schemeClr val="bg2"/>
-            </a:solidFill>
-            <a:prstDash val="solid"/>
-          </a:ln>
-        </p:spPr>
-      </p:sp>
-      <p:sp>
-        <p:nvSpPr>
-          <p:cNvPr id="40" name="text"/>
-          <p:cNvSpPr txBox="1"/>
-          <p:nvPr/>
-        </p:nvSpPr>
-        <p:spPr>
-          <a:xfrm>
-            <a:off x="9720072" y="2240280"/>
-            <a:ext cx="1828800" cy="1920240"/>
-          </a:xfrm>
-          <a:prstGeom prst="rect">
-            <a:avLst/>
-          </a:prstGeom>
-          <a:noFill/>
-          <a:ln/>
-        </p:spPr>
-        <p:txBody>
-          <a:bodyPr wrap="square" lIns="0" tIns="0" rIns="0" bIns="0" rtlCol="0" anchor="t"/>
-          <a:lstStyle/>
-          <a:p>
-            <a:pPr indent="0" marL="0">
-              <a:buNone/>
-            </a:pPr>
-            <a:r>
-              <a:rPr lang="en-US" sz="1150" dirty="0">
-                <a:solidFill>
-                  <a:schemeClr val="tx1"/>
-                </a:solidFill>
-              </a:rPr>
-              <a:t>Metrics defined once, with grain and access rules; delivered to BI, Excel, AI assistants, workflows and evidence packs</a:t>
-            </a:r>
-            <a:endParaRPr lang="en-US" sz="1150" dirty="0"/>
-          </a:p>
-        </p:txBody>
-      </p:sp>
-      <p:sp>
-        <p:nvSpPr>
-          <p:cNvPr id="41" name="text"/>
-          <p:cNvSpPr txBox="1"/>
-          <p:nvPr/>
-        </p:nvSpPr>
-        <p:spPr>
-          <a:xfrm>
-            <a:off x="9582912" y="4434840"/>
-            <a:ext cx="2103120" cy="274320"/>
-          </a:xfrm>
-          <a:prstGeom prst="rect">
-            <a:avLst/>
-          </a:prstGeom>
-          <a:noFill/>
-          <a:ln/>
-        </p:spPr>
-        <p:txBody>
-          <a:bodyPr wrap="square" lIns="0" tIns="0" rIns="0" bIns="0" rtlCol="0" anchor="t"/>
-          <a:lstStyle/>
-          <a:p>
-            <a:pPr indent="0" marL="0">
-              <a:buNone/>
-            </a:pPr>
-            <a:r>
-              <a:rPr lang="en-US" sz="850" b="1" dirty="0">
-                <a:solidFill>
-                  <a:schemeClr val="accent6"/>
-                </a:solidFill>
-              </a:rPr>
-              <a:t>WHAT THE TAXONOMY DOES HERE</a:t>
-            </a:r>
-            <a:endParaRPr lang="en-US" sz="850" dirty="0"/>
-          </a:p>
-        </p:txBody>
-      </p:sp>
-      <p:sp>
-        <p:nvSpPr>
-          <p:cNvPr id="42" name="text"/>
-          <p:cNvSpPr txBox="1"/>
-          <p:nvPr/>
-        </p:nvSpPr>
-        <p:spPr>
-          <a:xfrm>
-            <a:off x="9582912" y="4709160"/>
-            <a:ext cx="2103120" cy="914400"/>
-          </a:xfrm>
-          <a:prstGeom prst="rect">
-            <a:avLst/>
-          </a:prstGeom>
-          <a:noFill/>
-          <a:ln/>
-        </p:spPr>
-        <p:txBody>
-          <a:bodyPr wrap="square" lIns="0" tIns="0" rIns="0" bIns="0" rtlCol="0" anchor="t"/>
-          <a:lstStyle/>
-          <a:p>
-            <a:pPr indent="0" marL="0">
-              <a:buNone/>
-            </a:pPr>
-            <a:r>
-              <a:rPr lang="en-US" sz="1150" dirty="0">
-                <a:solidFill>
-                  <a:schemeClr val="tx2"/>
-                </a:solidFill>
-              </a:rPr>
-              <a:t>Glossary: one name, one definition, traced to its source</a:t>
-            </a:r>
-            <a:endParaRPr lang="en-US" sz="1150" dirty="0"/>
-          </a:p>
-        </p:txBody>
-      </p:sp>
-      <p:sp>
-        <p:nvSpPr>
-          <p:cNvPr id="43" name="card"/>
-          <p:cNvSpPr/>
-          <p:nvPr/>
-        </p:nvSpPr>
-        <p:spPr>
-          <a:xfrm>
-            <a:off x="548640" y="5715000"/>
-            <a:ext cx="11094415" cy="502920"/>
-          </a:xfrm>
-          <a:prstGeom prst="roundRect">
-            <a:avLst>
-              <a:gd name="adj" fmla="val 14545"/>
-            </a:avLst>
-          </a:prstGeom>
-          <a:solidFill>
-            <a:schemeClr val="tx2"/>
-          </a:solidFill>
-          <a:ln w="12700">
-            <a:solidFill>
-              <a:schemeClr val="tx2"/>
-            </a:solidFill>
-            <a:prstDash val="solid"/>
-          </a:ln>
-        </p:spPr>
-      </p:sp>
-      <p:sp>
-        <p:nvSpPr>
-          <p:cNvPr id="44" name="text"/>
-          <p:cNvSpPr txBox="1"/>
-          <p:nvPr/>
-        </p:nvSpPr>
-        <p:spPr>
-          <a:xfrm>
-            <a:off x="822960" y="5715000"/>
-            <a:ext cx="10545775" cy="502920"/>
-          </a:xfrm>
-          <a:prstGeom prst="rect">
-            <a:avLst/>
-          </a:prstGeom>
-          <a:noFill/>
-          <a:ln/>
-        </p:spPr>
-        <p:txBody>
-          <a:bodyPr wrap="square" lIns="0" tIns="0" rIns="0" bIns="0" rtlCol="0" anchor="ctr"/>
-          <a:lstStyle/>
-          <a:p>
-            <a:pPr indent="0" marL="0">
-              <a:buNone/>
-            </a:pPr>
-            <a:r>
-              <a:rPr lang="en-US" sz="1250" dirty="0">
-                <a:solidFill>
-                  <a:schemeClr val="bg1"/>
-                </a:solidFill>
-              </a:rPr>
-              <a:t>Every arrow points one way. A layer on the right never redefines what sits to its left; if it needs something new, the request goes back to the owning domain as a registered gap.</a:t>
-            </a:r>
-            <a:endParaRPr lang="en-US" sz="1250" dirty="0"/>
+              <a:t>Data moves left to right; meaning moves top to bottom. Products used for analysis are published through the semantic layer. Others go straight into a workflow or a regulatory output, because their consumer is a system or a process rather than an analyst. Both paths take their numbers from the same certified products.</a:t>
+            </a:r>
+            <a:endParaRPr lang="en-US" sz="1050" dirty="0"/>
           </a:p>
         </p:txBody>
       </p:sp>

--- a/wm/Wealth_Manager_Foundational_Talktrack.pptx
+++ b/wm/Wealth_Manager_Foundational_Talktrack.pptx
@@ -142,14 +142,14 @@
   <p:extLst>
     <p:ext uri="{521415D9-36F7-43E2-AB2F-B90AF26B5E84}">
       <p14:sectionLst xmlns:p14="http://schemas.microsoft.com/office/powerpoint/2010/main">
-        <p14:section name="Opening" id="{0bcb2daa-6730-9870-de9e-3dbb417b052b}">
+        <p14:section name="Opening" id="{7a4218d7-d890-ae8f-8803-089616da6ba2}">
           <p14:sldIdLst>
             <p14:sldId id="256"/>
             <p14:sldId id="257"/>
             <p14:sldId id="258"/>
           </p14:sldIdLst>
         </p14:section>
-        <p14:section name="1 Data foundations" id="{018cf3d0-deb6-e432-b9f7-6c2540e9fe05}">
+        <p14:section name="1 Data foundations" id="{c18f8651-8836-fed1-dfd6-2607da8b64e6}">
           <p14:sldIdLst>
             <p14:sldId id="259"/>
             <p14:sldId id="260"/>
@@ -158,7 +158,7 @@
             <p14:sldId id="263"/>
           </p14:sldIdLst>
         </p14:section>
-        <p14:section name="2 Management overview" id="{91ebbcf4-27d0-994f-b3bc-cecc183d3d7e}">
+        <p14:section name="2 Management overview" id="{7439c15b-f496-388c-29c7-85c2c4b86b62}">
           <p14:sldIdLst>
             <p14:sldId id="264"/>
             <p14:sldId id="265"/>
@@ -170,7 +170,7 @@
             <p14:sldId id="271"/>
           </p14:sldIdLst>
         </p14:section>
-        <p14:section name="3 The wealth manager" id="{7f1c33e5-d587-0750-b3f4-9207f525981d}">
+        <p14:section name="3 The wealth manager" id="{92b29917-3751-4a92-93b8-aa52d7845b3c}">
           <p14:sldIdLst>
             <p14:sldId id="272"/>
             <p14:sldId id="273"/>
@@ -182,7 +182,7 @@
             <p14:sldId id="279"/>
           </p14:sldIdLst>
         </p14:section>
-        <p14:section name="4 One question, end to end" id="{18faa738-a9c4-8e99-2065-753394db65c4}">
+        <p14:section name="4 One question, end to end" id="{8b72e544-f72e-85d0-cfa1-b846727a9b2c}">
           <p14:sldIdLst>
             <p14:sldId id="280"/>
             <p14:sldId id="281"/>
@@ -194,7 +194,7 @@
             <p14:sldId id="287"/>
           </p14:sldIdLst>
         </p14:section>
-        <p14:section name="5 What this means for you" id="{ded446df-c700-3a4f-aaef-fe674093cdb4}">
+        <p14:section name="5 What this means for you" id="{985be2cc-49ab-c40d-8a21-90e48aa7570f}">
           <p14:sldIdLst>
             <p14:sldId id="288"/>
             <p14:sldId id="289"/>
@@ -607,7 +607,7 @@
             <a:r>
               <a:rPr lang="en-US" dirty="0"/>
               <a:t>Good morning. This session has one aim: to show how a data taxonomy becomes something the distribution business can run on, not a dictionary that sits on a shelf.
-I will do that in four parts. First the foundations: what the taxonomy is and the rules it enforces. Second the management overview: how we build governed data products on it, publish them through a semantic layer, and hand them to dashboards, workflows and control evidence. Third I will pivot to the wealth manager specifically: what changes when the business is households, accounts and advice rather than distributors and wholesalers. Fourth, one question from your seat, followed end to end through every layer.
+I will do that in four parts. First the foundations: what the taxonomy is and the rules it enforces. Second the management overview: how we build governed data products on it, publish them through a semantic layer, and hand them to dashboards, workflows and control evidence. Third, the wealth manager specifically: where the household, the account, the advice relationship and the brokerage book of record sit in the model. Fourth, one question from your seat, followed end to end through every layer.
 Two caveats before I start. This is a reference model for a hypothetical direct wealth manager; no real firm's data or systems are in it. And every client name and dollar figure you see is illustrative. The five chips at the bottom are the five layers we will keep coming back to.</a:t>
             </a:r>
             <a:endParaRPr lang="en-US" dirty="0"/>
@@ -1330,7 +1330,7 @@
           <a:p>
             <a:r>
               <a:rPr lang="en-US" dirty="0"/>
-              <a:t>Part three. Everything so far would be true of any asset manager. Now the pivot: the reference model was reworked from a wholesale manufacturer into a direct wealth manager, and what changed tells you where your business lives in the data.</a:t>
+              <a:t>Part three. Parts one and two apply to any firm that runs this model. Now the wealth manager specifically. The reference model was built for a direct wealth manager, and this part shows where your business lives in it: the firm it assumes, the four things it is built around, the Client &amp; Advice domains, the books of record and certified numbers, the advice domain, and the products and semantic models on top.</a:t>
             </a:r>
             <a:endParaRPr lang="en-US" dirty="0"/>
           </a:p>
@@ -1418,7 +1418,7 @@
           <a:p>
             <a:r>
               <a:rPr lang="en-US" dirty="0"/>
-              <a:t>The reference firm is hypothetical but deliberately shaped. It serves investors directly, gives advice digitally and through people, manufactures the funds it recommends, recordkeeps workplace plans, and sells through intermediaries only as a secondary channel. It is US only; the EU and UK content lives in the sibling model and can be restored.
+              <a:t>The reference firm is hypothetical but deliberately shaped. It serves investors directly, gives advice digitally and through people, manufactures the funds it recommends, recordkeeps workplace plans, and sells through intermediaries only as a secondary channel. It is US only.
 Eight business lines, and each is a tailoring lever. Drop personal trust if you do not run a trust company. Thicken the intermediary channel if your advisor business is large. Every lever is a named change to a register, not a rebuild.
 The legal entities and operating assumptions matter because they decide which books of record exist: a self-clearing broker-dealer means the firm keeps the brokerage book of record itself. If you clear through someone else, that book becomes oversight data received from the provider, and the specifications say how each product changes under that model.</a:t>
             </a:r>
@@ -1508,9 +1508,9 @@
           <a:p>
             <a:r>
               <a:rPr lang="en-US" dirty="0"/>
-              <a:t>Here is the pivot in one slide. The wholesale model's center of gravity is the distributor hierarchy, the external advisor and the flows attributed to them. The wealth manager's is the client household, the account, the advice relationship and the brokerage book of record. Same rules, same layers; different concepts at the center.
-Six structural decisions carry that shift. The party master becomes the client: households, authorized agents, trusted contacts, the investor profile. The account becomes the brokerage and advisory account with its registration types and features. Client assets get their own book of record, separate from the fund book. Advice becomes data in its own domain. Managed accounts and client orders are separated from fund portfolio management and the fund trading desk. And the intermediary business shrinks to a channel.
-Each of these is a numbered decision with a rationale and a lever. If your firm has a large advisor-channel business, the wholesale depth is restored from the sibling; it is not rebuilt.</a:t>
+              <a:t>The model is built around four things, and everything in part four follows from them. The client household: the party master is the client, with members, authorized agents, trusted contacts and the versioned investor profile. The account: the brokerage and advisory account, with its registration types, features, agreements, beneficiaries and program enrollment. The advice relationship: goals, plans, recommendations and the best-interest evidence behind each one, as data in its own domain. And the brokerage book of record: what each client account owns, with tax lots, cost basis, cash and sweep, separate from the fund book.
+Around them sit eight design rules, each a numbered decision with a rationale and a tailoring lever. Managed accounts and client orders are their own domains, distinct from fund portfolio management and the fund trading desk. Fees are an operational domain. Retail conduct is the compliance core. The intermediary and institutional business is a channel, kept thin by default. And the certified numbers are the wealth manager's: Client Assets as the headline, Firm AUM as the manufacturing number, reconciled and never summed.
+If your firm differs on any of these, the lever is named: thicken the intermediary channel, drop trust, add a bank balance sheet. None of them is a rebuild.</a:t>
             </a:r>
             <a:endParaRPr lang="en-US" dirty="0"/>
           </a:p>
@@ -1688,7 +1688,7 @@
           <a:p>
             <a:r>
               <a:rPr lang="en-US" dirty="0"/>
-              <a:t>These are the twelve domains of the Client &amp; Advice area. Four of them are new for the wealth manager: planning and advice, managed portfolios, pricing and billing, and trust. Four were replaced under their old number: the client, the account, the advisor organization and retail conduct. The rest were adapted.
+              <a:t>These are the twelve domains of the Client &amp; Advice area: the client and the account at the center, planning and advice and managed portfolios beside them, then fees, the advisor organization, marketing, service, conduct, the product and offering reference, product development and trust.
 I want to point at three boundaries, because they are where arguments usually start. The investor profile is on the client in 02; what one account is for is on the account in 15; what the client wants to achieve is a goal in 45. Three records, three owners, and a recommendation references the profile version it relied on rather than copying it. Advice programs and service tiers are offerings in 01; enrolling an account in one is a 15 fact; the recommendation that led to it is 45. And fees are an operational domain, 47, with the revenue view staying in 10.
 If your data team takes one thing from this slide, it is those boundary rules. They are the difference between a household view that reconciles and one that does not.</a:t>
             </a:r>
@@ -1868,7 +1868,7 @@
           <a:p>
             <a:r>
               <a:rPr lang="en-US" dirty="0"/>
-              <a:t>This is the domain that did not exist in the wholesale model and that your business cannot run without. 45 Financial Planning &amp; Advice masters the record of what a client is trying to achieve, the plan built to get there, what the firm recommended, and why that recommendation was in the client's best interest.
+              <a:t>This is the domain your business cannot run without. 45 Financial Planning &amp; Advice masters the record of what a client is trying to achieve, the plan built to get there, what the firm recommended, and why that recommendation was in the client's best interest.
 It is service data and regulated evidence at the same time. Regulation Best Interest requires the care obligation to be met and recorded for each recommendation to a retail customer; the Advisers Act fiduciary duty applies to every advisory relationship; a rollover from a workplace plan needs the DOL PTE 2020-02 documentation: the fiduciary acknowledgment, the services and conflicts disclosure, the reasons, the impartial conduct attestation.
 The boundary rules are what keep it clean. Digital and human advice are one domain with delivery channel as an attribute, so a robo recommendation and an advisor's recommendation carry the same evidence. The recommendation is mastered once here; supervision in 08 reviews it and holds no rationale of its own; enrollment in 15 and model assignment in 46 implement it and reference it. And the domain never computes a return and never copies a profile.</a:t>
             </a:r>
@@ -1958,9 +1958,9 @@
           <a:p>
             <a:r>
               <a:rPr lang="en-US" dirty="0"/>
-              <a:t>What was built on the reworked taxonomy. Seventeen new foundational products, mostly the books of record and masters the wholesale model had no need for: client holdings, client orders, money movement, the advice record, model assignments, fee schedules and billing runs, the manager master, the trust record, service interactions and the client document record. The existing masters were re-scoped: the party master to the household, the account master to the brokerage and advisory account, the certified flows product to Client Assets and Net New Assets.
+              <a:t>The product set on the taxonomy. Fifty-eight foundational products conform the masters, the books of record and the certified numbers. The ones your business runs on are listed on the left: the party master with the household as its primary role, the account master, the offering reference, client holdings, client orders, money movement, the advice record, model assignments, fee schedules and billing runs, the certified Client Assets and Net New Assets product, client fee revenue, official returns with personal rate of return, service interactions, the client document record, and the recordkept plan and participant books.
 On the right, a selection of the Client &amp; Advice consumer products, grouped by the three uses. You will recognize the acceptance questions in them: which recommendations lack evidence, which rollovers lack documentation, which households are due a review, what tax-loss harvesting saved.
-Scale, for the data team: 271 products live or in progress after the scope ruling, each specified to attribute level; twenty new business functions from FN-60, from Financial Planning &amp; Advice through Client &amp; Channel Analytics; ten new semantic models reserved from SM-20.</a:t>
+Scale, for the data team: 271 products live or in progress, each specified to attribute level; 55 business functions, from Financial Planning &amp; Advice through Client &amp; Channel Analytics; 20 semantic models, ten of them for the client business.</a:t>
             </a:r>
             <a:endParaRPr lang="en-US" dirty="0"/>
           </a:p>
@@ -2048,7 +2048,7 @@
           <a:p>
             <a:r>
               <a:rPr lang="en-US" dirty="0"/>
-              <a:t>The semantic layer for the wealth manager is ten subject-area models reserved from SM-20. The first, Client Assets &amp; Flows, owns the certified client-asset family. Client &amp; Household 360, Advice &amp; Planning and Managed Portfolios serve the advice business. Client Economics owns fee revenue. Retail Conduct &amp; Supervision was added by a lead ruling so the conduct evidence has a home of its own.
+              <a:t>The client business is published through ten subject-area models, SM-20 to SM-29, alongside the models for investment, fund operations and the corporate functions. The first, Client Assets &amp; Flows, owns the certified client-asset family. Client &amp; Household 360, Advice &amp; Planning and Managed Portfolios serve the advice business. Client Economics owns fee revenue. Retail Conduct &amp; Supervision gives the conduct evidence a home of its own.
 On the right are the twelve acceptance questions. The model is accepted when each of them resolves, in the explorer, from a metric to a product measure to attributes to the mastering domain. They were chosen to cut across the business: assets and flows, advice evidence, managed accounts, execution quality, customer protection, cash holds, fee billing, personal returns, rollover capture, cost to serve and manager oversight.
 Question three and question ten are the ones I will follow in part four, because they are the ones that sit on the head of distribution's desk: did the rollover come in, and is the file complete.</a:t>
             </a:r>
@@ -15878,7 +15878,7 @@
                   <a:schemeClr val="bg1"/>
                 </a:solidFill>
               </a:rPr>
-              <a:t>The wealth manager: what moves</a:t>
+              <a:t>The wealth manager</a:t>
             </a:r>
             <a:endParaRPr lang="en-US" sz="4000" dirty="0"/>
           </a:p>
@@ -15916,7 +15916,7 @@
                   <a:schemeClr val="bg2"/>
                 </a:solidFill>
               </a:rPr>
-              <a:t>The same rules and the same layers, re-centered on the household, the account, the advice relationship and the brokerage book of record.</a:t>
+              <a:t>A reference model built for a direct wealth manager: the same rules and layers, with the household, the account, the advice relationship and the brokerage book of record at its center.</a:t>
             </a:r>
             <a:endParaRPr lang="en-US" sz="1800" dirty="0"/>
           </a:p>
@@ -17524,7 +17524,7 @@
                   <a:schemeClr val="tx2"/>
                 </a:solidFill>
               </a:rPr>
-              <a:t>The center of gravity moves to the household</a:t>
+              <a:t>Built around four things</a:t>
             </a:r>
             <a:endParaRPr lang="en-US" sz="2800" dirty="0"/>
           </a:p>
@@ -17539,11 +17539,11 @@
         <p:spPr>
           <a:xfrm>
             <a:off x="548640" y="1417320"/>
-            <a:ext cx="4937760" cy="4160520"/>
+            <a:ext cx="2651760" cy="2697480"/>
           </a:xfrm>
           <a:prstGeom prst="roundRect">
             <a:avLst>
-              <a:gd name="adj" fmla="val 1758"/>
+              <a:gd name="adj" fmla="val 2759"/>
             </a:avLst>
           </a:prstGeom>
           <a:solidFill>
@@ -17559,208 +17559,24 @@
       </p:sp>
       <p:sp>
         <p:nvSpPr>
-          <p:cNvPr id="5" name="text"/>
-          <p:cNvSpPr txBox="1"/>
-          <p:nvPr/>
-        </p:nvSpPr>
-        <p:spPr>
-          <a:xfrm>
-            <a:off x="777240" y="1581912"/>
-            <a:ext cx="4572000" cy="274320"/>
-          </a:xfrm>
-          <a:prstGeom prst="rect">
-            <a:avLst/>
-          </a:prstGeom>
-          <a:noFill/>
-          <a:ln/>
-        </p:spPr>
-        <p:txBody>
-          <a:bodyPr wrap="square" lIns="0" tIns="0" rIns="0" bIns="0" rtlCol="0" anchor="t"/>
-          <a:lstStyle/>
-          <a:p>
-            <a:pPr indent="0" marL="0">
-              <a:buNone/>
-            </a:pPr>
-            <a:r>
-              <a:rPr lang="en-US" sz="1100" b="1" dirty="0">
-                <a:solidFill>
-                  <a:schemeClr val="accent6"/>
-                </a:solidFill>
-              </a:rPr>
-              <a:t>WHOLESALE ASSET MANAGER</a:t>
-            </a:r>
-            <a:endParaRPr lang="en-US" sz="1100" dirty="0"/>
-          </a:p>
-        </p:txBody>
-      </p:sp>
-      <p:sp>
-        <p:nvSpPr>
-          <p:cNvPr id="6" name="text"/>
-          <p:cNvSpPr txBox="1"/>
-          <p:nvPr/>
-        </p:nvSpPr>
-        <p:spPr>
-          <a:xfrm>
-            <a:off x="777240" y="1874520"/>
-            <a:ext cx="4480560" cy="548640"/>
-          </a:xfrm>
-          <a:prstGeom prst="rect">
-            <a:avLst/>
-          </a:prstGeom>
-          <a:noFill/>
-          <a:ln/>
-        </p:spPr>
-        <p:txBody>
-          <a:bodyPr wrap="square" lIns="0" tIns="0" rIns="0" bIns="0" rtlCol="0" anchor="t"/>
-          <a:lstStyle/>
-          <a:p>
-            <a:pPr indent="0" marL="0">
-              <a:buNone/>
-            </a:pPr>
-            <a:r>
-              <a:rPr lang="en-US" sz="1300" b="1" dirty="0">
-                <a:solidFill>
-                  <a:schemeClr val="tx2"/>
-                </a:solidFill>
-              </a:rPr>
-              <a:t>Center of gravity: the distributor, the advisor, attributed flows</a:t>
-            </a:r>
-            <a:endParaRPr lang="en-US" sz="1300" dirty="0"/>
-          </a:p>
-        </p:txBody>
-      </p:sp>
-      <p:sp>
-        <p:nvSpPr>
-          <p:cNvPr id="7" name="wholesale"/>
-          <p:cNvSpPr txBox="1"/>
-          <p:nvPr/>
-        </p:nvSpPr>
-        <p:spPr>
-          <a:xfrm>
-            <a:off x="777240" y="2514600"/>
-            <a:ext cx="4480560" cy="2926080"/>
-          </a:xfrm>
-          <a:prstGeom prst="rect">
-            <a:avLst/>
-          </a:prstGeom>
-          <a:noFill/>
-          <a:ln/>
-        </p:spPr>
-        <p:txBody>
-          <a:bodyPr wrap="square" lIns="0" tIns="0" rIns="0" bIns="0" rtlCol="0" anchor="t"/>
-          <a:lstStyle/>
-          <a:p>
-            <a:pPr marL="127000" indent="-127000">
-              <a:spcAft>
-                <a:spcPts val="600"/>
-              </a:spcAft>
-              <a:buSzPct val="100000"/>
-              <a:buChar char="•"/>
-            </a:pPr>
-            <a:r>
-              <a:rPr lang="en-US" sz="1150" dirty="0">
-                <a:solidFill>
-                  <a:schemeClr val="tx1"/>
-                </a:solidFill>
-              </a:rPr>
-              <a:t>Distributor firm hierarchy: firm, home office, branch, team, external advisor</a:t>
-            </a:r>
-            <a:endParaRPr lang="en-US" sz="1150" dirty="0"/>
-          </a:p>
-          <a:p>
-            <a:pPr marL="127000" indent="-127000">
-              <a:spcAft>
-                <a:spcPts val="600"/>
-              </a:spcAft>
-              <a:buSzPct val="100000"/>
-              <a:buChar char="•"/>
-            </a:pPr>
-            <a:r>
-              <a:rPr lang="en-US" sz="1150" dirty="0">
-                <a:solidFill>
-                  <a:schemeClr val="tx1"/>
-                </a:solidFill>
-              </a:rPr>
-              <a:t>Attributed flows and AUM credited to the advisor and the territory</a:t>
-            </a:r>
-            <a:endParaRPr lang="en-US" sz="1150" dirty="0"/>
-          </a:p>
-          <a:p>
-            <a:pPr marL="127000" indent="-127000">
-              <a:spcAft>
-                <a:spcPts val="600"/>
-              </a:spcAft>
-              <a:buSzPct val="100000"/>
-              <a:buChar char="•"/>
-            </a:pPr>
-            <a:r>
-              <a:rPr lang="en-US" sz="1150" dirty="0">
-                <a:solidFill>
-                  <a:schemeClr val="tx1"/>
-                </a:solidFill>
-              </a:rPr>
-              <a:t>The fund book of record (IBOR) and shareholder positions in own funds</a:t>
-            </a:r>
-            <a:endParaRPr lang="en-US" sz="1150" dirty="0"/>
-          </a:p>
-          <a:p>
-            <a:pPr marL="127000" indent="-127000">
-              <a:spcAft>
-                <a:spcPts val="600"/>
-              </a:spcAft>
-              <a:buSzPct val="100000"/>
-              <a:buChar char="•"/>
-            </a:pPr>
-            <a:r>
-              <a:rPr lang="en-US" sz="1150" dirty="0">
-                <a:solidFill>
-                  <a:schemeClr val="tx1"/>
-                </a:solidFill>
-              </a:rPr>
-              <a:t>Wholesaler coverage, territories and crediting rules</a:t>
-            </a:r>
-            <a:endParaRPr lang="en-US" sz="1150" dirty="0"/>
-          </a:p>
-          <a:p>
-            <a:pPr marL="127000" indent="-127000">
-              <a:spcAft>
-                <a:spcPts val="600"/>
-              </a:spcAft>
-              <a:buSzPct val="100000"/>
-              <a:buChar char="•"/>
-            </a:pPr>
-            <a:r>
-              <a:rPr lang="en-US" sz="1150" dirty="0">
-                <a:solidFill>
-                  <a:schemeClr val="tx1"/>
-                </a:solidFill>
-              </a:rPr>
-              <a:t>Distribution compliance: FINRA 2210, distributor due diligence, cross-border</a:t>
-            </a:r>
-            <a:endParaRPr lang="en-US" sz="1150" dirty="0"/>
-          </a:p>
-        </p:txBody>
-      </p:sp>
-      <p:sp>
-        <p:nvSpPr>
-          <p:cNvPr id="8" name="arrow"/>
+          <p:cNvPr id="5" name="panel"/>
           <p:cNvSpPr/>
           <p:nvPr/>
         </p:nvSpPr>
         <p:spPr>
           <a:xfrm>
-            <a:off x="5623560" y="3154680"/>
-            <a:ext cx="685800" cy="640080"/>
-          </a:xfrm>
-          <a:prstGeom prst="rightArrow">
+            <a:off x="548640" y="1417320"/>
+            <a:ext cx="2651760" cy="640080"/>
+          </a:xfrm>
+          <a:prstGeom prst="rect">
             <a:avLst/>
           </a:prstGeom>
           <a:solidFill>
-            <a:schemeClr val="accent4"/>
+            <a:schemeClr val="accent1"/>
           </a:solidFill>
           <a:ln w="12700">
             <a:solidFill>
-              <a:schemeClr val="accent4"/>
+              <a:schemeClr val="accent1"/>
             </a:solidFill>
             <a:prstDash val="solid"/>
           </a:ln>
@@ -17768,18 +17584,606 @@
       </p:sp>
       <p:sp>
         <p:nvSpPr>
+          <p:cNvPr id="6" name="text"/>
+          <p:cNvSpPr txBox="1"/>
+          <p:nvPr/>
+        </p:nvSpPr>
+        <p:spPr>
+          <a:xfrm>
+            <a:off x="713232" y="1417320"/>
+            <a:ext cx="2322576" cy="640080"/>
+          </a:xfrm>
+          <a:prstGeom prst="rect">
+            <a:avLst/>
+          </a:prstGeom>
+          <a:noFill/>
+          <a:ln/>
+        </p:spPr>
+        <p:txBody>
+          <a:bodyPr wrap="square" lIns="0" tIns="0" rIns="0" bIns="0" rtlCol="0" anchor="ctr"/>
+          <a:lstStyle/>
+          <a:p>
+            <a:pPr indent="0" marL="0">
+              <a:buNone/>
+            </a:pPr>
+            <a:r>
+              <a:rPr lang="en-US" sz="1400" b="1" dirty="0">
+                <a:solidFill>
+                  <a:schemeClr val="bg1"/>
+                </a:solidFill>
+              </a:rPr>
+              <a:t>The client household</a:t>
+            </a:r>
+            <a:endParaRPr lang="en-US" sz="1400" dirty="0"/>
+          </a:p>
+        </p:txBody>
+      </p:sp>
+      <p:sp>
+        <p:nvSpPr>
+          <p:cNvPr id="7" name="text"/>
+          <p:cNvSpPr txBox="1"/>
+          <p:nvPr/>
+        </p:nvSpPr>
+        <p:spPr>
+          <a:xfrm>
+            <a:off x="713232" y="2167128"/>
+            <a:ext cx="2322576" cy="457200"/>
+          </a:xfrm>
+          <a:prstGeom prst="rect">
+            <a:avLst/>
+          </a:prstGeom>
+          <a:noFill/>
+          <a:ln/>
+        </p:spPr>
+        <p:txBody>
+          <a:bodyPr wrap="square" lIns="0" tIns="0" rIns="0" bIns="0" rtlCol="0" anchor="t"/>
+          <a:lstStyle/>
+          <a:p>
+            <a:pPr indent="0" marL="0">
+              <a:buNone/>
+            </a:pPr>
+            <a:r>
+              <a:rPr lang="en-US" sz="1000" b="1" dirty="0">
+                <a:solidFill>
+                  <a:schemeClr val="accent1"/>
+                </a:solidFill>
+              </a:rPr>
+              <a:t>02 Client &amp; Household</a:t>
+            </a:r>
+            <a:endParaRPr lang="en-US" sz="1000" dirty="0"/>
+          </a:p>
+        </p:txBody>
+      </p:sp>
+      <p:sp>
+        <p:nvSpPr>
+          <p:cNvPr id="8" name="text"/>
+          <p:cNvSpPr txBox="1"/>
+          <p:nvPr/>
+        </p:nvSpPr>
+        <p:spPr>
+          <a:xfrm>
+            <a:off x="713232" y="2651760"/>
+            <a:ext cx="2322576" cy="1417320"/>
+          </a:xfrm>
+          <a:prstGeom prst="rect">
+            <a:avLst/>
+          </a:prstGeom>
+          <a:noFill/>
+          <a:ln/>
+        </p:spPr>
+        <p:txBody>
+          <a:bodyPr wrap="square" lIns="0" tIns="0" rIns="0" bIns="0" rtlCol="0" anchor="t"/>
+          <a:lstStyle/>
+          <a:p>
+            <a:pPr indent="0" marL="0">
+              <a:buNone/>
+            </a:pPr>
+            <a:r>
+              <a:rPr lang="en-US" sz="1050" dirty="0">
+                <a:solidFill>
+                  <a:schemeClr val="tx1"/>
+                </a:solidFill>
+              </a:rPr>
+              <a:t>The party master is the client: individuals, joint owners, households as parties, entities, authorized agents, trusted contacts, and the versioned investor profile that Reg BI and the Advisers Act require.</a:t>
+            </a:r>
+            <a:endParaRPr lang="en-US" sz="1050" dirty="0"/>
+          </a:p>
+        </p:txBody>
+      </p:sp>
+      <p:sp>
+        <p:nvSpPr>
           <p:cNvPr id="9" name="card"/>
           <p:cNvSpPr/>
           <p:nvPr/>
         </p:nvSpPr>
         <p:spPr>
           <a:xfrm>
-            <a:off x="6446520" y="1417320"/>
-            <a:ext cx="5193792" cy="4160520"/>
+            <a:off x="3346704" y="1417320"/>
+            <a:ext cx="2651760" cy="2697480"/>
           </a:xfrm>
           <a:prstGeom prst="roundRect">
             <a:avLst>
-              <a:gd name="adj" fmla="val 1758"/>
+              <a:gd name="adj" fmla="val 2759"/>
+            </a:avLst>
+          </a:prstGeom>
+          <a:solidFill>
+            <a:schemeClr val="bg2"/>
+          </a:solidFill>
+          <a:ln w="12700">
+            <a:solidFill>
+              <a:schemeClr val="bg2"/>
+            </a:solidFill>
+            <a:prstDash val="solid"/>
+          </a:ln>
+        </p:spPr>
+      </p:sp>
+      <p:sp>
+        <p:nvSpPr>
+          <p:cNvPr id="10" name="panel"/>
+          <p:cNvSpPr/>
+          <p:nvPr/>
+        </p:nvSpPr>
+        <p:spPr>
+          <a:xfrm>
+            <a:off x="3346704" y="1417320"/>
+            <a:ext cx="2651760" cy="640080"/>
+          </a:xfrm>
+          <a:prstGeom prst="rect">
+            <a:avLst/>
+          </a:prstGeom>
+          <a:solidFill>
+            <a:schemeClr val="accent2"/>
+          </a:solidFill>
+          <a:ln w="12700">
+            <a:solidFill>
+              <a:schemeClr val="accent2"/>
+            </a:solidFill>
+            <a:prstDash val="solid"/>
+          </a:ln>
+        </p:spPr>
+      </p:sp>
+      <p:sp>
+        <p:nvSpPr>
+          <p:cNvPr id="11" name="text"/>
+          <p:cNvSpPr txBox="1"/>
+          <p:nvPr/>
+        </p:nvSpPr>
+        <p:spPr>
+          <a:xfrm>
+            <a:off x="3511296" y="1417320"/>
+            <a:ext cx="2322576" cy="640080"/>
+          </a:xfrm>
+          <a:prstGeom prst="rect">
+            <a:avLst/>
+          </a:prstGeom>
+          <a:noFill/>
+          <a:ln/>
+        </p:spPr>
+        <p:txBody>
+          <a:bodyPr wrap="square" lIns="0" tIns="0" rIns="0" bIns="0" rtlCol="0" anchor="ctr"/>
+          <a:lstStyle/>
+          <a:p>
+            <a:pPr indent="0" marL="0">
+              <a:buNone/>
+            </a:pPr>
+            <a:r>
+              <a:rPr lang="en-US" sz="1400" b="1" dirty="0">
+                <a:solidFill>
+                  <a:schemeClr val="bg1"/>
+                </a:solidFill>
+              </a:rPr>
+              <a:t>The account</a:t>
+            </a:r>
+            <a:endParaRPr lang="en-US" sz="1400" dirty="0"/>
+          </a:p>
+        </p:txBody>
+      </p:sp>
+      <p:sp>
+        <p:nvSpPr>
+          <p:cNvPr id="12" name="text"/>
+          <p:cNvSpPr txBox="1"/>
+          <p:nvPr/>
+        </p:nvSpPr>
+        <p:spPr>
+          <a:xfrm>
+            <a:off x="3511296" y="2167128"/>
+            <a:ext cx="2322576" cy="457200"/>
+          </a:xfrm>
+          <a:prstGeom prst="rect">
+            <a:avLst/>
+          </a:prstGeom>
+          <a:noFill/>
+          <a:ln/>
+        </p:spPr>
+        <p:txBody>
+          <a:bodyPr wrap="square" lIns="0" tIns="0" rIns="0" bIns="0" rtlCol="0" anchor="t"/>
+          <a:lstStyle/>
+          <a:p>
+            <a:pPr indent="0" marL="0">
+              <a:buNone/>
+            </a:pPr>
+            <a:r>
+              <a:rPr lang="en-US" sz="1000" b="1" dirty="0">
+                <a:solidFill>
+                  <a:schemeClr val="accent2"/>
+                </a:solidFill>
+              </a:rPr>
+              <a:t>15 Account</a:t>
+            </a:r>
+            <a:endParaRPr lang="en-US" sz="1000" dirty="0"/>
+          </a:p>
+        </p:txBody>
+      </p:sp>
+      <p:sp>
+        <p:nvSpPr>
+          <p:cNvPr id="13" name="text"/>
+          <p:cNvSpPr txBox="1"/>
+          <p:nvPr/>
+        </p:nvSpPr>
+        <p:spPr>
+          <a:xfrm>
+            <a:off x="3511296" y="2651760"/>
+            <a:ext cx="2322576" cy="1417320"/>
+          </a:xfrm>
+          <a:prstGeom prst="rect">
+            <a:avLst/>
+          </a:prstGeom>
+          <a:noFill/>
+          <a:ln/>
+        </p:spPr>
+        <p:txBody>
+          <a:bodyPr wrap="square" lIns="0" tIns="0" rIns="0" bIns="0" rtlCol="0" anchor="t"/>
+          <a:lstStyle/>
+          <a:p>
+            <a:pPr indent="0" marL="0">
+              <a:buNone/>
+            </a:pPr>
+            <a:r>
+              <a:rPr lang="en-US" sz="1050" dirty="0">
+                <a:solidFill>
+                  <a:schemeClr val="tx1"/>
+                </a:solidFill>
+              </a:rPr>
+              <a:t>The brokerage and advisory account: registration types (IRA, Roth, 529, UTMA, trust, entity), features (margin, options, sweep), agreements, beneficiaries, program enrollment, cost-basis election.</a:t>
+            </a:r>
+            <a:endParaRPr lang="en-US" sz="1050" dirty="0"/>
+          </a:p>
+        </p:txBody>
+      </p:sp>
+      <p:sp>
+        <p:nvSpPr>
+          <p:cNvPr id="14" name="card"/>
+          <p:cNvSpPr/>
+          <p:nvPr/>
+        </p:nvSpPr>
+        <p:spPr>
+          <a:xfrm>
+            <a:off x="6144768" y="1417320"/>
+            <a:ext cx="2651760" cy="2697480"/>
+          </a:xfrm>
+          <a:prstGeom prst="roundRect">
+            <a:avLst>
+              <a:gd name="adj" fmla="val 2759"/>
+            </a:avLst>
+          </a:prstGeom>
+          <a:solidFill>
+            <a:schemeClr val="bg2"/>
+          </a:solidFill>
+          <a:ln w="12700">
+            <a:solidFill>
+              <a:schemeClr val="bg2"/>
+            </a:solidFill>
+            <a:prstDash val="solid"/>
+          </a:ln>
+        </p:spPr>
+      </p:sp>
+      <p:sp>
+        <p:nvSpPr>
+          <p:cNvPr id="15" name="panel"/>
+          <p:cNvSpPr/>
+          <p:nvPr/>
+        </p:nvSpPr>
+        <p:spPr>
+          <a:xfrm>
+            <a:off x="6144768" y="1417320"/>
+            <a:ext cx="2651760" cy="640080"/>
+          </a:xfrm>
+          <a:prstGeom prst="rect">
+            <a:avLst/>
+          </a:prstGeom>
+          <a:solidFill>
+            <a:schemeClr val="accent3"/>
+          </a:solidFill>
+          <a:ln w="12700">
+            <a:solidFill>
+              <a:schemeClr val="accent3"/>
+            </a:solidFill>
+            <a:prstDash val="solid"/>
+          </a:ln>
+        </p:spPr>
+      </p:sp>
+      <p:sp>
+        <p:nvSpPr>
+          <p:cNvPr id="16" name="text"/>
+          <p:cNvSpPr txBox="1"/>
+          <p:nvPr/>
+        </p:nvSpPr>
+        <p:spPr>
+          <a:xfrm>
+            <a:off x="6309360" y="1417320"/>
+            <a:ext cx="2322576" cy="640080"/>
+          </a:xfrm>
+          <a:prstGeom prst="rect">
+            <a:avLst/>
+          </a:prstGeom>
+          <a:noFill/>
+          <a:ln/>
+        </p:spPr>
+        <p:txBody>
+          <a:bodyPr wrap="square" lIns="0" tIns="0" rIns="0" bIns="0" rtlCol="0" anchor="ctr"/>
+          <a:lstStyle/>
+          <a:p>
+            <a:pPr indent="0" marL="0">
+              <a:buNone/>
+            </a:pPr>
+            <a:r>
+              <a:rPr lang="en-US" sz="1400" b="1" dirty="0">
+                <a:solidFill>
+                  <a:schemeClr val="bg1"/>
+                </a:solidFill>
+              </a:rPr>
+              <a:t>The advice relationship</a:t>
+            </a:r>
+            <a:endParaRPr lang="en-US" sz="1400" dirty="0"/>
+          </a:p>
+        </p:txBody>
+      </p:sp>
+      <p:sp>
+        <p:nvSpPr>
+          <p:cNvPr id="17" name="text"/>
+          <p:cNvSpPr txBox="1"/>
+          <p:nvPr/>
+        </p:nvSpPr>
+        <p:spPr>
+          <a:xfrm>
+            <a:off x="6309360" y="2167128"/>
+            <a:ext cx="2322576" cy="457200"/>
+          </a:xfrm>
+          <a:prstGeom prst="rect">
+            <a:avLst/>
+          </a:prstGeom>
+          <a:noFill/>
+          <a:ln/>
+        </p:spPr>
+        <p:txBody>
+          <a:bodyPr wrap="square" lIns="0" tIns="0" rIns="0" bIns="0" rtlCol="0" anchor="t"/>
+          <a:lstStyle/>
+          <a:p>
+            <a:pPr indent="0" marL="0">
+              <a:buNone/>
+            </a:pPr>
+            <a:r>
+              <a:rPr lang="en-US" sz="1000" b="1" dirty="0">
+                <a:solidFill>
+                  <a:schemeClr val="accent3"/>
+                </a:solidFill>
+              </a:rPr>
+              <a:t>45 Financial Planning &amp; Advice</a:t>
+            </a:r>
+            <a:endParaRPr lang="en-US" sz="1000" dirty="0"/>
+          </a:p>
+        </p:txBody>
+      </p:sp>
+      <p:sp>
+        <p:nvSpPr>
+          <p:cNvPr id="18" name="text"/>
+          <p:cNvSpPr txBox="1"/>
+          <p:nvPr/>
+        </p:nvSpPr>
+        <p:spPr>
+          <a:xfrm>
+            <a:off x="6309360" y="2651760"/>
+            <a:ext cx="2322576" cy="1417320"/>
+          </a:xfrm>
+          <a:prstGeom prst="rect">
+            <a:avLst/>
+          </a:prstGeom>
+          <a:noFill/>
+          <a:ln/>
+        </p:spPr>
+        <p:txBody>
+          <a:bodyPr wrap="square" lIns="0" tIns="0" rIns="0" bIns="0" rtlCol="0" anchor="t"/>
+          <a:lstStyle/>
+          <a:p>
+            <a:pPr indent="0" marL="0">
+              <a:buNone/>
+            </a:pPr>
+            <a:r>
+              <a:rPr lang="en-US" sz="1050" dirty="0">
+                <a:solidFill>
+                  <a:schemeClr val="tx1"/>
+                </a:solidFill>
+              </a:rPr>
+              <a:t>Engagements, goals, plans and versions, recommendations with rationale and alternatives, best-interest evidence, rollover analyses and PTE 2020-02 documentation.</a:t>
+            </a:r>
+            <a:endParaRPr lang="en-US" sz="1050" dirty="0"/>
+          </a:p>
+        </p:txBody>
+      </p:sp>
+      <p:sp>
+        <p:nvSpPr>
+          <p:cNvPr id="19" name="card"/>
+          <p:cNvSpPr/>
+          <p:nvPr/>
+        </p:nvSpPr>
+        <p:spPr>
+          <a:xfrm>
+            <a:off x="8942832" y="1417320"/>
+            <a:ext cx="2651760" cy="2697480"/>
+          </a:xfrm>
+          <a:prstGeom prst="roundRect">
+            <a:avLst>
+              <a:gd name="adj" fmla="val 2759"/>
+            </a:avLst>
+          </a:prstGeom>
+          <a:solidFill>
+            <a:schemeClr val="bg2"/>
+          </a:solidFill>
+          <a:ln w="12700">
+            <a:solidFill>
+              <a:schemeClr val="bg2"/>
+            </a:solidFill>
+            <a:prstDash val="solid"/>
+          </a:ln>
+        </p:spPr>
+      </p:sp>
+      <p:sp>
+        <p:nvSpPr>
+          <p:cNvPr id="20" name="panel"/>
+          <p:cNvSpPr/>
+          <p:nvPr/>
+        </p:nvSpPr>
+        <p:spPr>
+          <a:xfrm>
+            <a:off x="8942832" y="1417320"/>
+            <a:ext cx="2651760" cy="640080"/>
+          </a:xfrm>
+          <a:prstGeom prst="rect">
+            <a:avLst/>
+          </a:prstGeom>
+          <a:solidFill>
+            <a:schemeClr val="accent5"/>
+          </a:solidFill>
+          <a:ln w="12700">
+            <a:solidFill>
+              <a:schemeClr val="accent5"/>
+            </a:solidFill>
+            <a:prstDash val="solid"/>
+          </a:ln>
+        </p:spPr>
+      </p:sp>
+      <p:sp>
+        <p:nvSpPr>
+          <p:cNvPr id="21" name="text"/>
+          <p:cNvSpPr txBox="1"/>
+          <p:nvPr/>
+        </p:nvSpPr>
+        <p:spPr>
+          <a:xfrm>
+            <a:off x="9107424" y="1417320"/>
+            <a:ext cx="2322576" cy="640080"/>
+          </a:xfrm>
+          <a:prstGeom prst="rect">
+            <a:avLst/>
+          </a:prstGeom>
+          <a:noFill/>
+          <a:ln/>
+        </p:spPr>
+        <p:txBody>
+          <a:bodyPr wrap="square" lIns="0" tIns="0" rIns="0" bIns="0" rtlCol="0" anchor="ctr"/>
+          <a:lstStyle/>
+          <a:p>
+            <a:pPr indent="0" marL="0">
+              <a:buNone/>
+            </a:pPr>
+            <a:r>
+              <a:rPr lang="en-US" sz="1400" b="1" dirty="0">
+                <a:solidFill>
+                  <a:schemeClr val="bg1"/>
+                </a:solidFill>
+              </a:rPr>
+              <a:t>The brokerage book of record</a:t>
+            </a:r>
+            <a:endParaRPr lang="en-US" sz="1400" dirty="0"/>
+          </a:p>
+        </p:txBody>
+      </p:sp>
+      <p:sp>
+        <p:nvSpPr>
+          <p:cNvPr id="22" name="text"/>
+          <p:cNvSpPr txBox="1"/>
+          <p:nvPr/>
+        </p:nvSpPr>
+        <p:spPr>
+          <a:xfrm>
+            <a:off x="9107424" y="2167128"/>
+            <a:ext cx="2322576" cy="457200"/>
+          </a:xfrm>
+          <a:prstGeom prst="rect">
+            <a:avLst/>
+          </a:prstGeom>
+          <a:noFill/>
+          <a:ln/>
+        </p:spPr>
+        <p:txBody>
+          <a:bodyPr wrap="square" lIns="0" tIns="0" rIns="0" bIns="0" rtlCol="0" anchor="t"/>
+          <a:lstStyle/>
+          <a:p>
+            <a:pPr indent="0" marL="0">
+              <a:buNone/>
+            </a:pPr>
+            <a:r>
+              <a:rPr lang="en-US" sz="1000" b="1" dirty="0">
+                <a:solidFill>
+                  <a:schemeClr val="accent5"/>
+                </a:solidFill>
+              </a:rPr>
+              <a:t>49 Clearing, Settlement &amp; Client Asset Custody</a:t>
+            </a:r>
+            <a:endParaRPr lang="en-US" sz="1000" dirty="0"/>
+          </a:p>
+        </p:txBody>
+      </p:sp>
+      <p:sp>
+        <p:nvSpPr>
+          <p:cNvPr id="23" name="text"/>
+          <p:cNvSpPr txBox="1"/>
+          <p:nvPr/>
+        </p:nvSpPr>
+        <p:spPr>
+          <a:xfrm>
+            <a:off x="9107424" y="2651760"/>
+            <a:ext cx="2322576" cy="1417320"/>
+          </a:xfrm>
+          <a:prstGeom prst="rect">
+            <a:avLst/>
+          </a:prstGeom>
+          <a:noFill/>
+          <a:ln/>
+        </p:spPr>
+        <p:txBody>
+          <a:bodyPr wrap="square" lIns="0" tIns="0" rIns="0" bIns="0" rtlCol="0" anchor="t"/>
+          <a:lstStyle/>
+          <a:p>
+            <a:pPr indent="0" marL="0">
+              <a:buNone/>
+            </a:pPr>
+            <a:r>
+              <a:rPr lang="en-US" sz="1050" dirty="0">
+                <a:solidFill>
+                  <a:schemeClr val="tx1"/>
+                </a:solidFill>
+              </a:rPr>
+              <a:t>What each client account owns: securities, tax lots and cost basis, cash and sweep, pending activity; Rule 15c3-3 custody. Distinct from the fund book (18) and the shareholder register (06).</a:t>
+            </a:r>
+            <a:endParaRPr lang="en-US" sz="1050" dirty="0"/>
+          </a:p>
+        </p:txBody>
+      </p:sp>
+      <p:sp>
+        <p:nvSpPr>
+          <p:cNvPr id="24" name="card"/>
+          <p:cNvSpPr/>
+          <p:nvPr/>
+        </p:nvSpPr>
+        <p:spPr>
+          <a:xfrm>
+            <a:off x="548640" y="4251960"/>
+            <a:ext cx="11094415" cy="1965960"/>
+          </a:xfrm>
+          <a:prstGeom prst="roundRect">
+            <a:avLst>
+              <a:gd name="adj" fmla="val 3721"/>
             </a:avLst>
           </a:prstGeom>
           <a:solidFill>
@@ -17795,14 +18199,14 @@
       </p:sp>
       <p:sp>
         <p:nvSpPr>
-          <p:cNvPr id="10" name="text"/>
-          <p:cNvSpPr txBox="1"/>
-          <p:nvPr/>
-        </p:nvSpPr>
-        <p:spPr>
-          <a:xfrm>
-            <a:off x="6675120" y="1581912"/>
-            <a:ext cx="4572000" cy="274320"/>
+          <p:cNvPr id="25" name="text"/>
+          <p:cNvSpPr txBox="1"/>
+          <p:nvPr/>
+        </p:nvSpPr>
+        <p:spPr>
+          <a:xfrm>
+            <a:off x="777240" y="4361688"/>
+            <a:ext cx="10637215" cy="274320"/>
           </a:xfrm>
           <a:prstGeom prst="rect">
             <a:avLst/>
@@ -17818,27 +18222,27 @@
               <a:buNone/>
             </a:pPr>
             <a:r>
-              <a:rPr lang="en-US" sz="1100" b="1" dirty="0">
+              <a:rPr lang="en-US" sz="1000" b="1" dirty="0">
                 <a:solidFill>
                   <a:schemeClr val="accent4"/>
                 </a:solidFill>
               </a:rPr>
-              <a:t>DIRECT WEALTH MANAGER</a:t>
-            </a:r>
-            <a:endParaRPr lang="en-US" sz="1100" dirty="0"/>
-          </a:p>
-        </p:txBody>
-      </p:sp>
-      <p:sp>
-        <p:nvSpPr>
-          <p:cNvPr id="11" name="text"/>
-          <p:cNvSpPr txBox="1"/>
-          <p:nvPr/>
-        </p:nvSpPr>
-        <p:spPr>
-          <a:xfrm>
-            <a:off x="6675120" y="1874520"/>
-            <a:ext cx="4754880" cy="548640"/>
+              <a:t>DESIGN RULES AROUND THEM, EACH A NUMBERED DECISION WITH A TAILORING LEVER</a:t>
+            </a:r>
+            <a:endParaRPr lang="en-US" sz="1000" dirty="0"/>
+          </a:p>
+        </p:txBody>
+      </p:sp>
+      <p:sp>
+        <p:nvSpPr>
+          <p:cNvPr id="26" name="text"/>
+          <p:cNvSpPr txBox="1"/>
+          <p:nvPr/>
+        </p:nvSpPr>
+        <p:spPr>
+          <a:xfrm>
+            <a:off x="777240" y="4709160"/>
+            <a:ext cx="5303520" cy="457200"/>
           </a:xfrm>
           <a:prstGeom prst="rect">
             <a:avLst/>
@@ -17850,143 +18254,180 @@
           <a:bodyPr wrap="square" lIns="0" tIns="0" rIns="0" bIns="0" rtlCol="0" anchor="t"/>
           <a:lstStyle/>
           <a:p>
-            <a:pPr indent="0" marL="0">
-              <a:buNone/>
-            </a:pPr>
-            <a:r>
-              <a:rPr lang="en-US" sz="1300" b="1" dirty="0">
-                <a:solidFill>
-                  <a:schemeClr val="bg1"/>
-                </a:solidFill>
-              </a:rPr>
-              <a:t>Center of gravity: the household, the account, the advice relationship, the brokerage book of record</a:t>
-            </a:r>
-            <a:endParaRPr lang="en-US" sz="1300" dirty="0"/>
-          </a:p>
-        </p:txBody>
-      </p:sp>
-      <p:sp>
-        <p:nvSpPr>
-          <p:cNvPr id="12" name="wealth"/>
-          <p:cNvSpPr txBox="1"/>
-          <p:nvPr/>
-        </p:nvSpPr>
-        <p:spPr>
-          <a:xfrm>
-            <a:off x="6675120" y="2514600"/>
-            <a:ext cx="4754880" cy="2926080"/>
-          </a:xfrm>
-          <a:prstGeom prst="rect">
-            <a:avLst/>
-          </a:prstGeom>
-          <a:noFill/>
-          <a:ln/>
-        </p:spPr>
-        <p:txBody>
-          <a:bodyPr wrap="square" lIns="0" tIns="0" rIns="0" bIns="0" rtlCol="0" anchor="t"/>
-          <a:lstStyle/>
-          <a:p>
             <a:pPr marL="127000" indent="-127000">
-              <a:spcAft>
-                <a:spcPts val="600"/>
-              </a:spcAft>
               <a:buSzPct val="100000"/>
               <a:buChar char="•"/>
             </a:pPr>
             <a:r>
-              <a:rPr lang="en-US" sz="1150" dirty="0">
+              <a:rPr lang="en-US" sz="1050" dirty="0">
                 <a:solidFill>
                   <a:schemeClr val="bg1"/>
                 </a:solidFill>
               </a:rPr>
-              <a:t>Client Household: members, authorized agents, trusted contacts, the versioned investor profile</a:t>
-            </a:r>
-            <a:endParaRPr lang="en-US" sz="1150" dirty="0"/>
-          </a:p>
+              <a:t>Managed accounts (46) and client orders (48) are their own domains, distinct from fund portfolio management (24) and the fund trading desk (25)</a:t>
+            </a:r>
+            <a:endParaRPr lang="en-US" sz="1050" dirty="0"/>
+          </a:p>
+        </p:txBody>
+      </p:sp>
+      <p:sp>
+        <p:nvSpPr>
+          <p:cNvPr id="27" name="text"/>
+          <p:cNvSpPr txBox="1"/>
+          <p:nvPr/>
+        </p:nvSpPr>
+        <p:spPr>
+          <a:xfrm>
+            <a:off x="6309360" y="4709160"/>
+            <a:ext cx="5303520" cy="457200"/>
+          </a:xfrm>
+          <a:prstGeom prst="rect">
+            <a:avLst/>
+          </a:prstGeom>
+          <a:noFill/>
+          <a:ln/>
+        </p:spPr>
+        <p:txBody>
+          <a:bodyPr wrap="square" lIns="0" tIns="0" rIns="0" bIns="0" rtlCol="0" anchor="t"/>
+          <a:lstStyle/>
           <a:p>
             <a:pPr marL="127000" indent="-127000">
-              <a:spcAft>
-                <a:spcPts val="600"/>
-              </a:spcAft>
               <a:buSzPct val="100000"/>
               <a:buChar char="•"/>
             </a:pPr>
             <a:r>
-              <a:rPr lang="en-US" sz="1150" dirty="0">
+              <a:rPr lang="en-US" sz="1050" dirty="0">
                 <a:solidFill>
                   <a:schemeClr val="bg1"/>
                 </a:solidFill>
               </a:rPr>
-              <a:t>Client Assets, Net New Assets and Advised Assets by channel; Firm AUM reconciled, never summed</a:t>
-            </a:r>
-            <a:endParaRPr lang="en-US" sz="1150" dirty="0"/>
-          </a:p>
+              <a:t>Fees and billing are an operational domain (47); revenue recognition and profitability stay in 10</a:t>
+            </a:r>
+            <a:endParaRPr lang="en-US" sz="1050" dirty="0"/>
+          </a:p>
+        </p:txBody>
+      </p:sp>
+      <p:sp>
+        <p:nvSpPr>
+          <p:cNvPr id="28" name="text"/>
+          <p:cNvSpPr txBox="1"/>
+          <p:nvPr/>
+        </p:nvSpPr>
+        <p:spPr>
+          <a:xfrm>
+            <a:off x="777240" y="5184648"/>
+            <a:ext cx="5303520" cy="457200"/>
+          </a:xfrm>
+          <a:prstGeom prst="rect">
+            <a:avLst/>
+          </a:prstGeom>
+          <a:noFill/>
+          <a:ln/>
+        </p:spPr>
+        <p:txBody>
+          <a:bodyPr wrap="square" lIns="0" tIns="0" rIns="0" bIns="0" rtlCol="0" anchor="t"/>
+          <a:lstStyle/>
           <a:p>
             <a:pPr marL="127000" indent="-127000">
-              <a:spcAft>
-                <a:spcPts val="600"/>
-              </a:spcAft>
               <a:buSzPct val="100000"/>
               <a:buChar char="•"/>
             </a:pPr>
             <a:r>
-              <a:rPr lang="en-US" sz="1150" dirty="0">
+              <a:rPr lang="en-US" sz="1050" dirty="0">
                 <a:solidFill>
                   <a:schemeClr val="bg1"/>
                 </a:solidFill>
               </a:rPr>
-              <a:t>Three books of record: portfolio holdings (18), client holdings (49), fund shareholder positions (06)</a:t>
-            </a:r>
-            <a:endParaRPr lang="en-US" sz="1150" dirty="0"/>
-          </a:p>
+              <a:t>Retail conduct and supervision (08) is the compliance core: Reg BI, Form CRS, FINRA 3110, senior investor protection</a:t>
+            </a:r>
+            <a:endParaRPr lang="en-US" sz="1050" dirty="0"/>
+          </a:p>
+        </p:txBody>
+      </p:sp>
+      <p:sp>
+        <p:nvSpPr>
+          <p:cNvPr id="29" name="text"/>
+          <p:cNvSpPr txBox="1"/>
+          <p:nvPr/>
+        </p:nvSpPr>
+        <p:spPr>
+          <a:xfrm>
+            <a:off x="6309360" y="5184648"/>
+            <a:ext cx="5303520" cy="457200"/>
+          </a:xfrm>
+          <a:prstGeom prst="rect">
+            <a:avLst/>
+          </a:prstGeom>
+          <a:noFill/>
+          <a:ln/>
+        </p:spPr>
+        <p:txBody>
+          <a:bodyPr wrap="square" lIns="0" tIns="0" rIns="0" bIns="0" rtlCol="0" anchor="t"/>
+          <a:lstStyle/>
           <a:p>
             <a:pPr marL="127000" indent="-127000">
-              <a:spcAft>
-                <a:spcPts val="600"/>
-              </a:spcAft>
               <a:buSzPct val="100000"/>
               <a:buChar char="•"/>
             </a:pPr>
             <a:r>
-              <a:rPr lang="en-US" sz="1150" dirty="0">
+              <a:rPr lang="en-US" sz="1050" dirty="0">
                 <a:solidFill>
                   <a:schemeClr val="bg1"/>
                 </a:solidFill>
               </a:rPr>
-              <a:t>Advice as data: goals, plans, recommendations, best-interest evidence, rollover documentation</a:t>
-            </a:r>
-            <a:endParaRPr lang="en-US" sz="1150" dirty="0"/>
-          </a:p>
+              <a:t>The intermediary and institutional business is a channel (05), kept thin by default; the lever restores depth</a:t>
+            </a:r>
+            <a:endParaRPr lang="en-US" sz="1050" dirty="0"/>
+          </a:p>
+        </p:txBody>
+      </p:sp>
+      <p:sp>
+        <p:nvSpPr>
+          <p:cNvPr id="30" name="text"/>
+          <p:cNvSpPr txBox="1"/>
+          <p:nvPr/>
+        </p:nvSpPr>
+        <p:spPr>
+          <a:xfrm>
+            <a:off x="777240" y="5660136"/>
+            <a:ext cx="5303520" cy="457200"/>
+          </a:xfrm>
+          <a:prstGeom prst="rect">
+            <a:avLst/>
+          </a:prstGeom>
+          <a:noFill/>
+          <a:ln/>
+        </p:spPr>
+        <p:txBody>
+          <a:bodyPr wrap="square" lIns="0" tIns="0" rIns="0" bIns="0" rtlCol="0" anchor="t"/>
+          <a:lstStyle/>
           <a:p>
             <a:pPr marL="127000" indent="-127000">
-              <a:spcAft>
-                <a:spcPts val="600"/>
-              </a:spcAft>
               <a:buSzPct val="100000"/>
               <a:buChar char="•"/>
             </a:pPr>
             <a:r>
-              <a:rPr lang="en-US" sz="1150" dirty="0">
+              <a:rPr lang="en-US" sz="1050" dirty="0">
                 <a:solidFill>
                   <a:schemeClr val="bg1"/>
                 </a:solidFill>
               </a:rPr>
-              <a:t>Retail conduct and supervision: Reg BI, Form CRS, FINRA 3110, senior investor protection</a:t>
-            </a:r>
-            <a:endParaRPr lang="en-US" sz="1150" dirty="0"/>
-          </a:p>
-        </p:txBody>
-      </p:sp>
-      <p:sp>
-        <p:nvSpPr>
-          <p:cNvPr id="13" name="text"/>
-          <p:cNvSpPr txBox="1"/>
-          <p:nvPr/>
-        </p:nvSpPr>
-        <p:spPr>
-          <a:xfrm>
-            <a:off x="548640" y="5715000"/>
-            <a:ext cx="11094415" cy="457200"/>
+              <a:t>Client Assets is the headline certified number and Firm AUM the manufacturing number: reconciled, never summed</a:t>
+            </a:r>
+            <a:endParaRPr lang="en-US" sz="1050" dirty="0"/>
+          </a:p>
+        </p:txBody>
+      </p:sp>
+      <p:sp>
+        <p:nvSpPr>
+          <p:cNvPr id="31" name="text"/>
+          <p:cNvSpPr txBox="1"/>
+          <p:nvPr/>
+        </p:nvSpPr>
+        <p:spPr>
+          <a:xfrm>
+            <a:off x="6309360" y="5660136"/>
+            <a:ext cx="5303520" cy="457200"/>
           </a:xfrm>
           <a:prstGeom prst="rect">
             <a:avLst/>
@@ -17998,18 +18439,19 @@
           <a:bodyPr wrap="square" lIns="0" tIns="0" rIns="0" bIns="0" rtlCol="0" anchor="t"/>
           <a:lstStyle/>
           <a:p>
-            <a:pPr indent="0" marL="0">
-              <a:buNone/>
-            </a:pPr>
-            <a:r>
-              <a:rPr lang="en-US" sz="1100" i="1" dirty="0">
-                <a:solidFill>
-                  <a:schemeClr val="accent6"/>
-                </a:solidFill>
-              </a:rPr>
-              <a:t>Fourteen structural decisions (CW-001 onward) carry the shift; each names its tailoring lever. The wholesale model is frozen as a sibling and shared-foundation fixes are cherry-picked both ways.</a:t>
-            </a:r>
-            <a:endParaRPr lang="en-US" sz="1100" dirty="0"/>
+            <a:pPr marL="127000" indent="-127000">
+              <a:buSzPct val="100000"/>
+              <a:buChar char="•"/>
+            </a:pPr>
+            <a:r>
+              <a:rPr lang="en-US" sz="1050" dirty="0">
+                <a:solidFill>
+                  <a:schemeClr val="bg1"/>
+                </a:solidFill>
+              </a:rPr>
+              <a:t>US only; personal data tiered on every attribute; every conduct object cites the rule by number</a:t>
+            </a:r>
+            <a:endParaRPr lang="en-US" sz="1050" dirty="0"/>
           </a:p>
         </p:txBody>
       </p:sp>
@@ -18586,7 +19028,7 @@
                   <a:schemeClr val="tx1"/>
                 </a:solidFill>
               </a:rPr>
-              <a:t>What moves when the center of gravity is the household, the account, the advice relationship and the brokerage book of record</a:t>
+              <a:t>A model built for a direct wealth manager: the household, the account, the advice relationship and the brokerage book of record at its center</a:t>
             </a:r>
             <a:endParaRPr lang="en-US" sz="1300" dirty="0"/>
           </a:p>
@@ -19148,7 +19590,7 @@
         <p:spPr>
           <a:xfrm>
             <a:off x="1097280" y="1508760"/>
-            <a:ext cx="2331720" cy="457200"/>
+            <a:ext cx="2880360" cy="457200"/>
           </a:xfrm>
           <a:prstGeom prst="rect">
             <a:avLst/>
@@ -19178,42 +19620,6 @@
       <p:sp>
         <p:nvSpPr>
           <p:cNvPr id="7" name="text"/>
-          <p:cNvSpPr txBox="1"/>
-          <p:nvPr/>
-        </p:nvSpPr>
-        <p:spPr>
-          <a:xfrm>
-            <a:off x="3337560" y="1527048"/>
-            <a:ext cx="640080" cy="274320"/>
-          </a:xfrm>
-          <a:prstGeom prst="rect">
-            <a:avLst/>
-          </a:prstGeom>
-          <a:noFill/>
-          <a:ln/>
-        </p:spPr>
-        <p:txBody>
-          <a:bodyPr wrap="square" lIns="0" tIns="0" rIns="0" bIns="0" rtlCol="0" anchor="t"/>
-          <a:lstStyle/>
-          <a:p>
-            <a:pPr algn="r" indent="0" marL="0">
-              <a:buNone/>
-            </a:pPr>
-            <a:r>
-              <a:rPr lang="en-US" sz="900" b="1" dirty="0">
-                <a:solidFill>
-                  <a:schemeClr val="accent3"/>
-                </a:solidFill>
-              </a:rPr>
-              <a:t>Replaced</a:t>
-            </a:r>
-            <a:endParaRPr lang="en-US" sz="900" dirty="0"/>
-          </a:p>
-        </p:txBody>
-      </p:sp>
-      <p:sp>
-        <p:nvSpPr>
-          <p:cNvPr id="8" name="text"/>
           <p:cNvSpPr txBox="1"/>
           <p:nvPr/>
         </p:nvSpPr>
@@ -19249,7 +19655,7 @@
       </p:sp>
       <p:sp>
         <p:nvSpPr>
-          <p:cNvPr id="9" name="card"/>
+          <p:cNvPr id="8" name="card"/>
           <p:cNvSpPr/>
           <p:nvPr/>
         </p:nvSpPr>
@@ -19276,7 +19682,7 @@
       </p:sp>
       <p:sp>
         <p:nvSpPr>
-          <p:cNvPr id="10" name="text"/>
+          <p:cNvPr id="9" name="text"/>
           <p:cNvSpPr txBox="1"/>
           <p:nvPr/>
         </p:nvSpPr>
@@ -19312,79 +19718,43 @@
       </p:sp>
       <p:sp>
         <p:nvSpPr>
+          <p:cNvPr id="10" name="text"/>
+          <p:cNvSpPr txBox="1"/>
+          <p:nvPr/>
+        </p:nvSpPr>
+        <p:spPr>
+          <a:xfrm>
+            <a:off x="4846320" y="1508760"/>
+            <a:ext cx="2880360" cy="457200"/>
+          </a:xfrm>
+          <a:prstGeom prst="rect">
+            <a:avLst/>
+          </a:prstGeom>
+          <a:noFill/>
+          <a:ln/>
+        </p:spPr>
+        <p:txBody>
+          <a:bodyPr wrap="square" lIns="0" tIns="0" rIns="0" bIns="0" rtlCol="0" anchor="t"/>
+          <a:lstStyle/>
+          <a:p>
+            <a:pPr indent="0" marL="0">
+              <a:buNone/>
+            </a:pPr>
+            <a:r>
+              <a:rPr lang="en-US" sz="1100" b="1" dirty="0">
+                <a:solidFill>
+                  <a:schemeClr val="tx2"/>
+                </a:solidFill>
+              </a:rPr>
+              <a:t>Account</a:t>
+            </a:r>
+            <a:endParaRPr lang="en-US" sz="1100" dirty="0"/>
+          </a:p>
+        </p:txBody>
+      </p:sp>
+      <p:sp>
+        <p:nvSpPr>
           <p:cNvPr id="11" name="text"/>
-          <p:cNvSpPr txBox="1"/>
-          <p:nvPr/>
-        </p:nvSpPr>
-        <p:spPr>
-          <a:xfrm>
-            <a:off x="4846320" y="1508760"/>
-            <a:ext cx="2331720" cy="457200"/>
-          </a:xfrm>
-          <a:prstGeom prst="rect">
-            <a:avLst/>
-          </a:prstGeom>
-          <a:noFill/>
-          <a:ln/>
-        </p:spPr>
-        <p:txBody>
-          <a:bodyPr wrap="square" lIns="0" tIns="0" rIns="0" bIns="0" rtlCol="0" anchor="t"/>
-          <a:lstStyle/>
-          <a:p>
-            <a:pPr indent="0" marL="0">
-              <a:buNone/>
-            </a:pPr>
-            <a:r>
-              <a:rPr lang="en-US" sz="1100" b="1" dirty="0">
-                <a:solidFill>
-                  <a:schemeClr val="tx2"/>
-                </a:solidFill>
-              </a:rPr>
-              <a:t>Account</a:t>
-            </a:r>
-            <a:endParaRPr lang="en-US" sz="1100" dirty="0"/>
-          </a:p>
-        </p:txBody>
-      </p:sp>
-      <p:sp>
-        <p:nvSpPr>
-          <p:cNvPr id="12" name="text"/>
-          <p:cNvSpPr txBox="1"/>
-          <p:nvPr/>
-        </p:nvSpPr>
-        <p:spPr>
-          <a:xfrm>
-            <a:off x="7086600" y="1527048"/>
-            <a:ext cx="640080" cy="274320"/>
-          </a:xfrm>
-          <a:prstGeom prst="rect">
-            <a:avLst/>
-          </a:prstGeom>
-          <a:noFill/>
-          <a:ln/>
-        </p:spPr>
-        <p:txBody>
-          <a:bodyPr wrap="square" lIns="0" tIns="0" rIns="0" bIns="0" rtlCol="0" anchor="t"/>
-          <a:lstStyle/>
-          <a:p>
-            <a:pPr algn="r" indent="0" marL="0">
-              <a:buNone/>
-            </a:pPr>
-            <a:r>
-              <a:rPr lang="en-US" sz="900" b="1" dirty="0">
-                <a:solidFill>
-                  <a:schemeClr val="accent3"/>
-                </a:solidFill>
-              </a:rPr>
-              <a:t>Replaced</a:t>
-            </a:r>
-            <a:endParaRPr lang="en-US" sz="900" dirty="0"/>
-          </a:p>
-        </p:txBody>
-      </p:sp>
-      <p:sp>
-        <p:nvSpPr>
-          <p:cNvPr id="13" name="text"/>
           <p:cNvSpPr txBox="1"/>
           <p:nvPr/>
         </p:nvSpPr>
@@ -19420,7 +19790,7 @@
       </p:sp>
       <p:sp>
         <p:nvSpPr>
-          <p:cNvPr id="14" name="card"/>
+          <p:cNvPr id="12" name="card"/>
           <p:cNvSpPr/>
           <p:nvPr/>
         </p:nvSpPr>
@@ -19447,7 +19817,7 @@
       </p:sp>
       <p:sp>
         <p:nvSpPr>
-          <p:cNvPr id="15" name="text"/>
+          <p:cNvPr id="13" name="text"/>
           <p:cNvSpPr txBox="1"/>
           <p:nvPr/>
         </p:nvSpPr>
@@ -19483,14 +19853,14 @@
       </p:sp>
       <p:sp>
         <p:nvSpPr>
-          <p:cNvPr id="16" name="text"/>
+          <p:cNvPr id="14" name="text"/>
           <p:cNvSpPr txBox="1"/>
           <p:nvPr/>
         </p:nvSpPr>
         <p:spPr>
           <a:xfrm>
             <a:off x="8595360" y="1508760"/>
-            <a:ext cx="2331720" cy="457200"/>
+            <a:ext cx="2880360" cy="457200"/>
           </a:xfrm>
           <a:prstGeom prst="rect">
             <a:avLst/>
@@ -19519,43 +19889,7 @@
       </p:sp>
       <p:sp>
         <p:nvSpPr>
-          <p:cNvPr id="17" name="text"/>
-          <p:cNvSpPr txBox="1"/>
-          <p:nvPr/>
-        </p:nvSpPr>
-        <p:spPr>
-          <a:xfrm>
-            <a:off x="10835640" y="1527048"/>
-            <a:ext cx="640080" cy="274320"/>
-          </a:xfrm>
-          <a:prstGeom prst="rect">
-            <a:avLst/>
-          </a:prstGeom>
-          <a:noFill/>
-          <a:ln/>
-        </p:spPr>
-        <p:txBody>
-          <a:bodyPr wrap="square" lIns="0" tIns="0" rIns="0" bIns="0" rtlCol="0" anchor="t"/>
-          <a:lstStyle/>
-          <a:p>
-            <a:pPr algn="r" indent="0" marL="0">
-              <a:buNone/>
-            </a:pPr>
-            <a:r>
-              <a:rPr lang="en-US" sz="900" b="1" dirty="0">
-                <a:solidFill>
-                  <a:schemeClr val="accent4"/>
-                </a:solidFill>
-              </a:rPr>
-              <a:t>New</a:t>
-            </a:r>
-            <a:endParaRPr lang="en-US" sz="900" dirty="0"/>
-          </a:p>
-        </p:txBody>
-      </p:sp>
-      <p:sp>
-        <p:nvSpPr>
-          <p:cNvPr id="18" name="text"/>
+          <p:cNvPr id="15" name="text"/>
           <p:cNvSpPr txBox="1"/>
           <p:nvPr/>
         </p:nvSpPr>
@@ -19591,7 +19925,7 @@
       </p:sp>
       <p:sp>
         <p:nvSpPr>
-          <p:cNvPr id="19" name="card"/>
+          <p:cNvPr id="16" name="card"/>
           <p:cNvSpPr/>
           <p:nvPr/>
         </p:nvSpPr>
@@ -19618,7 +19952,7 @@
       </p:sp>
       <p:sp>
         <p:nvSpPr>
-          <p:cNvPr id="20" name="text"/>
+          <p:cNvPr id="17" name="text"/>
           <p:cNvSpPr txBox="1"/>
           <p:nvPr/>
         </p:nvSpPr>
@@ -19654,14 +19988,14 @@
       </p:sp>
       <p:sp>
         <p:nvSpPr>
-          <p:cNvPr id="21" name="text"/>
+          <p:cNvPr id="18" name="text"/>
           <p:cNvSpPr txBox="1"/>
           <p:nvPr/>
         </p:nvSpPr>
         <p:spPr>
           <a:xfrm>
             <a:off x="1097280" y="2697480"/>
-            <a:ext cx="2331720" cy="457200"/>
+            <a:ext cx="2880360" cy="457200"/>
           </a:xfrm>
           <a:prstGeom prst="rect">
             <a:avLst/>
@@ -19690,43 +20024,7 @@
       </p:sp>
       <p:sp>
         <p:nvSpPr>
-          <p:cNvPr id="22" name="text"/>
-          <p:cNvSpPr txBox="1"/>
-          <p:nvPr/>
-        </p:nvSpPr>
-        <p:spPr>
-          <a:xfrm>
-            <a:off x="3337560" y="2715768"/>
-            <a:ext cx="640080" cy="274320"/>
-          </a:xfrm>
-          <a:prstGeom prst="rect">
-            <a:avLst/>
-          </a:prstGeom>
-          <a:noFill/>
-          <a:ln/>
-        </p:spPr>
-        <p:txBody>
-          <a:bodyPr wrap="square" lIns="0" tIns="0" rIns="0" bIns="0" rtlCol="0" anchor="t"/>
-          <a:lstStyle/>
-          <a:p>
-            <a:pPr algn="r" indent="0" marL="0">
-              <a:buNone/>
-            </a:pPr>
-            <a:r>
-              <a:rPr lang="en-US" sz="900" b="1" dirty="0">
-                <a:solidFill>
-                  <a:schemeClr val="accent4"/>
-                </a:solidFill>
-              </a:rPr>
-              <a:t>New</a:t>
-            </a:r>
-            <a:endParaRPr lang="en-US" sz="900" dirty="0"/>
-          </a:p>
-        </p:txBody>
-      </p:sp>
-      <p:sp>
-        <p:nvSpPr>
-          <p:cNvPr id="23" name="text"/>
+          <p:cNvPr id="19" name="text"/>
           <p:cNvSpPr txBox="1"/>
           <p:nvPr/>
         </p:nvSpPr>
@@ -19762,7 +20060,7 @@
       </p:sp>
       <p:sp>
         <p:nvSpPr>
-          <p:cNvPr id="24" name="card"/>
+          <p:cNvPr id="20" name="card"/>
           <p:cNvSpPr/>
           <p:nvPr/>
         </p:nvSpPr>
@@ -19789,7 +20087,7 @@
       </p:sp>
       <p:sp>
         <p:nvSpPr>
-          <p:cNvPr id="25" name="text"/>
+          <p:cNvPr id="21" name="text"/>
           <p:cNvSpPr txBox="1"/>
           <p:nvPr/>
         </p:nvSpPr>
@@ -19825,14 +20123,14 @@
       </p:sp>
       <p:sp>
         <p:nvSpPr>
-          <p:cNvPr id="26" name="text"/>
+          <p:cNvPr id="22" name="text"/>
           <p:cNvSpPr txBox="1"/>
           <p:nvPr/>
         </p:nvSpPr>
         <p:spPr>
           <a:xfrm>
             <a:off x="4846320" y="2697480"/>
-            <a:ext cx="2331720" cy="457200"/>
+            <a:ext cx="2880360" cy="457200"/>
           </a:xfrm>
           <a:prstGeom prst="rect">
             <a:avLst/>
@@ -19861,43 +20159,7 @@
       </p:sp>
       <p:sp>
         <p:nvSpPr>
-          <p:cNvPr id="27" name="text"/>
-          <p:cNvSpPr txBox="1"/>
-          <p:nvPr/>
-        </p:nvSpPr>
-        <p:spPr>
-          <a:xfrm>
-            <a:off x="7086600" y="2715768"/>
-            <a:ext cx="640080" cy="274320"/>
-          </a:xfrm>
-          <a:prstGeom prst="rect">
-            <a:avLst/>
-          </a:prstGeom>
-          <a:noFill/>
-          <a:ln/>
-        </p:spPr>
-        <p:txBody>
-          <a:bodyPr wrap="square" lIns="0" tIns="0" rIns="0" bIns="0" rtlCol="0" anchor="t"/>
-          <a:lstStyle/>
-          <a:p>
-            <a:pPr algn="r" indent="0" marL="0">
-              <a:buNone/>
-            </a:pPr>
-            <a:r>
-              <a:rPr lang="en-US" sz="900" b="1" dirty="0">
-                <a:solidFill>
-                  <a:schemeClr val="accent4"/>
-                </a:solidFill>
-              </a:rPr>
-              <a:t>New</a:t>
-            </a:r>
-            <a:endParaRPr lang="en-US" sz="900" dirty="0"/>
-          </a:p>
-        </p:txBody>
-      </p:sp>
-      <p:sp>
-        <p:nvSpPr>
-          <p:cNvPr id="28" name="text"/>
+          <p:cNvPr id="23" name="text"/>
           <p:cNvSpPr txBox="1"/>
           <p:nvPr/>
         </p:nvSpPr>
@@ -19933,7 +20195,7 @@
       </p:sp>
       <p:sp>
         <p:nvSpPr>
-          <p:cNvPr id="29" name="card"/>
+          <p:cNvPr id="24" name="card"/>
           <p:cNvSpPr/>
           <p:nvPr/>
         </p:nvSpPr>
@@ -19960,7 +20222,7 @@
       </p:sp>
       <p:sp>
         <p:nvSpPr>
-          <p:cNvPr id="30" name="text"/>
+          <p:cNvPr id="25" name="text"/>
           <p:cNvSpPr txBox="1"/>
           <p:nvPr/>
         </p:nvSpPr>
@@ -19996,14 +20258,14 @@
       </p:sp>
       <p:sp>
         <p:nvSpPr>
-          <p:cNvPr id="31" name="text"/>
+          <p:cNvPr id="26" name="text"/>
           <p:cNvSpPr txBox="1"/>
           <p:nvPr/>
         </p:nvSpPr>
         <p:spPr>
           <a:xfrm>
             <a:off x="8595360" y="2697480"/>
-            <a:ext cx="2331720" cy="457200"/>
+            <a:ext cx="2880360" cy="457200"/>
           </a:xfrm>
           <a:prstGeom prst="rect">
             <a:avLst/>
@@ -20032,43 +20294,7 @@
       </p:sp>
       <p:sp>
         <p:nvSpPr>
-          <p:cNvPr id="32" name="text"/>
-          <p:cNvSpPr txBox="1"/>
-          <p:nvPr/>
-        </p:nvSpPr>
-        <p:spPr>
-          <a:xfrm>
-            <a:off x="10835640" y="2715768"/>
-            <a:ext cx="640080" cy="274320"/>
-          </a:xfrm>
-          <a:prstGeom prst="rect">
-            <a:avLst/>
-          </a:prstGeom>
-          <a:noFill/>
-          <a:ln/>
-        </p:spPr>
-        <p:txBody>
-          <a:bodyPr wrap="square" lIns="0" tIns="0" rIns="0" bIns="0" rtlCol="0" anchor="t"/>
-          <a:lstStyle/>
-          <a:p>
-            <a:pPr algn="r" indent="0" marL="0">
-              <a:buNone/>
-            </a:pPr>
-            <a:r>
-              <a:rPr lang="en-US" sz="900" b="1" dirty="0">
-                <a:solidFill>
-                  <a:schemeClr val="accent3"/>
-                </a:solidFill>
-              </a:rPr>
-              <a:t>Replaced</a:t>
-            </a:r>
-            <a:endParaRPr lang="en-US" sz="900" dirty="0"/>
-          </a:p>
-        </p:txBody>
-      </p:sp>
-      <p:sp>
-        <p:nvSpPr>
-          <p:cNvPr id="33" name="text"/>
+          <p:cNvPr id="27" name="text"/>
           <p:cNvSpPr txBox="1"/>
           <p:nvPr/>
         </p:nvSpPr>
@@ -20104,7 +20330,7 @@
       </p:sp>
       <p:sp>
         <p:nvSpPr>
-          <p:cNvPr id="34" name="card"/>
+          <p:cNvPr id="28" name="card"/>
           <p:cNvSpPr/>
           <p:nvPr/>
         </p:nvSpPr>
@@ -20131,7 +20357,7 @@
       </p:sp>
       <p:sp>
         <p:nvSpPr>
-          <p:cNvPr id="35" name="text"/>
+          <p:cNvPr id="29" name="text"/>
           <p:cNvSpPr txBox="1"/>
           <p:nvPr/>
         </p:nvSpPr>
@@ -20167,14 +20393,14 @@
       </p:sp>
       <p:sp>
         <p:nvSpPr>
-          <p:cNvPr id="36" name="text"/>
+          <p:cNvPr id="30" name="text"/>
           <p:cNvSpPr txBox="1"/>
           <p:nvPr/>
         </p:nvSpPr>
         <p:spPr>
           <a:xfrm>
             <a:off x="1097280" y="3886200"/>
-            <a:ext cx="2331720" cy="457200"/>
+            <a:ext cx="2880360" cy="457200"/>
           </a:xfrm>
           <a:prstGeom prst="rect">
             <a:avLst/>
@@ -20203,43 +20429,7 @@
       </p:sp>
       <p:sp>
         <p:nvSpPr>
-          <p:cNvPr id="37" name="text"/>
-          <p:cNvSpPr txBox="1"/>
-          <p:nvPr/>
-        </p:nvSpPr>
-        <p:spPr>
-          <a:xfrm>
-            <a:off x="3337560" y="3904488"/>
-            <a:ext cx="640080" cy="274320"/>
-          </a:xfrm>
-          <a:prstGeom prst="rect">
-            <a:avLst/>
-          </a:prstGeom>
-          <a:noFill/>
-          <a:ln/>
-        </p:spPr>
-        <p:txBody>
-          <a:bodyPr wrap="square" lIns="0" tIns="0" rIns="0" bIns="0" rtlCol="0" anchor="t"/>
-          <a:lstStyle/>
-          <a:p>
-            <a:pPr algn="r" indent="0" marL="0">
-              <a:buNone/>
-            </a:pPr>
-            <a:r>
-              <a:rPr lang="en-US" sz="900" b="1" dirty="0">
-                <a:solidFill>
-                  <a:schemeClr val="accent6"/>
-                </a:solidFill>
-              </a:rPr>
-              <a:t>Adapted</a:t>
-            </a:r>
-            <a:endParaRPr lang="en-US" sz="900" dirty="0"/>
-          </a:p>
-        </p:txBody>
-      </p:sp>
-      <p:sp>
-        <p:nvSpPr>
-          <p:cNvPr id="38" name="text"/>
+          <p:cNvPr id="31" name="text"/>
           <p:cNvSpPr txBox="1"/>
           <p:nvPr/>
         </p:nvSpPr>
@@ -20275,7 +20465,7 @@
       </p:sp>
       <p:sp>
         <p:nvSpPr>
-          <p:cNvPr id="39" name="card"/>
+          <p:cNvPr id="32" name="card"/>
           <p:cNvSpPr/>
           <p:nvPr/>
         </p:nvSpPr>
@@ -20302,7 +20492,7 @@
       </p:sp>
       <p:sp>
         <p:nvSpPr>
-          <p:cNvPr id="40" name="text"/>
+          <p:cNvPr id="33" name="text"/>
           <p:cNvSpPr txBox="1"/>
           <p:nvPr/>
         </p:nvSpPr>
@@ -20338,14 +20528,14 @@
       </p:sp>
       <p:sp>
         <p:nvSpPr>
-          <p:cNvPr id="41" name="text"/>
+          <p:cNvPr id="34" name="text"/>
           <p:cNvSpPr txBox="1"/>
           <p:nvPr/>
         </p:nvSpPr>
         <p:spPr>
           <a:xfrm>
             <a:off x="4846320" y="3886200"/>
-            <a:ext cx="2331720" cy="457200"/>
+            <a:ext cx="2880360" cy="457200"/>
           </a:xfrm>
           <a:prstGeom prst="rect">
             <a:avLst/>
@@ -20374,43 +20564,7 @@
       </p:sp>
       <p:sp>
         <p:nvSpPr>
-          <p:cNvPr id="42" name="text"/>
-          <p:cNvSpPr txBox="1"/>
-          <p:nvPr/>
-        </p:nvSpPr>
-        <p:spPr>
-          <a:xfrm>
-            <a:off x="7086600" y="3904488"/>
-            <a:ext cx="640080" cy="274320"/>
-          </a:xfrm>
-          <a:prstGeom prst="rect">
-            <a:avLst/>
-          </a:prstGeom>
-          <a:noFill/>
-          <a:ln/>
-        </p:spPr>
-        <p:txBody>
-          <a:bodyPr wrap="square" lIns="0" tIns="0" rIns="0" bIns="0" rtlCol="0" anchor="t"/>
-          <a:lstStyle/>
-          <a:p>
-            <a:pPr algn="r" indent="0" marL="0">
-              <a:buNone/>
-            </a:pPr>
-            <a:r>
-              <a:rPr lang="en-US" sz="900" b="1" dirty="0">
-                <a:solidFill>
-                  <a:schemeClr val="accent6"/>
-                </a:solidFill>
-              </a:rPr>
-              <a:t>Adapted</a:t>
-            </a:r>
-            <a:endParaRPr lang="en-US" sz="900" dirty="0"/>
-          </a:p>
-        </p:txBody>
-      </p:sp>
-      <p:sp>
-        <p:nvSpPr>
-          <p:cNvPr id="43" name="text"/>
+          <p:cNvPr id="35" name="text"/>
           <p:cNvSpPr txBox="1"/>
           <p:nvPr/>
         </p:nvSpPr>
@@ -20446,7 +20600,7 @@
       </p:sp>
       <p:sp>
         <p:nvSpPr>
-          <p:cNvPr id="44" name="card"/>
+          <p:cNvPr id="36" name="card"/>
           <p:cNvSpPr/>
           <p:nvPr/>
         </p:nvSpPr>
@@ -20473,7 +20627,7 @@
       </p:sp>
       <p:sp>
         <p:nvSpPr>
-          <p:cNvPr id="45" name="text"/>
+          <p:cNvPr id="37" name="text"/>
           <p:cNvSpPr txBox="1"/>
           <p:nvPr/>
         </p:nvSpPr>
@@ -20509,14 +20663,14 @@
       </p:sp>
       <p:sp>
         <p:nvSpPr>
-          <p:cNvPr id="46" name="text"/>
+          <p:cNvPr id="38" name="text"/>
           <p:cNvSpPr txBox="1"/>
           <p:nvPr/>
         </p:nvSpPr>
         <p:spPr>
           <a:xfrm>
             <a:off x="8595360" y="3886200"/>
-            <a:ext cx="2331720" cy="457200"/>
+            <a:ext cx="2880360" cy="457200"/>
           </a:xfrm>
           <a:prstGeom prst="rect">
             <a:avLst/>
@@ -20545,43 +20699,7 @@
       </p:sp>
       <p:sp>
         <p:nvSpPr>
-          <p:cNvPr id="47" name="text"/>
-          <p:cNvSpPr txBox="1"/>
-          <p:nvPr/>
-        </p:nvSpPr>
-        <p:spPr>
-          <a:xfrm>
-            <a:off x="10835640" y="3904488"/>
-            <a:ext cx="640080" cy="274320"/>
-          </a:xfrm>
-          <a:prstGeom prst="rect">
-            <a:avLst/>
-          </a:prstGeom>
-          <a:noFill/>
-          <a:ln/>
-        </p:spPr>
-        <p:txBody>
-          <a:bodyPr wrap="square" lIns="0" tIns="0" rIns="0" bIns="0" rtlCol="0" anchor="t"/>
-          <a:lstStyle/>
-          <a:p>
-            <a:pPr algn="r" indent="0" marL="0">
-              <a:buNone/>
-            </a:pPr>
-            <a:r>
-              <a:rPr lang="en-US" sz="900" b="1" dirty="0">
-                <a:solidFill>
-                  <a:schemeClr val="accent6"/>
-                </a:solidFill>
-              </a:rPr>
-              <a:t>Adapted</a:t>
-            </a:r>
-            <a:endParaRPr lang="en-US" sz="900" dirty="0"/>
-          </a:p>
-        </p:txBody>
-      </p:sp>
-      <p:sp>
-        <p:nvSpPr>
-          <p:cNvPr id="48" name="text"/>
+          <p:cNvPr id="39" name="text"/>
           <p:cNvSpPr txBox="1"/>
           <p:nvPr/>
         </p:nvSpPr>
@@ -20617,7 +20735,7 @@
       </p:sp>
       <p:sp>
         <p:nvSpPr>
-          <p:cNvPr id="49" name="card"/>
+          <p:cNvPr id="40" name="card"/>
           <p:cNvSpPr/>
           <p:nvPr/>
         </p:nvSpPr>
@@ -20644,7 +20762,7 @@
       </p:sp>
       <p:sp>
         <p:nvSpPr>
-          <p:cNvPr id="50" name="text"/>
+          <p:cNvPr id="41" name="text"/>
           <p:cNvSpPr txBox="1"/>
           <p:nvPr/>
         </p:nvSpPr>
@@ -20680,14 +20798,14 @@
       </p:sp>
       <p:sp>
         <p:nvSpPr>
-          <p:cNvPr id="51" name="text"/>
+          <p:cNvPr id="42" name="text"/>
           <p:cNvSpPr txBox="1"/>
           <p:nvPr/>
         </p:nvSpPr>
         <p:spPr>
           <a:xfrm>
             <a:off x="1097280" y="5074920"/>
-            <a:ext cx="2331720" cy="457200"/>
+            <a:ext cx="2880360" cy="457200"/>
           </a:xfrm>
           <a:prstGeom prst="rect">
             <a:avLst/>
@@ -20716,43 +20834,7 @@
       </p:sp>
       <p:sp>
         <p:nvSpPr>
-          <p:cNvPr id="52" name="text"/>
-          <p:cNvSpPr txBox="1"/>
-          <p:nvPr/>
-        </p:nvSpPr>
-        <p:spPr>
-          <a:xfrm>
-            <a:off x="3337560" y="5093208"/>
-            <a:ext cx="640080" cy="274320"/>
-          </a:xfrm>
-          <a:prstGeom prst="rect">
-            <a:avLst/>
-          </a:prstGeom>
-          <a:noFill/>
-          <a:ln/>
-        </p:spPr>
-        <p:txBody>
-          <a:bodyPr wrap="square" lIns="0" tIns="0" rIns="0" bIns="0" rtlCol="0" anchor="t"/>
-          <a:lstStyle/>
-          <a:p>
-            <a:pPr algn="r" indent="0" marL="0">
-              <a:buNone/>
-            </a:pPr>
-            <a:r>
-              <a:rPr lang="en-US" sz="900" b="1" dirty="0">
-                <a:solidFill>
-                  <a:schemeClr val="accent3"/>
-                </a:solidFill>
-              </a:rPr>
-              <a:t>Replaced</a:t>
-            </a:r>
-            <a:endParaRPr lang="en-US" sz="900" dirty="0"/>
-          </a:p>
-        </p:txBody>
-      </p:sp>
-      <p:sp>
-        <p:nvSpPr>
-          <p:cNvPr id="53" name="text"/>
+          <p:cNvPr id="43" name="text"/>
           <p:cNvSpPr txBox="1"/>
           <p:nvPr/>
         </p:nvSpPr>
@@ -20788,7 +20870,7 @@
       </p:sp>
       <p:sp>
         <p:nvSpPr>
-          <p:cNvPr id="54" name="card"/>
+          <p:cNvPr id="44" name="card"/>
           <p:cNvSpPr/>
           <p:nvPr/>
         </p:nvSpPr>
@@ -20815,7 +20897,7 @@
       </p:sp>
       <p:sp>
         <p:nvSpPr>
-          <p:cNvPr id="55" name="text"/>
+          <p:cNvPr id="45" name="text"/>
           <p:cNvSpPr txBox="1"/>
           <p:nvPr/>
         </p:nvSpPr>
@@ -20851,14 +20933,14 @@
       </p:sp>
       <p:sp>
         <p:nvSpPr>
-          <p:cNvPr id="56" name="text"/>
+          <p:cNvPr id="46" name="text"/>
           <p:cNvSpPr txBox="1"/>
           <p:nvPr/>
         </p:nvSpPr>
         <p:spPr>
           <a:xfrm>
             <a:off x="4846320" y="5074920"/>
-            <a:ext cx="2331720" cy="457200"/>
+            <a:ext cx="2880360" cy="457200"/>
           </a:xfrm>
           <a:prstGeom prst="rect">
             <a:avLst/>
@@ -20887,43 +20969,7 @@
       </p:sp>
       <p:sp>
         <p:nvSpPr>
-          <p:cNvPr id="57" name="text"/>
-          <p:cNvSpPr txBox="1"/>
-          <p:nvPr/>
-        </p:nvSpPr>
-        <p:spPr>
-          <a:xfrm>
-            <a:off x="7086600" y="5093208"/>
-            <a:ext cx="640080" cy="274320"/>
-          </a:xfrm>
-          <a:prstGeom prst="rect">
-            <a:avLst/>
-          </a:prstGeom>
-          <a:noFill/>
-          <a:ln/>
-        </p:spPr>
-        <p:txBody>
-          <a:bodyPr wrap="square" lIns="0" tIns="0" rIns="0" bIns="0" rtlCol="0" anchor="t"/>
-          <a:lstStyle/>
-          <a:p>
-            <a:pPr algn="r" indent="0" marL="0">
-              <a:buNone/>
-            </a:pPr>
-            <a:r>
-              <a:rPr lang="en-US" sz="900" b="1" dirty="0">
-                <a:solidFill>
-                  <a:schemeClr val="accent6"/>
-                </a:solidFill>
-              </a:rPr>
-              <a:t>Adapted</a:t>
-            </a:r>
-            <a:endParaRPr lang="en-US" sz="900" dirty="0"/>
-          </a:p>
-        </p:txBody>
-      </p:sp>
-      <p:sp>
-        <p:nvSpPr>
-          <p:cNvPr id="58" name="text"/>
+          <p:cNvPr id="47" name="text"/>
           <p:cNvSpPr txBox="1"/>
           <p:nvPr/>
         </p:nvSpPr>
@@ -20959,7 +21005,7 @@
       </p:sp>
       <p:sp>
         <p:nvSpPr>
-          <p:cNvPr id="59" name="card"/>
+          <p:cNvPr id="48" name="card"/>
           <p:cNvSpPr/>
           <p:nvPr/>
         </p:nvSpPr>
@@ -20986,7 +21032,7 @@
       </p:sp>
       <p:sp>
         <p:nvSpPr>
-          <p:cNvPr id="60" name="text"/>
+          <p:cNvPr id="49" name="text"/>
           <p:cNvSpPr txBox="1"/>
           <p:nvPr/>
         </p:nvSpPr>
@@ -21022,14 +21068,14 @@
       </p:sp>
       <p:sp>
         <p:nvSpPr>
-          <p:cNvPr id="61" name="text"/>
+          <p:cNvPr id="50" name="text"/>
           <p:cNvSpPr txBox="1"/>
           <p:nvPr/>
         </p:nvSpPr>
         <p:spPr>
           <a:xfrm>
             <a:off x="8595360" y="5074920"/>
-            <a:ext cx="2331720" cy="457200"/>
+            <a:ext cx="2880360" cy="457200"/>
           </a:xfrm>
           <a:prstGeom prst="rect">
             <a:avLst/>
@@ -21058,43 +21104,7 @@
       </p:sp>
       <p:sp>
         <p:nvSpPr>
-          <p:cNvPr id="62" name="text"/>
-          <p:cNvSpPr txBox="1"/>
-          <p:nvPr/>
-        </p:nvSpPr>
-        <p:spPr>
-          <a:xfrm>
-            <a:off x="10835640" y="5093208"/>
-            <a:ext cx="640080" cy="274320"/>
-          </a:xfrm>
-          <a:prstGeom prst="rect">
-            <a:avLst/>
-          </a:prstGeom>
-          <a:noFill/>
-          <a:ln/>
-        </p:spPr>
-        <p:txBody>
-          <a:bodyPr wrap="square" lIns="0" tIns="0" rIns="0" bIns="0" rtlCol="0" anchor="t"/>
-          <a:lstStyle/>
-          <a:p>
-            <a:pPr algn="r" indent="0" marL="0">
-              <a:buNone/>
-            </a:pPr>
-            <a:r>
-              <a:rPr lang="en-US" sz="900" b="1" dirty="0">
-                <a:solidFill>
-                  <a:schemeClr val="accent4"/>
-                </a:solidFill>
-              </a:rPr>
-              <a:t>New</a:t>
-            </a:r>
-            <a:endParaRPr lang="en-US" sz="900" dirty="0"/>
-          </a:p>
-        </p:txBody>
-      </p:sp>
-      <p:sp>
-        <p:nvSpPr>
-          <p:cNvPr id="63" name="text"/>
+          <p:cNvPr id="51" name="text"/>
           <p:cNvSpPr txBox="1"/>
           <p:nvPr/>
         </p:nvSpPr>
@@ -24398,7 +24408,7 @@
                   <a:schemeClr val="bg1"/>
                 </a:solidFill>
               </a:rPr>
-              <a:t>17</a:t>
+              <a:t>58</a:t>
             </a:r>
             <a:endParaRPr lang="en-US" sz="2800" dirty="0"/>
           </a:p>
@@ -24434,7 +24444,7 @@
                   <a:schemeClr val="bg2"/>
                 </a:solidFill>
               </a:rPr>
-              <a:t>new foundational products</a:t>
+              <a:t>foundational products</a:t>
             </a:r>
             <a:endParaRPr lang="en-US" sz="1050" dirty="0"/>
           </a:p>
@@ -24596,7 +24606,7 @@
                   <a:schemeClr val="bg1"/>
                 </a:solidFill>
               </a:rPr>
-              <a:t>20</a:t>
+              <a:t>55</a:t>
             </a:r>
             <a:endParaRPr lang="en-US" sz="2800" dirty="0"/>
           </a:p>
@@ -24632,7 +24642,7 @@
                   <a:schemeClr val="bg2"/>
                 </a:solidFill>
               </a:rPr>
-              <a:t>wealth business functions (FN-60 onward)</a:t>
+              <a:t>business functions</a:t>
             </a:r>
             <a:endParaRPr lang="en-US" sz="1050" dirty="0"/>
           </a:p>
@@ -24695,7 +24705,7 @@
                   <a:schemeClr val="bg1"/>
                 </a:solidFill>
               </a:rPr>
-              <a:t>10</a:t>
+              <a:t>20</a:t>
             </a:r>
             <a:endParaRPr lang="en-US" sz="2800" dirty="0"/>
           </a:p>
@@ -24731,7 +24741,7 @@
                   <a:schemeClr val="bg2"/>
                 </a:solidFill>
               </a:rPr>
-              <a:t>new semantic models (SM-20 onward)</a:t>
+              <a:t>semantic models, ten for the client business</a:t>
             </a:r>
             <a:endParaRPr lang="en-US" sz="1050" dirty="0"/>
           </a:p>
@@ -25895,7 +25905,7 @@
                   <a:schemeClr val="accent4"/>
                 </a:solidFill>
               </a:rPr>
-              <a:t>SEMANTIC MODELS FROM SM-20</a:t>
+              <a:t>SEMANTIC MODELS FOR THE CLIENT BUSINESS</a:t>
             </a:r>
             <a:endParaRPr lang="en-US" sz="1000" dirty="0"/>
           </a:p>

--- a/wm/Wealth_Manager_Foundational_Talktrack.pptx
+++ b/wm/Wealth_Manager_Foundational_Talktrack.pptx
@@ -142,14 +142,14 @@
   <p:extLst>
     <p:ext uri="{521415D9-36F7-43E2-AB2F-B90AF26B5E84}">
       <p14:sectionLst xmlns:p14="http://schemas.microsoft.com/office/powerpoint/2010/main">
-        <p14:section name="Opening" id="{7a4218d7-d890-ae8f-8803-089616da6ba2}">
+        <p14:section name="Opening" id="{c48a73dc-22ec-836d-11ba-ccdb8a267934}">
           <p14:sldIdLst>
             <p14:sldId id="256"/>
             <p14:sldId id="257"/>
             <p14:sldId id="258"/>
           </p14:sldIdLst>
         </p14:section>
-        <p14:section name="1 Data foundations" id="{c18f8651-8836-fed1-dfd6-2607da8b64e6}">
+        <p14:section name="1 Data foundations" id="{e5e27637-25ca-800b-d44e-cf0e8fae101d}">
           <p14:sldIdLst>
             <p14:sldId id="259"/>
             <p14:sldId id="260"/>
@@ -158,7 +158,7 @@
             <p14:sldId id="263"/>
           </p14:sldIdLst>
         </p14:section>
-        <p14:section name="2 Management overview" id="{7439c15b-f496-388c-29c7-85c2c4b86b62}">
+        <p14:section name="2 Management overview" id="{76f731ad-57ad-d8f6-f130-5912d6113543}">
           <p14:sldIdLst>
             <p14:sldId id="264"/>
             <p14:sldId id="265"/>
@@ -170,7 +170,7 @@
             <p14:sldId id="271"/>
           </p14:sldIdLst>
         </p14:section>
-        <p14:section name="3 The wealth manager" id="{92b29917-3751-4a92-93b8-aa52d7845b3c}">
+        <p14:section name="3 The wealth manager" id="{f1731cd8-356b-3959-fd64-df55d69b6591}">
           <p14:sldIdLst>
             <p14:sldId id="272"/>
             <p14:sldId id="273"/>
@@ -182,7 +182,7 @@
             <p14:sldId id="279"/>
           </p14:sldIdLst>
         </p14:section>
-        <p14:section name="4 One question, end to end" id="{8b72e544-f72e-85d0-cfa1-b846727a9b2c}">
+        <p14:section name="4 One question, end to end" id="{9b8e7c05-eb68-4009-2fed-a48777b97b31}">
           <p14:sldIdLst>
             <p14:sldId id="280"/>
             <p14:sldId id="281"/>
@@ -194,7 +194,7 @@
             <p14:sldId id="287"/>
           </p14:sldIdLst>
         </p14:section>
-        <p14:section name="5 What this means for you" id="{985be2cc-49ab-c40d-8a21-90e48aa7570f}">
+        <p14:section name="5 What this means for you" id="{8f7293b9-57e9-8855-92a7-c2c81b95cd78}">
           <p14:sldIdLst>
             <p14:sldId id="288"/>
             <p14:sldId id="289"/>
@@ -1778,7 +1778,7 @@
           <a:p>
             <a:r>
               <a:rPr lang="en-US" dirty="0"/>
-              <a:t>A wealth manager that clears its own trades keeps three books of record, and the taxonomy names them distinctly so a holding is never confused with a position. The fund book in 18 holds what the funds own. The brokerage book in 49 holds what each client account owns, with tax lots, cost basis, cash and sweep. The shareholder register in 06 holds who owns the funds, and for direct accounts it is a view of the brokerage book.
+              <a:t>A wealth manager that clears its own trades keeps three books of record, and the taxonomy names them distinctly so a holding is never confused with a position. The fund book in 18 holds what the funds own. The brokerage book in 49 holds what each client account owns, with tax lots, cost basis, cash and sweep. The fund shareholder position in 06 holds who owns the funds: for brokerage accounts a view of the brokerage book, for directly registered accounts a view of the 29 transfer agency register.
 The certified numbers follow. Client Assets, the headline, is the market value of every client account at the firm, by channel and holding type, built from the brokerage book and the register. Firm AUM, the manufacturing number, is own-fund net assets plus managed and institutional assets. They overlap by design: an own fund held in a client account is in both. So they are reconciled in one product and never summed. Net New Assets, Advised Assets, the household and client counts and personal rate of return round out the family.
 The decision that matters for the head of distribution: Client Assets is the headline number. Firm AUM is what the fund business reports. If your firm defines the headline differently, the change is made in the owning product, once.</a:t>
             </a:r>
@@ -1960,7 +1960,7 @@
               <a:rPr lang="en-US" dirty="0"/>
               <a:t>The product set on the taxonomy. Fifty-eight foundational products conform the masters, the books of record and the certified numbers. The ones your business runs on are listed on the left: the party master with the household as its primary role, the account master, the offering reference, client holdings, client orders, money movement, the advice record, model assignments, fee schedules and billing runs, the certified Client Assets and Net New Assets product, client fee revenue, official returns with personal rate of return, service interactions, the client document record, and the recordkept plan and participant books.
 On the right, a selection of the Client &amp; Advice consumer products, grouped by the three uses. You will recognize the acceptance questions in them: which recommendations lack evidence, which rollovers lack documentation, which households are due a review, what tax-loss harvesting saved.
-Scale, for the data team: 271 products live or in progress, each specified to attribute level; 55 business functions, from Financial Planning &amp; Advice through Client &amp; Channel Analytics; 20 semantic models, ten of them for the client business.</a:t>
+Scale, for the data team: 271 live products, each specified to attribute level; 55 business functions, from Financial Planning &amp; Advice through Client &amp; Channel Analytics; 22 semantic models, twelve of them wealth subject areas, from Client Assets &amp; Flows to Manager Oversight.</a:t>
             </a:r>
             <a:endParaRPr lang="en-US" dirty="0"/>
           </a:p>
@@ -2048,7 +2048,7 @@
           <a:p>
             <a:r>
               <a:rPr lang="en-US" dirty="0"/>
-              <a:t>The client business is published through ten subject-area models, SM-20 to SM-29, alongside the models for investment, fund operations and the corporate functions. The first, Client Assets &amp; Flows, owns the certified client-asset family. Client &amp; Household 360, Advice &amp; Planning and Managed Portfolios serve the advice business. Client Economics owns fee revenue. Retail Conduct &amp; Supervision gives the conduct evidence a home of its own.
+              <a:t>The wealth business is published through twelve subject-area models, SM-20 to SM-31, alongside the ten shared and enterprise models for the investment book, fund operations and the corporate functions: twenty-two in all, with 44 certified metrics, each defined in the one model that owns it. The first, Client Assets &amp; Flows, owns the certified client-asset family. Client &amp; Household 360, Advice &amp; Planning and Managed Portfolios serve the advice business. Client Economics owns fee revenue. Retail Conduct &amp; Supervision gives the conduct evidence a home of its own. Offering, Product Range &amp; Market and Manager Oversight &amp; Due Diligence complete the set; question twelve resolves in the last of them.
 On the right are the twelve acceptance questions. The model is accepted when each of them resolves, in the explorer, from a metric to a product measure to attributes to the mastering domain. They were chosen to cut across the business: assets and flows, advice evidence, managed accounts, execution quality, customer protection, cash holds, fee billing, personal returns, rollover capture, cost to serve and manager oversight.
 Question three and question ten are the ones I will follow in part four, because they are the ones that sit on the head of distribution's desk: did the rollover come in, and is the file complete.</a:t>
             </a:r>
@@ -2317,7 +2317,7 @@
             <a:r>
               <a:rPr lang="en-US" dirty="0"/>
               <a:t>The four ideas start in five different systems. Dana's separation and vested balance are in the recordkeeping system. Her household and advisor of record are in the CRM. The recommendation, the rollover analysis and the PTE documentation are in the planning tool, or in the advice engine if it was digital. The new IRA and its program enrollment are in account opening and the brokerage account master. The money and the holdings are in clearing and the books-and-records platform; the fee is in the billing engine. And the supervisor's review is in the surveillance platform.
-None of these systems agrees on what to call her. The recordkeeper has a participant number; the CRM has its own record; the brokerage account master has an account number. The taxonomy settles three things before any data moves. What each field means: a rollover amount is a copy of the vested balance, and the four PTE delivery dates are four named attributes with the rule cited. Who is right when sources disagree: 02 masters the party, so Dana is one PTY identifier across every system, and the participant who opens a direct account keeps the same identifier and gains client roles. And how to keep the trail: source identifiers travel with the resolved one.
+None of these systems agrees on what to call her. The recordkeeper has a participant number; the CRM has its own record; the brokerage account master has an account number. The taxonomy settles three things before any data moves. What each field means: a rollover amount is a copy of the vested balance, and the PTE 2020-02 documentation is four named attributes, three delivery dates and the attestation, each citing the exemption. Who is right when sources disagree: 02 masters the party, so Dana is one PTY identifier across every system, and the participant who opens a direct account keeps the same identifier and gains client roles. And how to keep the trail: source identifiers travel with the resolved one.
 One thing to say plainly: the systems here are named by type. Mapping them to your actual systems is the Phase D work, and each product's lineage is the list of attributes to map.</a:t>
             </a:r>
             <a:endParaRPr lang="en-US" dirty="0"/>
@@ -2406,8 +2406,8 @@
           <a:p>
             <a:r>
               <a:rPr lang="en-US" dirty="0"/>
-              <a:t>Foundational products clean up each core thing once, so nobody downstream does it again. Our question needs seven of them.
-The party master gives the Okafor household one record and Dana one identifier with her participant and client roles. The recordkept plan products give the separation and the balance. The advice record holds the recommendation with its rationale, the rollover analysis and the PTE documentation, and one of its quality rules says the four delivery dates must be populated on every completed rollover analysis; a missing date fails the rule rather than hiding. The account master holds the IRA and its enrollment in the hybrid advice program. The brokerage book of record holds what the IRA now owns.
+              <a:t>Foundational products clean up each core thing once, so nobody downstream does it again. Our question needs eight of them.
+The party master gives the Okafor household one record and Dana one identifier with her participant and client roles. The recordkept plan products give the separation event, the balance and the hand-off record that starts the rollover. The advice record holds the recommendation with its rationale, the rollover analysis and the PTE documentation, and one of its quality rules says the three delivery dates and the attestation must be populated on every rollover analysis presented as an acknowledged fiduciary; a missing date fails the rule rather than hiding. The account master holds the IRA and its enrollment in the hybrid advice program. The brokerage book of record holds what the IRA now owns.
 Then the money. The client flow product records the rollover contribution. The certified client-assets product applies the measure definitions, and here is the rule that matters most to this room: under the rollover treatment, a rollover from a plan the firm recordkeeps into a firm IRA is an inter-channel transfer, not net new assets. The firm's total did not grow; six hundred and forty thousand dollars moved from the workplace channel to the advice channel, and the advised-assets figure went up by that amount. That is decided once, in one product, and every report inherits it.</a:t>
             </a:r>
             <a:endParaRPr lang="en-US" dirty="0"/>
@@ -2497,7 +2497,7 @@
             <a:r>
               <a:rPr lang="en-US" dirty="0"/>
               <a:t>Consumer products are shaped around one team's decisions and built from the foundational ones. This is where the four ideas first meet, and each product uses them for a different job.
-The rollover evidence product belongs to workplace services. It joins every rollover recommendation to its analysis, the options compared, the PTE documentation and the receiving IRA, and defines one flag: the documentation gap, set when any of the four delivery dates is missing. Rollover Capture belongs to the same team and answers the other half of the question: of the separated participants, what share rolled into the direct business, reading the certified inter-channel transfer rather than recalculating it. Household 360 puts the Okafor picture in front of the advisor: members, accounts, advised assets, personal return, protection flags, the open recommendation.
+The rollover evidence product belongs to workplace services. It joins every rollover recommendation to its analysis, the options compared, the PTE documentation and the receiving IRA, and defines one flag: the documentation gap, set when the analysis is missing, any of the three delivery dates is missing or late, or the attestation or the reasons are absent. Rollover Capture belongs to the same team and answers the other half of the question: how many participants separated, how much rolled out, and what share landed in the direct business. Those are operational funnel values, never labeled net new assets; the certified inter-channel transfer is read from the client-assets product and shown beside them, with the residual between the two published as its own measure rather than hidden. Household 360 puts the Okafor picture in front of the advisor: members, accounts, advised assets, personal return, protection flags, the open recommendation.
 Then the workflow products. The advisor worklist takes the documentation gap and the review due date and puts them in the CRM as actions. The principal review queue puts the recommendation in front of the supervisor. The advice review cadence schedules the Rule 3a-4 annual contact that the program now owes Dana.
 Notice what none of them does. None recalculates the transfer amount, none decides what 'documented' means, none copies the profile. They take all of it as given. So the workplace report, the advisor's screen and the supervisor's queue cannot disagree.</a:t>
             </a:r>
@@ -2678,8 +2678,8 @@
             <a:r>
               <a:rPr lang="en-US" dirty="0"/>
               <a:t>Products answer questions about one household or one team. The head of distribution's question is across all participants and all households, so the numbers have to add up correctly, and that is the semantic model's job. Three models are involved.
-Workplace &amp; Participants publishes the rollover capture rate with Rollover Capture as its source. Advice &amp; Planning publishes the documentation gap as a count by dimension, and only as a count: account- and client-grain rows stay in the restricted personal-data view for advice, supervision and service roles. Client Assets &amp; Flows owns the certified metrics, Net Inter-Channel Transfers and Advised Assets, defined once there and referenced by the other two.
-Then the rules that stop a number being added wrongly. Only locked monthly rows at the channel grain are read, so the same money cannot be counted in two channels. Transfers are not summed across months into a stock figure. The capture rate is lined up by participant, not joined row to row, or a participant with two distributions would be double counted. And at the firm total, inter-channel transfers net to zero by definition, so a dashboard that filters to the total and sees nothing is correct, not broken.
+Workplace &amp; Participants publishes Separations, Rollovers Into the Direct Business and the Direct Business Rollover Share, with Rollover Capture as its source. Advice &amp; Planning publishes Rollovers Without PTE 2020-02 Documentation and the gap rate; supervision and advice leadership see the rows, everyone else sees aggregates by channel, offering and month with small cells suppressed. Client Assets &amp; Flows owns the certified metrics, Net Inter-Channel Transfers and Advised Assets, defined once there and referenced by the other two.
+Then the rules that stop a number being added wrongly. Only locked monthly rows at the channel grain are read, so the same money cannot be counted in two channels. Transfers are not summed across months into a stock figure. The rollover share is lined up by participant, not joined row to row, or a participant with two distributions would be double counted. And at the firm total, inter-channel transfers net to zero by definition, so a dashboard that filters to the total and sees nothing is correct, not broken.
 Access follows the classification: leadership sees every household; the advisor sees the households they cover; finance and marketing see totals with no names.</a:t>
             </a:r>
             <a:endParaRPr lang="en-US" dirty="0"/>
@@ -2769,7 +2769,7 @@
             <a:r>
               <a:rPr lang="en-US" dirty="0"/>
               <a:t>Now the head of distribution opens the dashboard, or asks an AI assistant in plain English. Either way the question resolves to the same named metrics with a filter on the quarter. The figures are illustrative.
-Four thousand one hundred and twenty participants separated, with two point one billion dollars of eligible balances. Six hundred and ten million rolled into the direct business, a capture rate of twenty-nine percent, and three hundred and eighty million of that is advised. One thousand nine hundred and forty rollover recommendations were presented; thirty-seven are missing at least one of the four PTE documents. The Okafor rollover is in the six hundred and ten million, in the advised three hundred and eighty, and its file is complete.
+Four thousand one hundred and twenty participants separated. One point four six billion dollars of their balances were paid out as rollovers, and six hundred and ten million of that landed in our direct business: a direct business rollover share of forty-two percent. Beside it sits the certified figure: five hundred and ninety-eight million of net inter-channel transfers from the workplace channel into the direct channels, three hundred and eighty of it into advice. The twelve million residual is timing and indirect rollovers in transit, and the model publishes it as its own measure rather than hiding it. One thousand nine hundred and forty rollover recommendations were presented; thirty-seven are missing at least one PTE 2020-02 element, a gap rate of one point nine percent. The Okafor rollover is in the six hundred and ten million, in the five hundred and ninety-eight, in the advised three hundred and eighty, and its file is complete.
 Three things make the number usable. It shows its dates: assets as of the last locked month-end, the evidence flag as of last night's run. Anyone can click from the metric to the product, to the definition, to the owner. And the same thirty-seven appear, that morning, in each advisor's worklist and in the supervisor's queue, so the gap is being closed by the people who can close it, not read about in a report.
 That is the three uses on one screen: the analytical answer, the workflow action and the evidence file, from the same products.</a:t>
             </a:r>
@@ -2859,8 +2859,8 @@
           <a:p>
             <a:r>
               <a:rPr lang="en-US" dirty="0"/>
-              <a:t>The natural next question is: which campaign or nudge prompted Dana to roll over, so we can spend more on what works? Today the certified flow product carries an attributed campaign, but the acquisition-channel key that links a separated participant's hand-off to the campaign that reached them is a work item from the product specification, not yet a populated attribute. The semantic model says so in its list of questions it cannot answer, and the gap is in the register with a proposed fix, an owner and the products it affects.
-That is the last thing the taxonomy does. When a question cannot be answered, the reason shows up as a named change to a named domain, rather than as a workaround inside one team's report. Your marketing team does not build a side table; the owning domain adds the key, the product reads it, and every consumer inherits it.
+              <a:t>The natural next question is: which campaign or nudge prompted Dana's hand-off into advice, so we can spend more on what works? The honest answer is: approximately, not exactly. The flow product attributes the funding flow to a campaign under the campaign-window rule, and the advice model matches a marketing lead to the engagement by party within ninety days. The exact link is missing twice over, and the model says so in both places. Advice &amp; Planning lists the lead-to-engagement link among the questions it cannot answer, because 04 Lead Conversion has no reference to an advice engagement. And the engagement event, the click or the nudge, cannot be joined to its campaign or tracking code at all: that is a registered gap in the marketing domain, GAP-04-001, high priority, owned by the head of marketing operations, with the six products it affects listed.
+That is the last thing the taxonomy does. When a question cannot be answered, the reason shows up as a named change to a named domain, rather than as a workaround inside one team's report. Your marketing team does not build a side table; the owning domain adds the reference, the products read it, and every consumer inherits it.
 The table is the summary of the whole journey. Keep it; it is the one-page version of this talk.</a:t>
             </a:r>
             <a:endParaRPr lang="en-US" dirty="0"/>
@@ -3395,7 +3395,7 @@
             <a:r>
               <a:rPr lang="en-US" dirty="0"/>
               <a:t>The taxonomy has four levels and only four. A Data Domain is a business area that produces and maintains a set of concepts. Inside it, a Data Family groups related objects. A Data Business Object is one thing with its own identity and a stated grain, what one row represents. And a Data Business Attribute is one field with one definition.
-Follow one attribute down. Domain 02 Client &amp; Household. Family: Household Membership. Object: Household, which is a party of type Household, and the grain says so. Attribute: Primary Member, the member designated as the household's primary contact. It has a data type, a reference to the party master, an example value, a source we aligned it to, and a personal-data flag.
+Follow one attribute down. Domain 02 Client &amp; Household. Family: Households &amp; Relationships. Object: Client Household, a party of type Household, and the grain says so. Attribute: Primary Member, the member designated as the household's primary contact. It has a data type, a reference to the party master, an example value, a source we aligned it to, and a personal-data flag.
 Every one of the thirteen thousand attributes carries that same record. That uniformity is what lets the later layers be validated by machine rather than by meeting.</a:t>
             </a:r>
             <a:endParaRPr lang="en-US" dirty="0"/>
@@ -6377,7 +6377,7 @@
                   <a:srgbClr val="535E6C"/>
                 </a:solidFill>
               </a:rPr>
-              <a:t>Party &amp; Role Master</a:t>
+              <a:t>Client &amp; Household Master</a:t>
             </a:r>
             <a:endParaRPr lang="en-US" sz="800" dirty="0"/>
           </a:p>
@@ -9523,7 +9523,7 @@
                   <a:schemeClr val="tx1"/>
                 </a:solidFill>
               </a:rPr>
-              <a:t>DP-240 party master, DP-093 account master, DP-004 offerings, DP-009 advisor organization, DP-530 model assumptions</a:t>
+              <a:t>DP-240 party and household master, DP-093 account master, DP-004 offerings, DP-009 advisor organization, DP-530 capital market assumptions; nine foundational products in all</a:t>
             </a:r>
             <a:endParaRPr lang="en-US" sz="950" dirty="0"/>
           </a:p>
@@ -9595,7 +9595,7 @@
                   <a:schemeClr val="tx1"/>
                 </a:solidFill>
               </a:rPr>
-              <a:t>Type, capacity, source, profile version, presented timestamp and client decision are populated on every presented recommendation; the four PTE 2020-02 delivery dates on every completed rollover analysis</a:t>
+              <a:t>Type, capacity, source, profile version, presented timestamp and client decision populated on every presented recommendation; fiduciary status basis, reasons and completion date on every completed rollover analysis; the three PTE 2020-02 delivery dates and the attestation on every analysis presented as an acknowledged fiduciary</a:t>
             </a:r>
             <a:endParaRPr lang="en-US" sz="950" dirty="0"/>
           </a:p>
@@ -10032,7 +10032,7 @@
                   <a:schemeClr val="tx1"/>
                 </a:solidFill>
               </a:rPr>
-              <a:t>DP-240 Enterprise Party &amp; Role Master</a:t>
+              <a:t>DP-240 Client, Household &amp; Party Master</a:t>
             </a:r>
             <a:endParaRPr lang="en-US" sz="850" dirty="0"/>
           </a:p>
@@ -12683,7 +12683,7 @@
                           <a:ea typeface="Arial" pitchFamily="34" charset="-122"/>
                           <a:cs typeface="Arial" pitchFamily="34" charset="-120"/>
                         </a:rPr>
-                        <a:t>DP-191 General Ledger; DP-192 Employee &amp; Position Master; DP-198 Pay</a:t>
+                        <a:t>DP-191 General Ledger Journals &amp; Balances; DP-192 Employee &amp; Position Master; DP-198 Pay, Payroll &amp; Benefits</a:t>
                       </a:r>
                       <a:endParaRPr lang="en-US" sz="1000" dirty="0">
                         <a:latin typeface="Arial" charset="0"/>
@@ -12751,7 +12751,7 @@
                           <a:ea typeface="Arial" pitchFamily="34" charset="-122"/>
                           <a:cs typeface="Arial" pitchFamily="34" charset="-120"/>
                         </a:rPr>
-                        <a:t>Finance Controller; Head of HR Data; Head of Reward</a:t>
+                        <a:t>Finance Controller; Head of HR Data &amp; People Analytics; Head of Reward</a:t>
                       </a:r>
                       <a:endParaRPr lang="en-US" sz="1000" dirty="0">
                         <a:latin typeface="Arial" charset="0"/>
@@ -13534,7 +13534,7 @@
                   <a:schemeClr val="tx2"/>
                 </a:solidFill>
               </a:rPr>
-              <a:t>06 Transaction: Flow Scope, Flow Direction, Amount; Flow Treatment Rule: Rollover Treatment; 15 Program Enrollment</a:t>
+              <a:t>06 Transaction: Flow Scope, Flow Direction, Reporting Currency Amount, Trade Date; 06 Measure Definition: Rollover Treatment; 06 Account Channel Assignment (from 15 Program Enrollment)</a:t>
             </a:r>
             <a:endParaRPr lang="en-US" sz="1100" dirty="0"/>
           </a:p>
@@ -14623,7 +14623,7 @@
                   <a:schemeClr val="tx1"/>
                 </a:solidFill>
               </a:rPr>
-              <a:t>DP-344 Trade Proposals &amp; Cash Raises</a:t>
+              <a:t>DP-344 Trade Proposals, Cash Raises &amp; Pre-Trade Exceptions</a:t>
             </a:r>
             <a:endParaRPr lang="en-US" sz="1050" dirty="0"/>
           </a:p>
@@ -21720,7 +21720,7 @@
                   <a:schemeClr val="tx1"/>
                 </a:solidFill>
               </a:rPr>
-              <a:t>Who owns the funds: a view of 49 for direct accounts, of TA and intermediary data for the rest.</a:t>
+              <a:t>Who owns the funds: built from 49 Client Holding for brokerage accounts and the 29 register for directly registered accounts; intermediary look-through as delivered.</a:t>
             </a:r>
             <a:endParaRPr lang="en-US" sz="950" dirty="0"/>
           </a:p>
@@ -23923,7 +23923,7 @@
                   <a:schemeClr val="tx1"/>
                 </a:solidFill>
               </a:rPr>
-              <a:t>Source plan, amount, options compared, fiduciary status basis, the four delivery dates and the impartial conduct attestation</a:t>
+              <a:t>Source plan, amount, options compared, fiduciary status basis, the three delivery dates and the impartial conduct attestation</a:t>
             </a:r>
             <a:endParaRPr lang="en-US" sz="950" dirty="0"/>
           </a:p>
@@ -24543,7 +24543,7 @@
                   <a:schemeClr val="bg2"/>
                 </a:solidFill>
               </a:rPr>
-              <a:t>products live or in progress</a:t>
+              <a:t>live products, specified to attribute level</a:t>
             </a:r>
             <a:endParaRPr lang="en-US" sz="1050" dirty="0"/>
           </a:p>
@@ -24705,7 +24705,7 @@
                   <a:schemeClr val="bg1"/>
                 </a:solidFill>
               </a:rPr>
-              <a:t>20</a:t>
+              <a:t>22</a:t>
             </a:r>
             <a:endParaRPr lang="en-US" sz="2800" dirty="0"/>
           </a:p>
@@ -24741,7 +24741,7 @@
                   <a:schemeClr val="bg2"/>
                 </a:solidFill>
               </a:rPr>
-              <a:t>semantic models, ten for the client business</a:t>
+              <a:t>semantic models, twelve wealth subject areas</a:t>
             </a:r>
             <a:endParaRPr lang="en-US" sz="1050" dirty="0"/>
           </a:p>
@@ -24844,7 +24844,7 @@
                   <a:schemeClr val="tx1"/>
                 </a:solidFill>
               </a:rPr>
-              <a:t>DP-240 Enterprise Party &amp; Role Master (the household as primary role)</a:t>
+              <a:t>DP-240 Client, Household &amp; Party Master (the household as a party of type Household)</a:t>
             </a:r>
             <a:endParaRPr lang="en-US" sz="950" dirty="0"/>
           </a:p>
@@ -25842,7 +25842,7 @@
                   <a:schemeClr val="tx2"/>
                 </a:solidFill>
               </a:rPr>
-              <a:t>Ten subject-area models, tested by twelve questions</a:t>
+              <a:t>Twelve subject-area models, tested by twelve questions</a:t>
             </a:r>
             <a:endParaRPr lang="en-US" sz="2800" dirty="0"/>
           </a:p>
@@ -25905,7 +25905,7 @@
                   <a:schemeClr val="accent4"/>
                 </a:solidFill>
               </a:rPr>
-              <a:t>SEMANTIC MODELS FOR THE CLIENT BUSINESS</a:t>
+              <a:t>THE TWELVE WEALTH SUBJECT-AREA MODELS</a:t>
             </a:r>
             <a:endParaRPr lang="en-US" sz="1000" dirty="0"/>
           </a:p>
@@ -25920,7 +25920,7 @@
         <p:spPr>
           <a:xfrm>
             <a:off x="731520" y="1920240"/>
-            <a:ext cx="731520" cy="384048"/>
+            <a:ext cx="731520" cy="347472"/>
           </a:xfrm>
           <a:prstGeom prst="rect">
             <a:avLst/>
@@ -25936,14 +25936,14 @@
               <a:buNone/>
             </a:pPr>
             <a:r>
-              <a:rPr lang="en-US" sz="1100" b="1" dirty="0">
+              <a:rPr lang="en-US" sz="1050" b="1" dirty="0">
                 <a:solidFill>
                   <a:schemeClr val="accent4"/>
                 </a:solidFill>
               </a:rPr>
               <a:t>SM-20</a:t>
             </a:r>
-            <a:endParaRPr lang="en-US" sz="1100" dirty="0"/>
+            <a:endParaRPr lang="en-US" sz="1050" dirty="0"/>
           </a:p>
         </p:txBody>
       </p:sp>
@@ -25956,7 +25956,7 @@
         <p:spPr>
           <a:xfrm>
             <a:off x="1463040" y="1920240"/>
-            <a:ext cx="3108960" cy="384048"/>
+            <a:ext cx="3108960" cy="347472"/>
           </a:xfrm>
           <a:prstGeom prst="rect">
             <a:avLst/>
@@ -25972,14 +25972,14 @@
               <a:buNone/>
             </a:pPr>
             <a:r>
-              <a:rPr lang="en-US" sz="1100" dirty="0">
+              <a:rPr lang="en-US" sz="1050" dirty="0">
                 <a:solidFill>
                   <a:schemeClr val="tx1"/>
                 </a:solidFill>
               </a:rPr>
               <a:t>Client Assets &amp; Flows (certified)</a:t>
             </a:r>
-            <a:endParaRPr lang="en-US" sz="1100" dirty="0"/>
+            <a:endParaRPr lang="en-US" sz="1050" dirty="0"/>
           </a:p>
         </p:txBody>
       </p:sp>
@@ -25991,8 +25991,8 @@
         </p:nvSpPr>
         <p:spPr>
           <a:xfrm>
-            <a:off x="731520" y="2340864"/>
-            <a:ext cx="731520" cy="384048"/>
+            <a:off x="731520" y="2272284"/>
+            <a:ext cx="731520" cy="347472"/>
           </a:xfrm>
           <a:prstGeom prst="rect">
             <a:avLst/>
@@ -26008,14 +26008,14 @@
               <a:buNone/>
             </a:pPr>
             <a:r>
-              <a:rPr lang="en-US" sz="1100" b="1" dirty="0">
+              <a:rPr lang="en-US" sz="1050" b="1" dirty="0">
                 <a:solidFill>
                   <a:schemeClr val="accent4"/>
                 </a:solidFill>
               </a:rPr>
               <a:t>SM-21</a:t>
             </a:r>
-            <a:endParaRPr lang="en-US" sz="1100" dirty="0"/>
+            <a:endParaRPr lang="en-US" sz="1050" dirty="0"/>
           </a:p>
         </p:txBody>
       </p:sp>
@@ -26027,8 +26027,8 @@
         </p:nvSpPr>
         <p:spPr>
           <a:xfrm>
-            <a:off x="1463040" y="2340864"/>
-            <a:ext cx="3108960" cy="384048"/>
+            <a:off x="1463040" y="2272284"/>
+            <a:ext cx="3108960" cy="347472"/>
           </a:xfrm>
           <a:prstGeom prst="rect">
             <a:avLst/>
@@ -26044,14 +26044,14 @@
               <a:buNone/>
             </a:pPr>
             <a:r>
-              <a:rPr lang="en-US" sz="1100" dirty="0">
+              <a:rPr lang="en-US" sz="1050" dirty="0">
                 <a:solidFill>
                   <a:schemeClr val="tx1"/>
                 </a:solidFill>
               </a:rPr>
               <a:t>Client &amp; Household 360</a:t>
             </a:r>
-            <a:endParaRPr lang="en-US" sz="1100" dirty="0"/>
+            <a:endParaRPr lang="en-US" sz="1050" dirty="0"/>
           </a:p>
         </p:txBody>
       </p:sp>
@@ -26063,8 +26063,8 @@
         </p:nvSpPr>
         <p:spPr>
           <a:xfrm>
-            <a:off x="731520" y="2761488"/>
-            <a:ext cx="731520" cy="384048"/>
+            <a:off x="731520" y="2624328"/>
+            <a:ext cx="731520" cy="347472"/>
           </a:xfrm>
           <a:prstGeom prst="rect">
             <a:avLst/>
@@ -26080,14 +26080,14 @@
               <a:buNone/>
             </a:pPr>
             <a:r>
-              <a:rPr lang="en-US" sz="1100" b="1" dirty="0">
+              <a:rPr lang="en-US" sz="1050" b="1" dirty="0">
                 <a:solidFill>
                   <a:schemeClr val="accent4"/>
                 </a:solidFill>
               </a:rPr>
               <a:t>SM-22</a:t>
             </a:r>
-            <a:endParaRPr lang="en-US" sz="1100" dirty="0"/>
+            <a:endParaRPr lang="en-US" sz="1050" dirty="0"/>
           </a:p>
         </p:txBody>
       </p:sp>
@@ -26099,8 +26099,8 @@
         </p:nvSpPr>
         <p:spPr>
           <a:xfrm>
-            <a:off x="1463040" y="2761488"/>
-            <a:ext cx="3108960" cy="384048"/>
+            <a:off x="1463040" y="2624328"/>
+            <a:ext cx="3108960" cy="347472"/>
           </a:xfrm>
           <a:prstGeom prst="rect">
             <a:avLst/>
@@ -26116,14 +26116,14 @@
               <a:buNone/>
             </a:pPr>
             <a:r>
-              <a:rPr lang="en-US" sz="1100" dirty="0">
+              <a:rPr lang="en-US" sz="1050" dirty="0">
                 <a:solidFill>
                   <a:schemeClr val="tx1"/>
                 </a:solidFill>
               </a:rPr>
               <a:t>Advice &amp; Planning</a:t>
             </a:r>
-            <a:endParaRPr lang="en-US" sz="1100" dirty="0"/>
+            <a:endParaRPr lang="en-US" sz="1050" dirty="0"/>
           </a:p>
         </p:txBody>
       </p:sp>
@@ -26135,8 +26135,8 @@
         </p:nvSpPr>
         <p:spPr>
           <a:xfrm>
-            <a:off x="731520" y="3182112"/>
-            <a:ext cx="731520" cy="384048"/>
+            <a:off x="731520" y="2976372"/>
+            <a:ext cx="731520" cy="347472"/>
           </a:xfrm>
           <a:prstGeom prst="rect">
             <a:avLst/>
@@ -26152,14 +26152,14 @@
               <a:buNone/>
             </a:pPr>
             <a:r>
-              <a:rPr lang="en-US" sz="1100" b="1" dirty="0">
+              <a:rPr lang="en-US" sz="1050" b="1" dirty="0">
                 <a:solidFill>
                   <a:schemeClr val="accent4"/>
                 </a:solidFill>
               </a:rPr>
               <a:t>SM-23</a:t>
             </a:r>
-            <a:endParaRPr lang="en-US" sz="1100" dirty="0"/>
+            <a:endParaRPr lang="en-US" sz="1050" dirty="0"/>
           </a:p>
         </p:txBody>
       </p:sp>
@@ -26171,8 +26171,8 @@
         </p:nvSpPr>
         <p:spPr>
           <a:xfrm>
-            <a:off x="1463040" y="3182112"/>
-            <a:ext cx="3108960" cy="384048"/>
+            <a:off x="1463040" y="2976372"/>
+            <a:ext cx="3108960" cy="347472"/>
           </a:xfrm>
           <a:prstGeom prst="rect">
             <a:avLst/>
@@ -26188,14 +26188,14 @@
               <a:buNone/>
             </a:pPr>
             <a:r>
-              <a:rPr lang="en-US" sz="1100" dirty="0">
+              <a:rPr lang="en-US" sz="1050" dirty="0">
                 <a:solidFill>
                   <a:schemeClr val="tx1"/>
                 </a:solidFill>
               </a:rPr>
               <a:t>Managed Portfolios</a:t>
             </a:r>
-            <a:endParaRPr lang="en-US" sz="1100" dirty="0"/>
+            <a:endParaRPr lang="en-US" sz="1050" dirty="0"/>
           </a:p>
         </p:txBody>
       </p:sp>
@@ -26207,8 +26207,8 @@
         </p:nvSpPr>
         <p:spPr>
           <a:xfrm>
-            <a:off x="731520" y="3602736"/>
-            <a:ext cx="731520" cy="384048"/>
+            <a:off x="731520" y="3328416"/>
+            <a:ext cx="731520" cy="347472"/>
           </a:xfrm>
           <a:prstGeom prst="rect">
             <a:avLst/>
@@ -26224,14 +26224,14 @@
               <a:buNone/>
             </a:pPr>
             <a:r>
-              <a:rPr lang="en-US" sz="1100" b="1" dirty="0">
+              <a:rPr lang="en-US" sz="1050" b="1" dirty="0">
                 <a:solidFill>
                   <a:schemeClr val="accent4"/>
                 </a:solidFill>
               </a:rPr>
               <a:t>SM-24</a:t>
             </a:r>
-            <a:endParaRPr lang="en-US" sz="1100" dirty="0"/>
+            <a:endParaRPr lang="en-US" sz="1050" dirty="0"/>
           </a:p>
         </p:txBody>
       </p:sp>
@@ -26243,8 +26243,8 @@
         </p:nvSpPr>
         <p:spPr>
           <a:xfrm>
-            <a:off x="1463040" y="3602736"/>
-            <a:ext cx="3108960" cy="384048"/>
+            <a:off x="1463040" y="3328416"/>
+            <a:ext cx="3108960" cy="347472"/>
           </a:xfrm>
           <a:prstGeom prst="rect">
             <a:avLst/>
@@ -26260,14 +26260,14 @@
               <a:buNone/>
             </a:pPr>
             <a:r>
-              <a:rPr lang="en-US" sz="1100" dirty="0">
+              <a:rPr lang="en-US" sz="1050" dirty="0">
                 <a:solidFill>
                   <a:schemeClr val="tx1"/>
                 </a:solidFill>
               </a:rPr>
               <a:t>Brokerage Activity &amp; Execution Quality</a:t>
             </a:r>
-            <a:endParaRPr lang="en-US" sz="1100" dirty="0"/>
+            <a:endParaRPr lang="en-US" sz="1050" dirty="0"/>
           </a:p>
         </p:txBody>
       </p:sp>
@@ -26279,8 +26279,8 @@
         </p:nvSpPr>
         <p:spPr>
           <a:xfrm>
-            <a:off x="731520" y="4023360"/>
-            <a:ext cx="731520" cy="384048"/>
+            <a:off x="731520" y="3680460"/>
+            <a:ext cx="731520" cy="347472"/>
           </a:xfrm>
           <a:prstGeom prst="rect">
             <a:avLst/>
@@ -26296,14 +26296,14 @@
               <a:buNone/>
             </a:pPr>
             <a:r>
-              <a:rPr lang="en-US" sz="1100" b="1" dirty="0">
+              <a:rPr lang="en-US" sz="1050" b="1" dirty="0">
                 <a:solidFill>
                   <a:schemeClr val="accent4"/>
                 </a:solidFill>
               </a:rPr>
               <a:t>SM-25</a:t>
             </a:r>
-            <a:endParaRPr lang="en-US" sz="1100" dirty="0"/>
+            <a:endParaRPr lang="en-US" sz="1050" dirty="0"/>
           </a:p>
         </p:txBody>
       </p:sp>
@@ -26315,8 +26315,8 @@
         </p:nvSpPr>
         <p:spPr>
           <a:xfrm>
-            <a:off x="1463040" y="4023360"/>
-            <a:ext cx="3108960" cy="384048"/>
+            <a:off x="1463040" y="3680460"/>
+            <a:ext cx="3108960" cy="347472"/>
           </a:xfrm>
           <a:prstGeom prst="rect">
             <a:avLst/>
@@ -26332,14 +26332,14 @@
               <a:buNone/>
             </a:pPr>
             <a:r>
-              <a:rPr lang="en-US" sz="1100" dirty="0">
+              <a:rPr lang="en-US" sz="1050" dirty="0">
                 <a:solidFill>
                   <a:schemeClr val="tx1"/>
                 </a:solidFill>
               </a:rPr>
               <a:t>Client Service &amp; Digital</a:t>
             </a:r>
-            <a:endParaRPr lang="en-US" sz="1100" dirty="0"/>
+            <a:endParaRPr lang="en-US" sz="1050" dirty="0"/>
           </a:p>
         </p:txBody>
       </p:sp>
@@ -26351,8 +26351,8 @@
         </p:nvSpPr>
         <p:spPr>
           <a:xfrm>
-            <a:off x="731520" y="4443984"/>
-            <a:ext cx="731520" cy="384048"/>
+            <a:off x="731520" y="4032504"/>
+            <a:ext cx="731520" cy="347472"/>
           </a:xfrm>
           <a:prstGeom prst="rect">
             <a:avLst/>
@@ -26368,14 +26368,14 @@
               <a:buNone/>
             </a:pPr>
             <a:r>
-              <a:rPr lang="en-US" sz="1100" b="1" dirty="0">
+              <a:rPr lang="en-US" sz="1050" b="1" dirty="0">
                 <a:solidFill>
                   <a:schemeClr val="accent4"/>
                 </a:solidFill>
               </a:rPr>
               <a:t>SM-26</a:t>
             </a:r>
-            <a:endParaRPr lang="en-US" sz="1100" dirty="0"/>
+            <a:endParaRPr lang="en-US" sz="1050" dirty="0"/>
           </a:p>
         </p:txBody>
       </p:sp>
@@ -26387,8 +26387,8 @@
         </p:nvSpPr>
         <p:spPr>
           <a:xfrm>
-            <a:off x="1463040" y="4443984"/>
-            <a:ext cx="3108960" cy="384048"/>
+            <a:off x="1463040" y="4032504"/>
+            <a:ext cx="3108960" cy="347472"/>
           </a:xfrm>
           <a:prstGeom prst="rect">
             <a:avLst/>
@@ -26404,14 +26404,14 @@
               <a:buNone/>
             </a:pPr>
             <a:r>
-              <a:rPr lang="en-US" sz="1100" dirty="0">
+              <a:rPr lang="en-US" sz="1050" dirty="0">
                 <a:solidFill>
                   <a:schemeClr val="tx1"/>
                 </a:solidFill>
               </a:rPr>
               <a:t>Workplace &amp; Participants</a:t>
             </a:r>
-            <a:endParaRPr lang="en-US" sz="1100" dirty="0"/>
+            <a:endParaRPr lang="en-US" sz="1050" dirty="0"/>
           </a:p>
         </p:txBody>
       </p:sp>
@@ -26423,8 +26423,8 @@
         </p:nvSpPr>
         <p:spPr>
           <a:xfrm>
-            <a:off x="731520" y="4864608"/>
-            <a:ext cx="731520" cy="384048"/>
+            <a:off x="731520" y="4384548"/>
+            <a:ext cx="731520" cy="347472"/>
           </a:xfrm>
           <a:prstGeom prst="rect">
             <a:avLst/>
@@ -26440,14 +26440,14 @@
               <a:buNone/>
             </a:pPr>
             <a:r>
-              <a:rPr lang="en-US" sz="1100" b="1" dirty="0">
+              <a:rPr lang="en-US" sz="1050" b="1" dirty="0">
                 <a:solidFill>
                   <a:schemeClr val="accent4"/>
                 </a:solidFill>
               </a:rPr>
               <a:t>SM-27</a:t>
             </a:r>
-            <a:endParaRPr lang="en-US" sz="1100" dirty="0"/>
+            <a:endParaRPr lang="en-US" sz="1050" dirty="0"/>
           </a:p>
         </p:txBody>
       </p:sp>
@@ -26459,8 +26459,8 @@
         </p:nvSpPr>
         <p:spPr>
           <a:xfrm>
-            <a:off x="1463040" y="4864608"/>
-            <a:ext cx="3108960" cy="384048"/>
+            <a:off x="1463040" y="4384548"/>
+            <a:ext cx="3108960" cy="347472"/>
           </a:xfrm>
           <a:prstGeom prst="rect">
             <a:avLst/>
@@ -26476,14 +26476,14 @@
               <a:buNone/>
             </a:pPr>
             <a:r>
-              <a:rPr lang="en-US" sz="1100" dirty="0">
+              <a:rPr lang="en-US" sz="1050" dirty="0">
                 <a:solidFill>
                   <a:schemeClr val="tx1"/>
                 </a:solidFill>
               </a:rPr>
               <a:t>Intermediary &amp; Institutional Channel</a:t>
             </a:r>
-            <a:endParaRPr lang="en-US" sz="1100" dirty="0"/>
+            <a:endParaRPr lang="en-US" sz="1050" dirty="0"/>
           </a:p>
         </p:txBody>
       </p:sp>
@@ -26495,8 +26495,8 @@
         </p:nvSpPr>
         <p:spPr>
           <a:xfrm>
-            <a:off x="731520" y="5285232"/>
-            <a:ext cx="731520" cy="384048"/>
+            <a:off x="731520" y="4736592"/>
+            <a:ext cx="731520" cy="347472"/>
           </a:xfrm>
           <a:prstGeom prst="rect">
             <a:avLst/>
@@ -26512,14 +26512,14 @@
               <a:buNone/>
             </a:pPr>
             <a:r>
-              <a:rPr lang="en-US" sz="1100" b="1" dirty="0">
+              <a:rPr lang="en-US" sz="1050" b="1" dirty="0">
                 <a:solidFill>
                   <a:schemeClr val="accent4"/>
                 </a:solidFill>
               </a:rPr>
               <a:t>SM-28</a:t>
             </a:r>
-            <a:endParaRPr lang="en-US" sz="1100" dirty="0"/>
+            <a:endParaRPr lang="en-US" sz="1050" dirty="0"/>
           </a:p>
         </p:txBody>
       </p:sp>
@@ -26531,8 +26531,8 @@
         </p:nvSpPr>
         <p:spPr>
           <a:xfrm>
-            <a:off x="1463040" y="5285232"/>
-            <a:ext cx="3108960" cy="384048"/>
+            <a:off x="1463040" y="4736592"/>
+            <a:ext cx="3108960" cy="347472"/>
           </a:xfrm>
           <a:prstGeom prst="rect">
             <a:avLst/>
@@ -26548,14 +26548,14 @@
               <a:buNone/>
             </a:pPr>
             <a:r>
-              <a:rPr lang="en-US" sz="1100" dirty="0">
+              <a:rPr lang="en-US" sz="1050" dirty="0">
                 <a:solidFill>
                   <a:schemeClr val="tx1"/>
                 </a:solidFill>
               </a:rPr>
               <a:t>Client Economics (certified fee revenue)</a:t>
             </a:r>
-            <a:endParaRPr lang="en-US" sz="1100" dirty="0"/>
+            <a:endParaRPr lang="en-US" sz="1050" dirty="0"/>
           </a:p>
         </p:txBody>
       </p:sp>
@@ -26567,8 +26567,8 @@
         </p:nvSpPr>
         <p:spPr>
           <a:xfrm>
-            <a:off x="731520" y="5705856"/>
-            <a:ext cx="731520" cy="384048"/>
+            <a:off x="731520" y="5088636"/>
+            <a:ext cx="731520" cy="347472"/>
           </a:xfrm>
           <a:prstGeom prst="rect">
             <a:avLst/>
@@ -26584,14 +26584,14 @@
               <a:buNone/>
             </a:pPr>
             <a:r>
-              <a:rPr lang="en-US" sz="1100" b="1" dirty="0">
+              <a:rPr lang="en-US" sz="1050" b="1" dirty="0">
                 <a:solidFill>
                   <a:schemeClr val="accent4"/>
                 </a:solidFill>
               </a:rPr>
               <a:t>SM-29</a:t>
             </a:r>
-            <a:endParaRPr lang="en-US" sz="1100" dirty="0"/>
+            <a:endParaRPr lang="en-US" sz="1050" dirty="0"/>
           </a:p>
         </p:txBody>
       </p:sp>
@@ -26603,8 +26603,8 @@
         </p:nvSpPr>
         <p:spPr>
           <a:xfrm>
-            <a:off x="1463040" y="5705856"/>
-            <a:ext cx="3108960" cy="384048"/>
+            <a:off x="1463040" y="5088636"/>
+            <a:ext cx="3108960" cy="347472"/>
           </a:xfrm>
           <a:prstGeom prst="rect">
             <a:avLst/>
@@ -26620,20 +26620,164 @@
               <a:buNone/>
             </a:pPr>
             <a:r>
-              <a:rPr lang="en-US" sz="1100" dirty="0">
+              <a:rPr lang="en-US" sz="1050" dirty="0">
                 <a:solidFill>
                   <a:schemeClr val="tx1"/>
                 </a:solidFill>
               </a:rPr>
               <a:t>Retail Conduct &amp; Supervision</a:t>
             </a:r>
-            <a:endParaRPr lang="en-US" sz="1100" dirty="0"/>
+            <a:endParaRPr lang="en-US" sz="1050" dirty="0"/>
           </a:p>
         </p:txBody>
       </p:sp>
       <p:sp>
         <p:nvSpPr>
           <p:cNvPr id="26" name="text"/>
+          <p:cNvSpPr txBox="1"/>
+          <p:nvPr/>
+        </p:nvSpPr>
+        <p:spPr>
+          <a:xfrm>
+            <a:off x="731520" y="5440680"/>
+            <a:ext cx="731520" cy="347472"/>
+          </a:xfrm>
+          <a:prstGeom prst="rect">
+            <a:avLst/>
+          </a:prstGeom>
+          <a:noFill/>
+          <a:ln/>
+        </p:spPr>
+        <p:txBody>
+          <a:bodyPr wrap="square" lIns="0" tIns="0" rIns="0" bIns="0" rtlCol="0" anchor="ctr"/>
+          <a:lstStyle/>
+          <a:p>
+            <a:pPr indent="0" marL="0">
+              <a:buNone/>
+            </a:pPr>
+            <a:r>
+              <a:rPr lang="en-US" sz="1050" b="1" dirty="0">
+                <a:solidFill>
+                  <a:schemeClr val="accent4"/>
+                </a:solidFill>
+              </a:rPr>
+              <a:t>SM-30</a:t>
+            </a:r>
+            <a:endParaRPr lang="en-US" sz="1050" dirty="0"/>
+          </a:p>
+        </p:txBody>
+      </p:sp>
+      <p:sp>
+        <p:nvSpPr>
+          <p:cNvPr id="27" name="text"/>
+          <p:cNvSpPr txBox="1"/>
+          <p:nvPr/>
+        </p:nvSpPr>
+        <p:spPr>
+          <a:xfrm>
+            <a:off x="1463040" y="5440680"/>
+            <a:ext cx="3108960" cy="347472"/>
+          </a:xfrm>
+          <a:prstGeom prst="rect">
+            <a:avLst/>
+          </a:prstGeom>
+          <a:noFill/>
+          <a:ln/>
+        </p:spPr>
+        <p:txBody>
+          <a:bodyPr wrap="square" lIns="0" tIns="0" rIns="0" bIns="0" rtlCol="0" anchor="ctr"/>
+          <a:lstStyle/>
+          <a:p>
+            <a:pPr indent="0" marL="0">
+              <a:buNone/>
+            </a:pPr>
+            <a:r>
+              <a:rPr lang="en-US" sz="1050" dirty="0">
+                <a:solidFill>
+                  <a:schemeClr val="tx1"/>
+                </a:solidFill>
+              </a:rPr>
+              <a:t>Offering, Product Range &amp; Market</a:t>
+            </a:r>
+            <a:endParaRPr lang="en-US" sz="1050" dirty="0"/>
+          </a:p>
+        </p:txBody>
+      </p:sp>
+      <p:sp>
+        <p:nvSpPr>
+          <p:cNvPr id="28" name="text"/>
+          <p:cNvSpPr txBox="1"/>
+          <p:nvPr/>
+        </p:nvSpPr>
+        <p:spPr>
+          <a:xfrm>
+            <a:off x="731520" y="5792724"/>
+            <a:ext cx="731520" cy="347472"/>
+          </a:xfrm>
+          <a:prstGeom prst="rect">
+            <a:avLst/>
+          </a:prstGeom>
+          <a:noFill/>
+          <a:ln/>
+        </p:spPr>
+        <p:txBody>
+          <a:bodyPr wrap="square" lIns="0" tIns="0" rIns="0" bIns="0" rtlCol="0" anchor="ctr"/>
+          <a:lstStyle/>
+          <a:p>
+            <a:pPr indent="0" marL="0">
+              <a:buNone/>
+            </a:pPr>
+            <a:r>
+              <a:rPr lang="en-US" sz="1050" b="1" dirty="0">
+                <a:solidFill>
+                  <a:schemeClr val="accent4"/>
+                </a:solidFill>
+              </a:rPr>
+              <a:t>SM-31</a:t>
+            </a:r>
+            <a:endParaRPr lang="en-US" sz="1050" dirty="0"/>
+          </a:p>
+        </p:txBody>
+      </p:sp>
+      <p:sp>
+        <p:nvSpPr>
+          <p:cNvPr id="29" name="text"/>
+          <p:cNvSpPr txBox="1"/>
+          <p:nvPr/>
+        </p:nvSpPr>
+        <p:spPr>
+          <a:xfrm>
+            <a:off x="1463040" y="5792724"/>
+            <a:ext cx="3108960" cy="347472"/>
+          </a:xfrm>
+          <a:prstGeom prst="rect">
+            <a:avLst/>
+          </a:prstGeom>
+          <a:noFill/>
+          <a:ln/>
+        </p:spPr>
+        <p:txBody>
+          <a:bodyPr wrap="square" lIns="0" tIns="0" rIns="0" bIns="0" rtlCol="0" anchor="ctr"/>
+          <a:lstStyle/>
+          <a:p>
+            <a:pPr indent="0" marL="0">
+              <a:buNone/>
+            </a:pPr>
+            <a:r>
+              <a:rPr lang="en-US" sz="1050" dirty="0">
+                <a:solidFill>
+                  <a:schemeClr val="tx1"/>
+                </a:solidFill>
+              </a:rPr>
+              <a:t>Manager Oversight &amp; Due Diligence</a:t>
+            </a:r>
+            <a:endParaRPr lang="en-US" sz="1050" dirty="0"/>
+          </a:p>
+        </p:txBody>
+      </p:sp>
+      <p:sp>
+        <p:nvSpPr>
+          <p:cNvPr id="30" name="text"/>
           <p:cNvSpPr txBox="1"/>
           <p:nvPr/>
         </p:nvSpPr>
@@ -26669,7 +26813,7 @@
       </p:sp>
       <p:sp>
         <p:nvSpPr>
-          <p:cNvPr id="27" name="card"/>
+          <p:cNvPr id="31" name="card"/>
           <p:cNvSpPr/>
           <p:nvPr/>
         </p:nvSpPr>
@@ -26696,7 +26840,7 @@
       </p:sp>
       <p:sp>
         <p:nvSpPr>
-          <p:cNvPr id="28" name="text"/>
+          <p:cNvPr id="32" name="text"/>
           <p:cNvSpPr txBox="1"/>
           <p:nvPr/>
         </p:nvSpPr>
@@ -26732,7 +26876,7 @@
       </p:sp>
       <p:sp>
         <p:nvSpPr>
-          <p:cNvPr id="29" name="text"/>
+          <p:cNvPr id="33" name="text"/>
           <p:cNvSpPr txBox="1"/>
           <p:nvPr/>
         </p:nvSpPr>
@@ -26768,7 +26912,7 @@
       </p:sp>
       <p:sp>
         <p:nvSpPr>
-          <p:cNvPr id="30" name="card"/>
+          <p:cNvPr id="34" name="card"/>
           <p:cNvSpPr/>
           <p:nvPr/>
         </p:nvSpPr>
@@ -26795,7 +26939,7 @@
       </p:sp>
       <p:sp>
         <p:nvSpPr>
-          <p:cNvPr id="31" name="text"/>
+          <p:cNvPr id="35" name="text"/>
           <p:cNvSpPr txBox="1"/>
           <p:nvPr/>
         </p:nvSpPr>
@@ -26831,7 +26975,7 @@
       </p:sp>
       <p:sp>
         <p:nvSpPr>
-          <p:cNvPr id="32" name="text"/>
+          <p:cNvPr id="36" name="text"/>
           <p:cNvSpPr txBox="1"/>
           <p:nvPr/>
         </p:nvSpPr>
@@ -26867,7 +27011,7 @@
       </p:sp>
       <p:sp>
         <p:nvSpPr>
-          <p:cNvPr id="33" name="card"/>
+          <p:cNvPr id="37" name="card"/>
           <p:cNvSpPr/>
           <p:nvPr/>
         </p:nvSpPr>
@@ -26894,7 +27038,7 @@
       </p:sp>
       <p:sp>
         <p:nvSpPr>
-          <p:cNvPr id="34" name="text"/>
+          <p:cNvPr id="38" name="text"/>
           <p:cNvSpPr txBox="1"/>
           <p:nvPr/>
         </p:nvSpPr>
@@ -26930,7 +27074,7 @@
       </p:sp>
       <p:sp>
         <p:nvSpPr>
-          <p:cNvPr id="35" name="text"/>
+          <p:cNvPr id="39" name="text"/>
           <p:cNvSpPr txBox="1"/>
           <p:nvPr/>
         </p:nvSpPr>
@@ -26966,7 +27110,7 @@
       </p:sp>
       <p:sp>
         <p:nvSpPr>
-          <p:cNvPr id="36" name="card"/>
+          <p:cNvPr id="40" name="card"/>
           <p:cNvSpPr/>
           <p:nvPr/>
         </p:nvSpPr>
@@ -26993,7 +27137,7 @@
       </p:sp>
       <p:sp>
         <p:nvSpPr>
-          <p:cNvPr id="37" name="text"/>
+          <p:cNvPr id="41" name="text"/>
           <p:cNvSpPr txBox="1"/>
           <p:nvPr/>
         </p:nvSpPr>
@@ -27029,7 +27173,7 @@
       </p:sp>
       <p:sp>
         <p:nvSpPr>
-          <p:cNvPr id="38" name="text"/>
+          <p:cNvPr id="42" name="text"/>
           <p:cNvSpPr txBox="1"/>
           <p:nvPr/>
         </p:nvSpPr>
@@ -27065,7 +27209,7 @@
       </p:sp>
       <p:sp>
         <p:nvSpPr>
-          <p:cNvPr id="39" name="card"/>
+          <p:cNvPr id="43" name="card"/>
           <p:cNvSpPr/>
           <p:nvPr/>
         </p:nvSpPr>
@@ -27092,7 +27236,7 @@
       </p:sp>
       <p:sp>
         <p:nvSpPr>
-          <p:cNvPr id="40" name="text"/>
+          <p:cNvPr id="44" name="text"/>
           <p:cNvSpPr txBox="1"/>
           <p:nvPr/>
         </p:nvSpPr>
@@ -27128,7 +27272,7 @@
       </p:sp>
       <p:sp>
         <p:nvSpPr>
-          <p:cNvPr id="41" name="text"/>
+          <p:cNvPr id="45" name="text"/>
           <p:cNvSpPr txBox="1"/>
           <p:nvPr/>
         </p:nvSpPr>
@@ -27164,7 +27308,7 @@
       </p:sp>
       <p:sp>
         <p:nvSpPr>
-          <p:cNvPr id="42" name="card"/>
+          <p:cNvPr id="46" name="card"/>
           <p:cNvSpPr/>
           <p:nvPr/>
         </p:nvSpPr>
@@ -27191,7 +27335,7 @@
       </p:sp>
       <p:sp>
         <p:nvSpPr>
-          <p:cNvPr id="43" name="text"/>
+          <p:cNvPr id="47" name="text"/>
           <p:cNvSpPr txBox="1"/>
           <p:nvPr/>
         </p:nvSpPr>
@@ -27227,7 +27371,7 @@
       </p:sp>
       <p:sp>
         <p:nvSpPr>
-          <p:cNvPr id="44" name="text"/>
+          <p:cNvPr id="48" name="text"/>
           <p:cNvSpPr txBox="1"/>
           <p:nvPr/>
         </p:nvSpPr>
@@ -27263,7 +27407,7 @@
       </p:sp>
       <p:sp>
         <p:nvSpPr>
-          <p:cNvPr id="45" name="card"/>
+          <p:cNvPr id="49" name="card"/>
           <p:cNvSpPr/>
           <p:nvPr/>
         </p:nvSpPr>
@@ -27290,7 +27434,7 @@
       </p:sp>
       <p:sp>
         <p:nvSpPr>
-          <p:cNvPr id="46" name="text"/>
+          <p:cNvPr id="50" name="text"/>
           <p:cNvSpPr txBox="1"/>
           <p:nvPr/>
         </p:nvSpPr>
@@ -27326,7 +27470,7 @@
       </p:sp>
       <p:sp>
         <p:nvSpPr>
-          <p:cNvPr id="47" name="text"/>
+          <p:cNvPr id="51" name="text"/>
           <p:cNvSpPr txBox="1"/>
           <p:nvPr/>
         </p:nvSpPr>
@@ -27362,7 +27506,7 @@
       </p:sp>
       <p:sp>
         <p:nvSpPr>
-          <p:cNvPr id="48" name="card"/>
+          <p:cNvPr id="52" name="card"/>
           <p:cNvSpPr/>
           <p:nvPr/>
         </p:nvSpPr>
@@ -27389,7 +27533,7 @@
       </p:sp>
       <p:sp>
         <p:nvSpPr>
-          <p:cNvPr id="49" name="text"/>
+          <p:cNvPr id="53" name="text"/>
           <p:cNvSpPr txBox="1"/>
           <p:nvPr/>
         </p:nvSpPr>
@@ -27425,7 +27569,7 @@
       </p:sp>
       <p:sp>
         <p:nvSpPr>
-          <p:cNvPr id="50" name="text"/>
+          <p:cNvPr id="54" name="text"/>
           <p:cNvSpPr txBox="1"/>
           <p:nvPr/>
         </p:nvSpPr>
@@ -27461,7 +27605,7 @@
       </p:sp>
       <p:sp>
         <p:nvSpPr>
-          <p:cNvPr id="51" name="card"/>
+          <p:cNvPr id="55" name="card"/>
           <p:cNvSpPr/>
           <p:nvPr/>
         </p:nvSpPr>
@@ -27488,7 +27632,7 @@
       </p:sp>
       <p:sp>
         <p:nvSpPr>
-          <p:cNvPr id="52" name="text"/>
+          <p:cNvPr id="56" name="text"/>
           <p:cNvSpPr txBox="1"/>
           <p:nvPr/>
         </p:nvSpPr>
@@ -27524,7 +27668,7 @@
       </p:sp>
       <p:sp>
         <p:nvSpPr>
-          <p:cNvPr id="53" name="text"/>
+          <p:cNvPr id="57" name="text"/>
           <p:cNvSpPr txBox="1"/>
           <p:nvPr/>
         </p:nvSpPr>
@@ -27560,7 +27704,7 @@
       </p:sp>
       <p:sp>
         <p:nvSpPr>
-          <p:cNvPr id="54" name="card"/>
+          <p:cNvPr id="58" name="card"/>
           <p:cNvSpPr/>
           <p:nvPr/>
         </p:nvSpPr>
@@ -27587,7 +27731,7 @@
       </p:sp>
       <p:sp>
         <p:nvSpPr>
-          <p:cNvPr id="55" name="text"/>
+          <p:cNvPr id="59" name="text"/>
           <p:cNvSpPr txBox="1"/>
           <p:nvPr/>
         </p:nvSpPr>
@@ -27623,7 +27767,7 @@
       </p:sp>
       <p:sp>
         <p:nvSpPr>
-          <p:cNvPr id="56" name="text"/>
+          <p:cNvPr id="60" name="text"/>
           <p:cNvSpPr txBox="1"/>
           <p:nvPr/>
         </p:nvSpPr>
@@ -27659,7 +27803,7 @@
       </p:sp>
       <p:sp>
         <p:nvSpPr>
-          <p:cNvPr id="57" name="card"/>
+          <p:cNvPr id="61" name="card"/>
           <p:cNvSpPr/>
           <p:nvPr/>
         </p:nvSpPr>
@@ -27686,7 +27830,7 @@
       </p:sp>
       <p:sp>
         <p:nvSpPr>
-          <p:cNvPr id="58" name="text"/>
+          <p:cNvPr id="62" name="text"/>
           <p:cNvSpPr txBox="1"/>
           <p:nvPr/>
         </p:nvSpPr>
@@ -27722,7 +27866,7 @@
       </p:sp>
       <p:sp>
         <p:nvSpPr>
-          <p:cNvPr id="59" name="text"/>
+          <p:cNvPr id="63" name="text"/>
           <p:cNvSpPr txBox="1"/>
           <p:nvPr/>
         </p:nvSpPr>
@@ -27758,7 +27902,7 @@
       </p:sp>
       <p:sp>
         <p:nvSpPr>
-          <p:cNvPr id="60" name="card"/>
+          <p:cNvPr id="64" name="card"/>
           <p:cNvSpPr/>
           <p:nvPr/>
         </p:nvSpPr>
@@ -27785,7 +27929,7 @@
       </p:sp>
       <p:sp>
         <p:nvSpPr>
-          <p:cNvPr id="61" name="text"/>
+          <p:cNvPr id="65" name="text"/>
           <p:cNvSpPr txBox="1"/>
           <p:nvPr/>
         </p:nvSpPr>
@@ -27821,7 +27965,7 @@
       </p:sp>
       <p:sp>
         <p:nvSpPr>
-          <p:cNvPr id="62" name="text"/>
+          <p:cNvPr id="66" name="text"/>
           <p:cNvSpPr txBox="1"/>
           <p:nvPr/>
         </p:nvSpPr>
@@ -29587,7 +29731,7 @@
                           <a:ea typeface="Arial" pitchFamily="34" charset="-122"/>
                           <a:cs typeface="Arial" pitchFamily="34" charset="-120"/>
                         </a:rPr>
-                        <a:t>Recommendation; Rollover Analysis; PTE 2020-02 Documentation (four delivery dates, impartial conduct attestation)</a:t>
+                        <a:t>Recommendation; Rollover Analysis; PTE 2020-02 Documentation (three delivery dates, impartial conduct attestation)</a:t>
                       </a:r>
                       <a:endParaRPr lang="en-US" sz="950" dirty="0">
                         <a:latin typeface="Arial" charset="0"/>
@@ -30154,7 +30298,7 @@
                   <a:schemeClr val="tx1"/>
                 </a:solidFill>
               </a:rPr>
-              <a:t>Vested balance $640,000; eligible for distribution</a:t>
+              <a:t>Vested balance $640,000; a Participant Retail Hand-Off opened on separation</a:t>
             </a:r>
             <a:endParaRPr lang="en-US" sz="950" dirty="0"/>
           </a:p>
@@ -31935,7 +32079,7 @@
                   <a:schemeClr val="bg2"/>
                 </a:solidFill>
               </a:rPr>
-              <a:t>Rollover Amount is a derived copy of the 16 vested balance, row rule stated. The four PTE 2020-02 delivery dates are four named attributes, each citing the exemption.</a:t>
+              <a:t>Rollover Amount is a derived copy of the 16 vested balance, row rule stated. The PTE 2020-02 documentation is four named attributes: three delivery dates (acknowledgment, services and conflicts disclosure, reasons) and the impartial conduct attestation, each citing the exemption.</a:t>
             </a:r>
             <a:endParaRPr lang="en-US" sz="1000" dirty="0"/>
           </a:p>
@@ -32859,7 +33003,7 @@
                   <a:schemeClr val="tx2"/>
                 </a:solidFill>
               </a:rPr>
-              <a:t>Enterprise Party &amp; Role Master</a:t>
+              <a:t>Client, Household &amp; Party Master</a:t>
             </a:r>
             <a:endParaRPr lang="en-US" sz="950" dirty="0"/>
           </a:p>
@@ -33055,7 +33199,7 @@
                   <a:schemeClr val="tx1"/>
                 </a:solidFill>
               </a:rPr>
-              <a:t>Separation date, vested balance $640,000, distribution request</a:t>
+              <a:t>Separation event, vested balance $640,000, the Participant Retail Hand-Off and the distribution request</a:t>
             </a:r>
             <a:endParaRPr lang="en-US" sz="850" dirty="0"/>
           </a:p>
@@ -33215,7 +33359,7 @@
                   <a:schemeClr val="tx1"/>
                 </a:solidFill>
               </a:rPr>
-              <a:t>Recommendation, rationale, alternatives; Rollover Analysis; PTE 2020-02 Documentation. DQ rule 4: the four delivery dates populated on every completed analysis</a:t>
+              <a:t>Recommendation, rationale, alternatives; Rollover Analysis; PTE 2020-02 Documentation. DQ rule 4: three delivery dates and the attestation populated on every presented analysis</a:t>
             </a:r>
             <a:endParaRPr lang="en-US" sz="850" dirty="0"/>
           </a:p>
@@ -34098,7 +34242,7 @@
                   <a:schemeClr val="bg2"/>
                 </a:solidFill>
               </a:rPr>
-              <a:t>Published preliminary, then locked; changes after lock arrive only as an approved restatement.</a:t>
+              <a:t>Daily flash, then the monthly locked snapshot; changes after lock arrive only as an approved restatement.</a:t>
             </a:r>
             <a:endParaRPr lang="en-US" sz="950" dirty="0"/>
           </a:p>
@@ -34925,7 +35069,7 @@
                   <a:schemeClr val="tx1"/>
                 </a:solidFill>
               </a:rPr>
-              <a:t>Every rollover recommendation with its analysis, options compared, fiduciary status basis, the four PTE delivery dates and the receiving IRA. Defines PTE Documentation Gap Flag. Feeds the 08 annual retrospective review.</a:t>
+              <a:t>Every rollover recommendation with its analysis, options compared, fiduciary status basis, the three PTE delivery dates, the attestation and the receiving IRA. Defines PTE Documentation Gap Flag, once. Supplies the population of the 08 annual retrospective review.</a:t>
             </a:r>
             <a:endParaRPr lang="en-US" sz="850" dirty="0"/>
           </a:p>
@@ -35096,7 +35240,7 @@
                   <a:schemeClr val="tx1"/>
                 </a:solidFill>
               </a:rPr>
-              <a:t>Separated participants, balances eligible, rollovers into the direct business and the share advised: reads Net Inter-Channel Transfers and Advised Assets from DP-008, never recalculates them.</a:t>
+              <a:t>Separations, Rollovers Into the Direct Business and Direct Business Rollover Share, by plan and receiving line: operational funnel values. Reads Net Inter-Channel Transfers from DP-008 and publishes the residual, never a second certified number.</a:t>
             </a:r>
             <a:endParaRPr lang="en-US" sz="850" dirty="0"/>
           </a:p>
@@ -37516,7 +37660,7 @@
                   <a:schemeClr val="tx1"/>
                 </a:solidFill>
               </a:rPr>
-              <a:t>Rollover Capture Rate; Separated Participants; Balances Eligible</a:t>
+              <a:t>Separations; Rollovers Into the Direct Business; Direct Business Rollover Share</a:t>
             </a:r>
             <a:endParaRPr lang="en-US" sz="950" dirty="0"/>
           </a:p>
@@ -37552,7 +37696,7 @@
                   <a:schemeClr val="accent6"/>
                 </a:solidFill>
               </a:rPr>
-              <a:t>Source: DP-467. Reads the transfer and advised-asset metrics from SM-20 by reference.</a:t>
+              <a:t>Source: DP-467. Net Inter-Channel Transfers referenced from SM-20; the residual between the two is published as its own measure.</a:t>
             </a:r>
             <a:endParaRPr lang="en-US" sz="850" dirty="0"/>
           </a:p>
@@ -37687,7 +37831,7 @@
                   <a:schemeClr val="tx1"/>
                 </a:solidFill>
               </a:rPr>
-              <a:t>PTE Documentation Gap (count by channel, advisor, month)</a:t>
+              <a:t>Rollovers Without PTE 2020-02 Documentation; PTE Documentation Gap Rate %</a:t>
             </a:r>
             <a:endParaRPr lang="en-US" sz="950" dirty="0"/>
           </a:p>
@@ -37723,7 +37867,7 @@
                   <a:schemeClr val="accent6"/>
                 </a:solidFill>
               </a:rPr>
-              <a:t>Source: DP-335, DP-303. Counts by dimension only; account and client grain stay in the restricted personal-data view.</a:t>
+              <a:t>Source: DP-335 (the flag is defined there, once) and DP-303. Rows for supervision and advice leadership; aggregates with cells under 10 suppressed for everyone else.</a:t>
             </a:r>
             <a:endParaRPr lang="en-US" sz="850" dirty="0"/>
           </a:p>
@@ -38326,7 +38470,7 @@
                   <a:schemeClr val="tx1"/>
                 </a:solidFill>
               </a:rPr>
-              <a:t>The capture rate joins separated participants to rollovers by participant. A row-to-row join would double count a participant with two distributions.</a:t>
+              <a:t>The rollover share joins the quarter's separated participants to their rollovers by participant. A row-to-row join would double count a participant with two distributions.</a:t>
             </a:r>
             <a:endParaRPr lang="en-US" sz="850" dirty="0"/>
           </a:p>
@@ -39288,7 +39432,7 @@
                   <a:schemeClr val="bg2"/>
                 </a:solidFill>
               </a:rPr>
-              <a:t>$2.1bn eligible balances</a:t>
+              <a:t>Separations, by plan (SM-26)</a:t>
             </a:r>
             <a:endParaRPr lang="en-US" sz="900" dirty="0"/>
           </a:p>
@@ -39396,7 +39540,7 @@
                   <a:schemeClr val="bg2"/>
                 </a:solidFill>
               </a:rPr>
-              <a:t>capture rate 29%</a:t>
+              <a:t>42% of $1.46bn paid out: Direct Business Rollover Share</a:t>
             </a:r>
             <a:endParaRPr lang="en-US" sz="900" dirty="0"/>
           </a:p>
@@ -39432,7 +39576,7 @@
                   <a:schemeClr val="bg1"/>
                 </a:solidFill>
               </a:rPr>
-              <a:t>$380m</a:t>
+              <a:t>$598m</a:t>
             </a:r>
             <a:endParaRPr lang="en-US" sz="2600" dirty="0"/>
           </a:p>
@@ -39468,7 +39612,7 @@
                   <a:schemeClr val="bg1"/>
                 </a:solidFill>
               </a:rPr>
-              <a:t>of which advised</a:t>
+              <a:t>certified workplace-to-direct transfers</a:t>
             </a:r>
             <a:endParaRPr lang="en-US" sz="1000" dirty="0"/>
           </a:p>
@@ -39504,7 +39648,7 @@
                   <a:schemeClr val="bg2"/>
                 </a:solidFill>
               </a:rPr>
-              <a:t>Net Inter-Channel Transfers into advice</a:t>
+              <a:t>Net Inter-Channel Transfers (SM-20); $380m into the advice channel</a:t>
             </a:r>
             <a:endParaRPr lang="en-US" sz="900" dirty="0"/>
           </a:p>
@@ -39612,7 +39756,7 @@
                   <a:schemeClr val="bg2"/>
                 </a:solidFill>
               </a:rPr>
-              <a:t>presented in the quarter</a:t>
+              <a:t>presented in the quarter (SM-22)</a:t>
             </a:r>
             <a:endParaRPr lang="en-US" sz="900" dirty="0"/>
           </a:p>
@@ -39684,7 +39828,7 @@
                   <a:schemeClr val="bg1"/>
                 </a:solidFill>
               </a:rPr>
-              <a:t>missing PTE 2020-02 documents</a:t>
+              <a:t>without PTE 2020-02 documentation</a:t>
             </a:r>
             <a:endParaRPr lang="en-US" sz="1000" dirty="0"/>
           </a:p>
@@ -39720,7 +39864,7 @@
                   <a:schemeClr val="bg2"/>
                 </a:solidFill>
               </a:rPr>
-              <a:t>1.9% of recommendations</a:t>
+              <a:t>PTE Documentation Gap Rate 1.9%</a:t>
             </a:r>
             <a:endParaRPr lang="en-US" sz="900" dirty="0"/>
           </a:p>
@@ -39844,7 +39988,7 @@
                   <a:schemeClr val="tx1"/>
                 </a:solidFill>
               </a:rPr>
-              <a:t>"Rollover capture rate this quarter, and how many rollover files are incomplete?" resolves to SM-26 Rollover Capture Rate and SM-22 PTE Documentation Gap, both traced to their products and owners in two clicks.</a:t>
+              <a:t>"What share of this quarter's separated participants rolled into us, and how many rollover files are incomplete?" resolves to SM-26 Direct Business Rollover Share and SM-22 Rollovers Without PTE 2020-02 Documentation, both traced to their products and owners in two clicks.</a:t>
             </a:r>
             <a:endParaRPr lang="en-US" sz="950" dirty="0"/>
           </a:p>
@@ -40092,7 +40236,7 @@
                   <a:schemeClr val="tx1"/>
                 </a:solidFill>
               </a:rPr>
-              <a:t>DP-335 shows the recommendation, the analysis, the three options compared, the fiduciary status basis, and all four PTE 2020-02 delivery dates. The annual retrospective review reads the same rows.</a:t>
+              <a:t>DP-335 shows the recommendation, the analysis, the three options compared, the fiduciary status basis, the three PTE 2020-02 delivery dates and the impartial conduct attestation. The annual retrospective review reads the same rows.</a:t>
             </a:r>
             <a:endParaRPr lang="en-US" sz="950" dirty="0"/>
           </a:p>
@@ -40335,7 +40479,7 @@
                   <a:schemeClr val="tx1"/>
                 </a:solidFill>
               </a:rPr>
-              <a:t>Not answerable today. The link from a participant's retail hand-off to the campaign that reached them is a registered work item on the flow product, with an owner, a proposed fix and the products affected. The semantic model lists the question as one it cannot answer. No team builds a side table; the owning domain adds the key once.</a:t>
+              <a:t>Approximately, not exactly. The funding flow is attributed to a campaign under the campaign-window rule; the marketing lead is matched to the advice engagement by party within 90 days. The exact link is missing twice, and the model says so: Advice &amp; Planning lists lead-to-engagement among the questions it cannot answer, and the click-to-campaign join is registered gap GAP-04-001 (04, high, Head of Marketing Operations, six products affected). No side table: the owning domain adds the reference once.</a:t>
             </a:r>
             <a:endParaRPr lang="en-US" sz="1000" dirty="0"/>
           </a:p>
@@ -41041,7 +41185,7 @@
                           <a:ea typeface="Arial" pitchFamily="34" charset="-122"/>
                           <a:cs typeface="Arial" pitchFamily="34" charset="-120"/>
                         </a:rPr>
-                        <a:t>DP-240 household, DP-094 participant, DP-303 advice record, DP-093 IRA, DP-300 holdings, DP-006 flow, DP-008 certified transfer</a:t>
+                        <a:t>DP-240 household, DP-094 participant, DP-430 hand-off, DP-303 advice record, DP-093 IRA, DP-300 holdings, DP-006 flow, DP-008 certified transfer</a:t>
                       </a:r>
                       <a:endParaRPr lang="en-US" sz="900" dirty="0">
                         <a:latin typeface="Arial" charset="0"/>
@@ -41453,7 +41597,7 @@
                           <a:ea typeface="Arial" pitchFamily="34" charset="-122"/>
                           <a:cs typeface="Arial" pitchFamily="34" charset="-120"/>
                         </a:rPr>
-                        <a:t>SM-26 capture rate, SM-22 documentation gap, SM-20 certified transfers and advised assets</a:t>
+                        <a:t>SM-26 rollover share, SM-22 rollovers without PTE documentation, SM-20 certified transfers and advised assets</a:t>
                       </a:r>
                       <a:endParaRPr lang="en-US" sz="900" dirty="0">
                         <a:latin typeface="Arial" charset="0"/>
@@ -46326,7 +46470,7 @@
                   <a:schemeClr val="accent1"/>
                 </a:solidFill>
               </a:rPr>
-              <a:t>Household Membership</a:t>
+              <a:t>Households &amp; Relationships</a:t>
             </a:r>
             <a:endParaRPr lang="en-US" sz="1400" dirty="0"/>
           </a:p>
@@ -46362,7 +46506,7 @@
                   <a:schemeClr val="tx2"/>
                 </a:solidFill>
               </a:rPr>
-              <a:t>Households as parties of type Household, with effective-dated membership and party relationships</a:t>
+              <a:t>Client Households, their effective-dated membership and the relationships between parties</a:t>
             </a:r>
             <a:endParaRPr lang="en-US" sz="1100" dirty="0"/>
           </a:p>
@@ -46497,7 +46641,7 @@
                   <a:schemeClr val="accent1"/>
                 </a:solidFill>
               </a:rPr>
-              <a:t>Household</a:t>
+              <a:t>Client Household</a:t>
             </a:r>
             <a:endParaRPr lang="en-US" sz="1400" dirty="0"/>
           </a:p>
@@ -46533,7 +46677,7 @@
                   <a:schemeClr val="tx2"/>
                 </a:solidFill>
               </a:rPr>
-              <a:t>Grain: one Client Household. Kind: Attribute Group of a Household party. Key: PTY-HH-</a:t>
+              <a:t>Grain: one Client Household, a party of type Household. Key: PTY-HH-. Attribute group: Household</a:t>
             </a:r>
             <a:endParaRPr lang="en-US" sz="1100" dirty="0"/>
           </a:p>
@@ -46983,7 +47127,7 @@
                   <a:schemeClr val="bg1"/>
                 </a:solidFill>
               </a:rPr>
-              <a:t>Household</a:t>
+              <a:t>Client Household</a:t>
             </a:r>
             <a:endParaRPr lang="en-US" sz="1100" dirty="0"/>
           </a:p>
@@ -49455,7 +49599,7 @@
         <p:spPr>
           <a:xfrm>
             <a:off x="7296912" y="2811780"/>
-            <a:ext cx="2103120" cy="2107692"/>
+            <a:ext cx="2103120" cy="2249424"/>
           </a:xfrm>
           <a:prstGeom prst="roundRect">
             <a:avLst>
@@ -49518,7 +49662,7 @@
         <p:spPr>
           <a:xfrm>
             <a:off x="7424928" y="3195828"/>
-            <a:ext cx="1847088" cy="1650492"/>
+            <a:ext cx="1847088" cy="1792224"/>
           </a:xfrm>
           <a:prstGeom prst="rect">
             <a:avLst/>
@@ -49661,7 +49805,7 @@
                   <a:schemeClr val="tx1"/>
                 </a:solidFill>
               </a:rPr>
-              <a:t>42 Corporate Communications</a:t>
+              <a:t>42 Corporate Communications &amp; Public Affairs</a:t>
             </a:r>
             <a:endParaRPr lang="en-US" sz="850" dirty="0"/>
           </a:p>
@@ -50670,7 +50814,7 @@
                   <a:schemeClr val="tx1"/>
                 </a:solidFill>
               </a:rPr>
-              <a:t>91 enterprise lists replace 243 local ones, so channel, status and frequency mean the same thing everywhere.</a:t>
+              <a:t>91 enterprise code lists shared by every domain, so channel, status and frequency mean the same thing everywhere.</a:t>
             </a:r>
             <a:endParaRPr lang="en-US" sz="1150" dirty="0"/>
           </a:p>
@@ -50830,7 +50974,7 @@
                   <a:schemeClr val="tx1"/>
                 </a:solidFill>
               </a:rPr>
-              <a:t>546 numbered decisions, each with the issue, the resolution, the rationale and the owner role. Every ownership change traces to one.</a:t>
+              <a:t>551 numbered decisions, each with the issue, the resolution, the rationale and the owner role. Every ownership change traces to one.</a:t>
             </a:r>
             <a:endParaRPr lang="en-US" sz="1150" dirty="0"/>
           </a:p>

--- a/wm/Wealth_Manager_Foundational_Talktrack.pptx
+++ b/wm/Wealth_Manager_Foundational_Talktrack.pptx
@@ -142,14 +142,14 @@
   <p:extLst>
     <p:ext uri="{521415D9-36F7-43E2-AB2F-B90AF26B5E84}">
       <p14:sectionLst xmlns:p14="http://schemas.microsoft.com/office/powerpoint/2010/main">
-        <p14:section name="Opening" id="{c48a73dc-22ec-836d-11ba-ccdb8a267934}">
+        <p14:section name="Opening" id="{aaf57032-c62a-cfc5-c681-d135585300b0}">
           <p14:sldIdLst>
             <p14:sldId id="256"/>
             <p14:sldId id="257"/>
             <p14:sldId id="258"/>
           </p14:sldIdLst>
         </p14:section>
-        <p14:section name="1 Data foundations" id="{e5e27637-25ca-800b-d44e-cf0e8fae101d}">
+        <p14:section name="1 Data foundations" id="{ecd2d6fd-b93e-207d-cd0e-c5f064dbcf58}">
           <p14:sldIdLst>
             <p14:sldId id="259"/>
             <p14:sldId id="260"/>
@@ -158,7 +158,7 @@
             <p14:sldId id="263"/>
           </p14:sldIdLst>
         </p14:section>
-        <p14:section name="2 Management overview" id="{76f731ad-57ad-d8f6-f130-5912d6113543}">
+        <p14:section name="2 Management overview" id="{166eae1f-33b8-1865-1033-ff052b0b67f4}">
           <p14:sldIdLst>
             <p14:sldId id="264"/>
             <p14:sldId id="265"/>
@@ -170,7 +170,7 @@
             <p14:sldId id="271"/>
           </p14:sldIdLst>
         </p14:section>
-        <p14:section name="3 The wealth manager" id="{f1731cd8-356b-3959-fd64-df55d69b6591}">
+        <p14:section name="3 The wealth manager" id="{d3edac6e-b5a7-ae1c-d143-45998399d423}">
           <p14:sldIdLst>
             <p14:sldId id="272"/>
             <p14:sldId id="273"/>
@@ -182,7 +182,7 @@
             <p14:sldId id="279"/>
           </p14:sldIdLst>
         </p14:section>
-        <p14:section name="4 One question, end to end" id="{9b8e7c05-eb68-4009-2fed-a48777b97b31}">
+        <p14:section name="4 One question, end to end" id="{37f708fe-4cf4-a968-7828-bb22d0078452}">
           <p14:sldIdLst>
             <p14:sldId id="280"/>
             <p14:sldId id="281"/>
@@ -194,7 +194,7 @@
             <p14:sldId id="287"/>
           </p14:sldIdLst>
         </p14:section>
-        <p14:section name="5 What this means for you" id="{8f7293b9-57e9-8855-92a7-c2c81b95cd78}">
+        <p14:section name="5 What this means for you" id="{6aafd562-5f2e-530f-6e85-4ef190d54620}">
           <p14:sldIdLst>
             <p14:sldId id="288"/>
             <p14:sldId id="289"/>
@@ -3395,7 +3395,7 @@
             <a:r>
               <a:rPr lang="en-US" dirty="0"/>
               <a:t>The taxonomy has four levels and only four. A Data Domain is a business area that produces and maintains a set of concepts. Inside it, a Data Family groups related objects. A Data Business Object is one thing with its own identity and a stated grain, what one row represents. And a Data Business Attribute is one field with one definition.
-Follow one attribute down. Domain 02 Client &amp; Household. Family: Households &amp; Relationships. Object: Client Household, a party of type Household, and the grain says so. Attribute: Primary Member, the member designated as the household's primary contact. It has a data type, a reference to the party master, an example value, a source we aligned it to, and a personal-data flag.
+Follow one attribute down. Domain 02 Client &amp; Household. Family: Households &amp; Relationships. Object: Household, the Client Household, a party of type Household, and the grain says so. Attribute: Primary Member, the member designated as the household's primary contact. It has a data type, a reference to the party master, an example value, a source we aligned it to, and a personal-data flag.
 Every one of the thirteen thousand attributes carries that same record. That uniformity is what lets the later layers be validated by machine rather than by meeting.</a:t>
             </a:r>
             <a:endParaRPr lang="en-US" dirty="0"/>
@@ -46641,7 +46641,7 @@
                   <a:schemeClr val="accent1"/>
                 </a:solidFill>
               </a:rPr>
-              <a:t>Client Household</a:t>
+              <a:t>Household</a:t>
             </a:r>
             <a:endParaRPr lang="en-US" sz="1400" dirty="0"/>
           </a:p>
@@ -46677,7 +46677,7 @@
                   <a:schemeClr val="tx2"/>
                 </a:solidFill>
               </a:rPr>
-              <a:t>Grain: one Client Household, a party of type Household. Key: PTY-HH-. Attribute group: Household</a:t>
+              <a:t>The Client Household: a party of type Household, key PTY-HH-. Carried as an attribute group of Party, as Individual and Organization are</a:t>
             </a:r>
             <a:endParaRPr lang="en-US" sz="1100" dirty="0"/>
           </a:p>
@@ -47127,7 +47127,7 @@
                   <a:schemeClr val="bg1"/>
                 </a:solidFill>
               </a:rPr>
-              <a:t>Client Household</a:t>
+              <a:t>Household</a:t>
             </a:r>
             <a:endParaRPr lang="en-US" sz="1100" dirty="0"/>
           </a:p>
